--- a/output/part2.pptx
+++ b/output/part2.pptx
@@ -17,8 +17,8 @@
   <p:notesMasterIdLst>
     <p:notesMasterId r:id="rId10"/>
   </p:notesMasterIdLst>
-  <p:sldSz cx="12192000" cy="6858000"/>
-  <p:notesSz cx="6858000" cy="12192000"/>
+  <p:sldSz cx="9144000" cy="5029200"/>
+  <p:notesSz cx="5029200" cy="9144000"/>
   <p:defaultTextStyle>
     <a:lvl1pPr marL="0" algn="l" defTabSz="914400" rtl="0" eaLnBrk="1" latinLnBrk="0" hangingPunct="1">
       <a:defRPr sz="1800" kern="1200">

--- a/output/part2.pptx
+++ b/output/part2.pptx
@@ -2030,7 +2030,7 @@
         <p:spPr>
           <a:xfrm>
             <a:off x="1280160" y="950976"/>
-            <a:ext cx="201168" cy="0"/>
+            <a:ext cx="201168" cy="9144"/>
           </a:xfrm>
           <a:prstGeom prst="line">
             <a:avLst/>
@@ -2054,7 +2054,7 @@
         <p:spPr>
           <a:xfrm>
             <a:off x="1280160" y="1453896"/>
-            <a:ext cx="201168" cy="0"/>
+            <a:ext cx="201168" cy="9144"/>
           </a:xfrm>
           <a:prstGeom prst="line">
             <a:avLst/>
@@ -2078,7 +2078,7 @@
         <p:spPr>
           <a:xfrm>
             <a:off x="1280160" y="1956816"/>
-            <a:ext cx="201168" cy="0"/>
+            <a:ext cx="201168" cy="9144"/>
           </a:xfrm>
           <a:prstGeom prst="line">
             <a:avLst/>
@@ -3065,7 +3065,7 @@
         <p:spPr>
           <a:xfrm>
             <a:off x="2971800" y="950976"/>
-            <a:ext cx="320040" cy="0"/>
+            <a:ext cx="320040" cy="9144"/>
           </a:xfrm>
           <a:prstGeom prst="line">
             <a:avLst/>
@@ -3089,7 +3089,7 @@
         <p:spPr>
           <a:xfrm>
             <a:off x="2971800" y="1664208"/>
-            <a:ext cx="320040" cy="0"/>
+            <a:ext cx="320040" cy="9144"/>
           </a:xfrm>
           <a:prstGeom prst="line">
             <a:avLst/>
@@ -3113,7 +3113,7 @@
         <p:spPr>
           <a:xfrm>
             <a:off x="2971800" y="2377440"/>
-            <a:ext cx="320040" cy="0"/>
+            <a:ext cx="320040" cy="9144"/>
           </a:xfrm>
           <a:prstGeom prst="line">
             <a:avLst/>
@@ -3285,7 +3285,7 @@
         <p:spPr>
           <a:xfrm>
             <a:off x="4846320" y="950976"/>
-            <a:ext cx="685800" cy="0"/>
+            <a:ext cx="685800" cy="9144"/>
           </a:xfrm>
           <a:prstGeom prst="line">
             <a:avLst/>
@@ -3309,7 +3309,7 @@
         <p:spPr>
           <a:xfrm>
             <a:off x="4846320" y="1664208"/>
-            <a:ext cx="685800" cy="0"/>
+            <a:ext cx="685800" cy="9144"/>
           </a:xfrm>
           <a:prstGeom prst="line">
             <a:avLst/>
@@ -3333,7 +3333,7 @@
         <p:spPr>
           <a:xfrm>
             <a:off x="4846320" y="2377440"/>
-            <a:ext cx="685800" cy="0"/>
+            <a:ext cx="685800" cy="9144"/>
           </a:xfrm>
           <a:prstGeom prst="line">
             <a:avLst/>
@@ -4327,7 +4327,7 @@
         <p:spPr>
           <a:xfrm>
             <a:off x="1371600" y="1325880"/>
-            <a:ext cx="45720" cy="0"/>
+            <a:ext cx="45720" cy="9144"/>
           </a:xfrm>
           <a:prstGeom prst="line">
             <a:avLst/>
@@ -4417,7 +4417,7 @@
         <p:spPr>
           <a:xfrm>
             <a:off x="2423160" y="1252728"/>
-            <a:ext cx="45720" cy="0"/>
+            <a:ext cx="45720" cy="9144"/>
           </a:xfrm>
           <a:prstGeom prst="line">
             <a:avLst/>
@@ -4507,7 +4507,7 @@
         <p:spPr>
           <a:xfrm>
             <a:off x="2423160" y="2029968"/>
-            <a:ext cx="45720" cy="0"/>
+            <a:ext cx="45720" cy="9144"/>
           </a:xfrm>
           <a:prstGeom prst="line">
             <a:avLst/>
@@ -4570,7 +4570,7 @@
         <p:spPr>
           <a:xfrm>
             <a:off x="4572000" y="502920"/>
-            <a:ext cx="0" cy="4480560"/>
+            <a:ext cx="9144" cy="4480560"/>
           </a:xfrm>
           <a:prstGeom prst="line">
             <a:avLst/>
@@ -5685,7 +5685,7 @@
         <p:spPr>
           <a:xfrm>
             <a:off x="2331720" y="1225296"/>
-            <a:ext cx="713232" cy="0"/>
+            <a:ext cx="713232" cy="9144"/>
           </a:xfrm>
           <a:prstGeom prst="line">
             <a:avLst/>
@@ -5748,7 +5748,7 @@
         <p:spPr>
           <a:xfrm>
             <a:off x="2331720" y="1956816"/>
-            <a:ext cx="713232" cy="0"/>
+            <a:ext cx="713232" cy="9144"/>
           </a:xfrm>
           <a:prstGeom prst="line">
             <a:avLst/>
@@ -6015,7 +6015,7 @@
         <p:spPr>
           <a:xfrm>
             <a:off x="4800600" y="1554480"/>
-            <a:ext cx="228600" cy="0"/>
+            <a:ext cx="228600" cy="9144"/>
           </a:xfrm>
           <a:prstGeom prst="line">
             <a:avLst/>
@@ -6435,7 +6435,7 @@
         <p:spPr>
           <a:xfrm>
             <a:off x="4800600" y="1097280"/>
-            <a:ext cx="365760" cy="0"/>
+            <a:ext cx="365760" cy="9144"/>
           </a:xfrm>
           <a:prstGeom prst="line">
             <a:avLst/>
@@ -6459,7 +6459,7 @@
         <p:spPr>
           <a:xfrm>
             <a:off x="4800600" y="1645920"/>
-            <a:ext cx="365760" cy="0"/>
+            <a:ext cx="365760" cy="9144"/>
           </a:xfrm>
           <a:prstGeom prst="line">
             <a:avLst/>
@@ -6483,7 +6483,7 @@
         <p:spPr>
           <a:xfrm>
             <a:off x="4800600" y="2194560"/>
-            <a:ext cx="365760" cy="0"/>
+            <a:ext cx="365760" cy="9144"/>
           </a:xfrm>
           <a:prstGeom prst="line">
             <a:avLst/>
@@ -9110,7 +9110,7 @@
         <p:spPr>
           <a:xfrm>
             <a:off x="1280160" y="1444752"/>
-            <a:ext cx="365760" cy="0"/>
+            <a:ext cx="365760" cy="9144"/>
           </a:xfrm>
           <a:prstGeom prst="line">
             <a:avLst/>
@@ -9173,7 +9173,7 @@
         <p:spPr>
           <a:xfrm>
             <a:off x="2606040" y="1444752"/>
-            <a:ext cx="365760" cy="0"/>
+            <a:ext cx="365760" cy="9144"/>
           </a:xfrm>
           <a:prstGeom prst="line">
             <a:avLst/>
@@ -9647,7 +9647,7 @@
         <p:spPr>
           <a:xfrm>
             <a:off x="6172200" y="1325880"/>
-            <a:ext cx="548640" cy="0"/>
+            <a:ext cx="548640" cy="9144"/>
           </a:xfrm>
           <a:prstGeom prst="line">
             <a:avLst/>
@@ -9858,7 +9858,7 @@
         <p:spPr>
           <a:xfrm>
             <a:off x="8001000" y="1115568"/>
-            <a:ext cx="182880" cy="0"/>
+            <a:ext cx="182880" cy="9144"/>
           </a:xfrm>
           <a:prstGeom prst="line">
             <a:avLst/>
@@ -9984,7 +9984,7 @@
         <p:spPr>
           <a:xfrm>
             <a:off x="8001000" y="1572768"/>
-            <a:ext cx="182880" cy="0"/>
+            <a:ext cx="182880" cy="9144"/>
           </a:xfrm>
           <a:prstGeom prst="line">
             <a:avLst/>
@@ -10110,7 +10110,7 @@
         <p:spPr>
           <a:xfrm>
             <a:off x="8001000" y="2029968"/>
-            <a:ext cx="182880" cy="0"/>
+            <a:ext cx="182880" cy="9144"/>
           </a:xfrm>
           <a:prstGeom prst="line">
             <a:avLst/>
@@ -11145,7 +11145,7 @@
         <p:spPr>
           <a:xfrm>
             <a:off x="1554480" y="987552"/>
-            <a:ext cx="0" cy="146304"/>
+            <a:ext cx="9144" cy="146304"/>
           </a:xfrm>
           <a:prstGeom prst="line">
             <a:avLst/>
@@ -11310,7 +11310,7 @@
         <p:spPr>
           <a:xfrm>
             <a:off x="1554480" y="1490472"/>
-            <a:ext cx="0" cy="146304"/>
+            <a:ext cx="9144" cy="146304"/>
           </a:xfrm>
           <a:prstGeom prst="line">
             <a:avLst/>
@@ -11628,7 +11628,7 @@
         <p:spPr>
           <a:xfrm>
             <a:off x="1554480" y="2084832"/>
-            <a:ext cx="0" cy="146304"/>
+            <a:ext cx="9144" cy="146304"/>
           </a:xfrm>
           <a:prstGeom prst="line">
             <a:avLst/>
@@ -12150,7 +12150,7 @@
         <p:spPr>
           <a:xfrm>
             <a:off x="1554480" y="2679192"/>
-            <a:ext cx="0" cy="146304"/>
+            <a:ext cx="9144" cy="146304"/>
           </a:xfrm>
           <a:prstGeom prst="line">
             <a:avLst/>

--- a/output/part2.pptx
+++ b/output/part2.pptx
@@ -1480,7 +1480,7 @@
     <p:bg>
       <p:bgPr>
         <a:solidFill>
-          <a:srgbClr val="0D1117"/>
+          <a:srgbClr val="FFFDF8"/>
         </a:solidFill>
       </p:bgPr>
     </p:bg>
@@ -1513,11 +1513,11 @@
             <a:avLst/>
           </a:prstGeom>
           <a:solidFill>
-            <a:srgbClr val="161B22"/>
+            <a:srgbClr val="F5F1EB"/>
           </a:solidFill>
           <a:ln w="6350">
             <a:solidFill>
-              <a:srgbClr val="30363D"/>
+              <a:srgbClr val="D6CCBF"/>
             </a:solidFill>
             <a:prstDash val="solid"/>
           </a:ln>
@@ -1538,11 +1538,11 @@
             <a:avLst/>
           </a:prstGeom>
           <a:solidFill>
-            <a:srgbClr val="6E40C9"/>
+            <a:srgbClr val="8B6AB5"/>
           </a:solidFill>
           <a:ln w="12700">
             <a:solidFill>
-              <a:srgbClr val="6E40C9"/>
+              <a:srgbClr val="8B6AB5"/>
             </a:solidFill>
             <a:prstDash val="solid"/>
           </a:ln>
@@ -1575,13 +1575,13 @@
             <a:r>
               <a:rPr lang="en-US" sz="1600" b="1" dirty="0">
                 <a:solidFill>
-                  <a:srgbClr val="E6EDF3"/>
-                </a:solidFill>
-                <a:latin typeface="Calibri" pitchFamily="34" charset="0"/>
-                <a:ea typeface="Calibri" pitchFamily="34" charset="-122"/>
-                <a:cs typeface="Calibri" pitchFamily="34" charset="-120"/>
-              </a:rPr>
-              <a:t>Load Balancer：流量分發的核心元件</a:t>
+                  <a:srgbClr val="2D2926"/>
+                </a:solidFill>
+                <a:latin typeface="Calibri" pitchFamily="34" charset="0"/>
+                <a:ea typeface="Calibri" pitchFamily="34" charset="-122"/>
+                <a:cs typeface="Calibri" pitchFamily="34" charset="-120"/>
+              </a:rPr>
+              <a:t>Load Balancer: Core Traffic Distribution Component</a:t>
             </a:r>
             <a:endParaRPr lang="en-US" sz="1600" dirty="0"/>
           </a:p>
@@ -1614,13 +1614,13 @@
             <a:r>
               <a:rPr lang="en-US" sz="750" dirty="0">
                 <a:solidFill>
-                  <a:srgbClr val="8B949E"/>
-                </a:solidFill>
-                <a:latin typeface="Calibri" pitchFamily="34" charset="0"/>
-                <a:ea typeface="Calibri" pitchFamily="34" charset="-122"/>
-                <a:cs typeface="Calibri" pitchFamily="34" charset="-120"/>
-              </a:rPr>
-              <a:t>複雜度  5/10</a:t>
+                  <a:srgbClr val="8A8078"/>
+                </a:solidFill>
+                <a:latin typeface="Calibri" pitchFamily="34" charset="0"/>
+                <a:ea typeface="Calibri" pitchFamily="34" charset="-122"/>
+                <a:cs typeface="Calibri" pitchFamily="34" charset="-120"/>
+              </a:rPr>
+              <a:t>Complexity  5/10</a:t>
             </a:r>
             <a:endParaRPr lang="en-US" sz="750" dirty="0"/>
           </a:p>
@@ -1641,11 +1641,11 @@
             <a:avLst/>
           </a:prstGeom>
           <a:solidFill>
-            <a:srgbClr val="252D38"/>
+            <a:srgbClr val="D6CCBF"/>
           </a:solidFill>
           <a:ln w="12700">
             <a:solidFill>
-              <a:srgbClr val="252D38"/>
+              <a:srgbClr val="D6CCBF"/>
             </a:solidFill>
             <a:prstDash val="solid"/>
           </a:ln>
@@ -1666,11 +1666,11 @@
             <a:avLst/>
           </a:prstGeom>
           <a:solidFill>
-            <a:srgbClr val="D29922"/>
+            <a:srgbClr val="B8892C"/>
           </a:solidFill>
           <a:ln w="12700">
             <a:solidFill>
-              <a:srgbClr val="D29922"/>
+              <a:srgbClr val="B8892C"/>
             </a:solidFill>
             <a:prstDash val="solid"/>
           </a:ln>
@@ -1703,13 +1703,13 @@
             <a:r>
               <a:rPr lang="en-US" sz="850" dirty="0">
                 <a:solidFill>
-                  <a:srgbClr val="8B949E"/>
-                </a:solidFill>
-                <a:latin typeface="Calibri" pitchFamily="34" charset="0"/>
-                <a:ea typeface="Calibri" pitchFamily="34" charset="-122"/>
-                <a:cs typeface="Calibri" pitchFamily="34" charset="-120"/>
-              </a:rPr>
-              <a:t>PART 2  ·  13 / 50</a:t>
+                  <a:srgbClr val="8A8078"/>
+                </a:solidFill>
+                <a:latin typeface="Calibri" pitchFamily="34" charset="0"/>
+                <a:ea typeface="Calibri" pitchFamily="34" charset="-122"/>
+                <a:cs typeface="Calibri" pitchFamily="34" charset="-120"/>
+              </a:rPr>
+              <a:t>PART 2</a:t>
             </a:r>
             <a:endParaRPr lang="en-US" sz="850" dirty="0"/>
           </a:p>
@@ -1732,11 +1732,11 @@
             </a:avLst>
           </a:prstGeom>
           <a:solidFill>
-            <a:srgbClr val="161B22"/>
+            <a:srgbClr val="F5F1EB"/>
           </a:solidFill>
           <a:ln w="12700">
             <a:solidFill>
-              <a:srgbClr val="8B949E"/>
+              <a:srgbClr val="908880"/>
             </a:solidFill>
             <a:prstDash val="solid"/>
           </a:ln>
@@ -1805,7 +1805,7 @@
             <a:r>
               <a:rPr lang="en-US" sz="950" b="1" dirty="0">
                 <a:solidFill>
-                  <a:srgbClr val="E6EDF3"/>
+                  <a:srgbClr val="2D2926"/>
                 </a:solidFill>
                 <a:latin typeface="Calibri" pitchFamily="34" charset="0"/>
                 <a:ea typeface="Calibri" pitchFamily="34" charset="-122"/>
@@ -1834,11 +1834,11 @@
             </a:avLst>
           </a:prstGeom>
           <a:solidFill>
-            <a:srgbClr val="161B22"/>
+            <a:srgbClr val="F5F1EB"/>
           </a:solidFill>
           <a:ln w="12700">
             <a:solidFill>
-              <a:srgbClr val="8B949E"/>
+              <a:srgbClr val="908880"/>
             </a:solidFill>
             <a:prstDash val="solid"/>
           </a:ln>
@@ -1907,7 +1907,7 @@
             <a:r>
               <a:rPr lang="en-US" sz="950" b="1" dirty="0">
                 <a:solidFill>
-                  <a:srgbClr val="E6EDF3"/>
+                  <a:srgbClr val="2D2926"/>
                 </a:solidFill>
                 <a:latin typeface="Calibri" pitchFamily="34" charset="0"/>
                 <a:ea typeface="Calibri" pitchFamily="34" charset="-122"/>
@@ -1936,11 +1936,11 @@
             </a:avLst>
           </a:prstGeom>
           <a:solidFill>
-            <a:srgbClr val="161B22"/>
+            <a:srgbClr val="F5F1EB"/>
           </a:solidFill>
           <a:ln w="12700">
             <a:solidFill>
-              <a:srgbClr val="8B949E"/>
+              <a:srgbClr val="908880"/>
             </a:solidFill>
             <a:prstDash val="solid"/>
           </a:ln>
@@ -2009,7 +2009,7 @@
             <a:r>
               <a:rPr lang="en-US" sz="950" b="1" dirty="0">
                 <a:solidFill>
-                  <a:srgbClr val="E6EDF3"/>
+                  <a:srgbClr val="2D2926"/>
                 </a:solidFill>
                 <a:latin typeface="Calibri" pitchFamily="34" charset="0"/>
                 <a:ea typeface="Calibri" pitchFamily="34" charset="-122"/>
@@ -2038,7 +2038,7 @@
           <a:noFill/>
           <a:ln w="19050">
             <a:solidFill>
-              <a:srgbClr val="8B949E"/>
+              <a:srgbClr val="908880"/>
             </a:solidFill>
             <a:prstDash val="solid"/>
             <a:tailEnd type="arrow"/>
@@ -2062,7 +2062,7 @@
           <a:noFill/>
           <a:ln w="19050">
             <a:solidFill>
-              <a:srgbClr val="8B949E"/>
+              <a:srgbClr val="908880"/>
             </a:solidFill>
             <a:prstDash val="solid"/>
             <a:tailEnd type="arrow"/>
@@ -2086,7 +2086,7 @@
           <a:noFill/>
           <a:ln w="19050">
             <a:solidFill>
-              <a:srgbClr val="8B949E"/>
+              <a:srgbClr val="908880"/>
             </a:solidFill>
             <a:prstDash val="solid"/>
             <a:tailEnd type="arrow"/>
@@ -2110,18 +2110,18 @@
             </a:avLst>
           </a:prstGeom>
           <a:solidFill>
-            <a:srgbClr val="161B22"/>
+            <a:srgbClr val="F5F1EB"/>
           </a:solidFill>
           <a:ln w="19050">
             <a:solidFill>
-              <a:srgbClr val="6E40C9"/>
+              <a:srgbClr val="8B6AB5"/>
             </a:solidFill>
             <a:prstDash val="solid"/>
           </a:ln>
           <a:effectLst>
             <a:outerShdw sx="100000" sy="100000" kx="0" ky="0" algn="bl" rotWithShape="0" blurRad="76200" dist="25400" dir="2700000">
-              <a:srgbClr val="000000">
-                <a:alpha val="30000"/>
+              <a:srgbClr val="9E9488">
+                <a:alpha val="15000"/>
               </a:srgbClr>
             </a:outerShdw>
           </a:effectLst>
@@ -2190,7 +2190,7 @@
             <a:r>
               <a:rPr lang="en-US" sz="1050" b="1" dirty="0">
                 <a:solidFill>
-                  <a:srgbClr val="E6EDF3"/>
+                  <a:srgbClr val="2D2926"/>
                 </a:solidFill>
                 <a:latin typeface="Calibri" pitchFamily="34" charset="0"/>
                 <a:ea typeface="Calibri" pitchFamily="34" charset="-122"/>
@@ -2229,7 +2229,7 @@
             <a:r>
               <a:rPr lang="en-US" sz="800" dirty="0">
                 <a:solidFill>
-                  <a:srgbClr val="8B949E"/>
+                  <a:srgbClr val="8A8078"/>
                 </a:solidFill>
                 <a:latin typeface="Consolas" pitchFamily="34" charset="0"/>
                 <a:ea typeface="Consolas" pitchFamily="34" charset="-122"/>
@@ -2246,7 +2246,7 @@
             <a:r>
               <a:rPr lang="en-US" sz="800" dirty="0">
                 <a:solidFill>
-                  <a:srgbClr val="8B949E"/>
+                  <a:srgbClr val="8A8078"/>
                 </a:solidFill>
                 <a:latin typeface="Consolas" pitchFamily="34" charset="0"/>
                 <a:ea typeface="Consolas" pitchFamily="34" charset="-122"/>
@@ -2275,11 +2275,11 @@
             </a:avLst>
           </a:prstGeom>
           <a:solidFill>
-            <a:srgbClr val="1C2128"/>
+            <a:srgbClr val="ECE6DD"/>
           </a:solidFill>
           <a:ln w="9525">
             <a:solidFill>
-              <a:srgbClr val="6E40C9"/>
+              <a:srgbClr val="8B6AB5"/>
             </a:solidFill>
             <a:prstDash val="solid"/>
           </a:ln>
@@ -2312,7 +2312,7 @@
             <a:r>
               <a:rPr lang="en-US" sz="750" b="1" dirty="0">
                 <a:solidFill>
-                  <a:srgbClr val="6E40C9"/>
+                  <a:srgbClr val="8B6AB5"/>
                 </a:solidFill>
                 <a:latin typeface="Calibri" pitchFamily="34" charset="0"/>
                 <a:ea typeface="Calibri" pitchFamily="34" charset="-122"/>
@@ -2341,11 +2341,11 @@
             </a:avLst>
           </a:prstGeom>
           <a:solidFill>
-            <a:srgbClr val="1C2128"/>
+            <a:srgbClr val="ECE6DD"/>
           </a:solidFill>
           <a:ln w="9525">
             <a:solidFill>
-              <a:srgbClr val="6E40C9"/>
+              <a:srgbClr val="8B6AB5"/>
             </a:solidFill>
             <a:prstDash val="solid"/>
           </a:ln>
@@ -2378,7 +2378,7 @@
             <a:r>
               <a:rPr lang="en-US" sz="750" b="1" dirty="0">
                 <a:solidFill>
-                  <a:srgbClr val="6E40C9"/>
+                  <a:srgbClr val="8B6AB5"/>
                 </a:solidFill>
                 <a:latin typeface="Calibri" pitchFamily="34" charset="0"/>
                 <a:ea typeface="Calibri" pitchFamily="34" charset="-122"/>
@@ -2407,11 +2407,11 @@
             </a:avLst>
           </a:prstGeom>
           <a:solidFill>
-            <a:srgbClr val="1C2128"/>
+            <a:srgbClr val="ECE6DD"/>
           </a:solidFill>
           <a:ln w="9525">
             <a:solidFill>
-              <a:srgbClr val="6E40C9"/>
+              <a:srgbClr val="8B6AB5"/>
             </a:solidFill>
             <a:prstDash val="solid"/>
           </a:ln>
@@ -2444,7 +2444,7 @@
             <a:r>
               <a:rPr lang="en-US" sz="750" b="1" dirty="0">
                 <a:solidFill>
-                  <a:srgbClr val="6E40C9"/>
+                  <a:srgbClr val="8B6AB5"/>
                 </a:solidFill>
                 <a:latin typeface="Calibri" pitchFamily="34" charset="0"/>
                 <a:ea typeface="Calibri" pitchFamily="34" charset="-122"/>
@@ -2473,11 +2473,11 @@
             </a:avLst>
           </a:prstGeom>
           <a:solidFill>
-            <a:srgbClr val="1C2128"/>
+            <a:srgbClr val="ECE6DD"/>
           </a:solidFill>
           <a:ln w="9525">
             <a:solidFill>
-              <a:srgbClr val="6E40C9"/>
+              <a:srgbClr val="8B6AB5"/>
             </a:solidFill>
             <a:prstDash val="solid"/>
           </a:ln>
@@ -2510,7 +2510,7 @@
             <a:r>
               <a:rPr lang="en-US" sz="750" b="1" dirty="0">
                 <a:solidFill>
-                  <a:srgbClr val="6E40C9"/>
+                  <a:srgbClr val="8B6AB5"/>
                 </a:solidFill>
                 <a:latin typeface="Calibri" pitchFamily="34" charset="0"/>
                 <a:ea typeface="Calibri" pitchFamily="34" charset="-122"/>
@@ -2540,7 +2540,7 @@
           </a:prstGeom>
           <a:ln w="12700">
             <a:solidFill>
-              <a:srgbClr val="238636"/>
+              <a:srgbClr val="5A9B6E"/>
             </a:solidFill>
             <a:prstDash val="dash"/>
           </a:ln>
@@ -2563,11 +2563,11 @@
             </a:avLst>
           </a:prstGeom>
           <a:solidFill>
-            <a:srgbClr val="0D1117"/>
+            <a:srgbClr val="FFFDF8"/>
           </a:solidFill>
           <a:ln w="6350">
             <a:solidFill>
-              <a:srgbClr val="238636"/>
+              <a:srgbClr val="5A9B6E"/>
             </a:solidFill>
             <a:prstDash val="solid"/>
           </a:ln>
@@ -2600,7 +2600,7 @@
             <a:r>
               <a:rPr lang="en-US" sz="750" b="1" dirty="0">
                 <a:solidFill>
-                  <a:srgbClr val="238636"/>
+                  <a:srgbClr val="5A9B6E"/>
                 </a:solidFill>
                 <a:latin typeface="Calibri" pitchFamily="34" charset="0"/>
                 <a:ea typeface="Calibri" pitchFamily="34" charset="-122"/>
@@ -2629,18 +2629,18 @@
             </a:avLst>
           </a:prstGeom>
           <a:solidFill>
-            <a:srgbClr val="161B22"/>
+            <a:srgbClr val="F5F1EB"/>
           </a:solidFill>
           <a:ln w="19050">
             <a:solidFill>
-              <a:srgbClr val="238636"/>
+              <a:srgbClr val="5A9B6E"/>
             </a:solidFill>
             <a:prstDash val="solid"/>
           </a:ln>
           <a:effectLst>
             <a:outerShdw sx="100000" sy="100000" kx="0" ky="0" algn="bl" rotWithShape="0" blurRad="76200" dist="25400" dir="2700000">
-              <a:srgbClr val="000000">
-                <a:alpha val="30000"/>
+              <a:srgbClr val="9E9488">
+                <a:alpha val="15000"/>
               </a:srgbClr>
             </a:outerShdw>
           </a:effectLst>
@@ -2709,7 +2709,7 @@
             <a:r>
               <a:rPr lang="en-US" sz="1050" b="1" dirty="0">
                 <a:solidFill>
-                  <a:srgbClr val="E6EDF3"/>
+                  <a:srgbClr val="2D2926"/>
                 </a:solidFill>
                 <a:latin typeface="Calibri" pitchFamily="34" charset="0"/>
                 <a:ea typeface="Calibri" pitchFamily="34" charset="-122"/>
@@ -2748,7 +2748,7 @@
             <a:r>
               <a:rPr lang="en-US" sz="800" dirty="0">
                 <a:solidFill>
-                  <a:srgbClr val="8B949E"/>
+                  <a:srgbClr val="8A8078"/>
                 </a:solidFill>
                 <a:latin typeface="Consolas" pitchFamily="34" charset="0"/>
                 <a:ea typeface="Consolas" pitchFamily="34" charset="-122"/>
@@ -2777,18 +2777,18 @@
             </a:avLst>
           </a:prstGeom>
           <a:solidFill>
-            <a:srgbClr val="161B22"/>
+            <a:srgbClr val="F5F1EB"/>
           </a:solidFill>
           <a:ln w="19050">
             <a:solidFill>
-              <a:srgbClr val="238636"/>
+              <a:srgbClr val="5A9B6E"/>
             </a:solidFill>
             <a:prstDash val="solid"/>
           </a:ln>
           <a:effectLst>
             <a:outerShdw sx="100000" sy="100000" kx="0" ky="0" algn="bl" rotWithShape="0" blurRad="76200" dist="25400" dir="2700000">
-              <a:srgbClr val="000000">
-                <a:alpha val="30000"/>
+              <a:srgbClr val="9E9488">
+                <a:alpha val="15000"/>
               </a:srgbClr>
             </a:outerShdw>
           </a:effectLst>
@@ -2857,7 +2857,7 @@
             <a:r>
               <a:rPr lang="en-US" sz="1050" b="1" dirty="0">
                 <a:solidFill>
-                  <a:srgbClr val="E6EDF3"/>
+                  <a:srgbClr val="2D2926"/>
                 </a:solidFill>
                 <a:latin typeface="Calibri" pitchFamily="34" charset="0"/>
                 <a:ea typeface="Calibri" pitchFamily="34" charset="-122"/>
@@ -2896,7 +2896,7 @@
             <a:r>
               <a:rPr lang="en-US" sz="800" dirty="0">
                 <a:solidFill>
-                  <a:srgbClr val="8B949E"/>
+                  <a:srgbClr val="8A8078"/>
                 </a:solidFill>
                 <a:latin typeface="Consolas" pitchFamily="34" charset="0"/>
                 <a:ea typeface="Consolas" pitchFamily="34" charset="-122"/>
@@ -2925,18 +2925,18 @@
             </a:avLst>
           </a:prstGeom>
           <a:solidFill>
-            <a:srgbClr val="161B22"/>
+            <a:srgbClr val="F5F1EB"/>
           </a:solidFill>
           <a:ln w="19050">
             <a:solidFill>
-              <a:srgbClr val="238636"/>
+              <a:srgbClr val="5A9B6E"/>
             </a:solidFill>
             <a:prstDash val="solid"/>
           </a:ln>
           <a:effectLst>
             <a:outerShdw sx="100000" sy="100000" kx="0" ky="0" algn="bl" rotWithShape="0" blurRad="76200" dist="25400" dir="2700000">
-              <a:srgbClr val="000000">
-                <a:alpha val="30000"/>
+              <a:srgbClr val="9E9488">
+                <a:alpha val="15000"/>
               </a:srgbClr>
             </a:outerShdw>
           </a:effectLst>
@@ -3005,7 +3005,7 @@
             <a:r>
               <a:rPr lang="en-US" sz="1050" b="1" dirty="0">
                 <a:solidFill>
-                  <a:srgbClr val="E6EDF3"/>
+                  <a:srgbClr val="2D2926"/>
                 </a:solidFill>
                 <a:latin typeface="Calibri" pitchFamily="34" charset="0"/>
                 <a:ea typeface="Calibri" pitchFamily="34" charset="-122"/>
@@ -3044,7 +3044,7 @@
             <a:r>
               <a:rPr lang="en-US" sz="800" dirty="0">
                 <a:solidFill>
-                  <a:srgbClr val="8B949E"/>
+                  <a:srgbClr val="8A8078"/>
                 </a:solidFill>
                 <a:latin typeface="Consolas" pitchFamily="34" charset="0"/>
                 <a:ea typeface="Consolas" pitchFamily="34" charset="-122"/>
@@ -3073,7 +3073,7 @@
           <a:noFill/>
           <a:ln w="19050">
             <a:solidFill>
-              <a:srgbClr val="6E40C9"/>
+              <a:srgbClr val="8B6AB5"/>
             </a:solidFill>
             <a:prstDash val="solid"/>
             <a:tailEnd type="arrow"/>
@@ -3097,7 +3097,7 @@
           <a:noFill/>
           <a:ln w="19050">
             <a:solidFill>
-              <a:srgbClr val="6E40C9"/>
+              <a:srgbClr val="8B6AB5"/>
             </a:solidFill>
             <a:prstDash val="solid"/>
             <a:tailEnd type="arrow"/>
@@ -3121,7 +3121,7 @@
           <a:noFill/>
           <a:ln w="19050">
             <a:solidFill>
-              <a:srgbClr val="6E40C9"/>
+              <a:srgbClr val="8B6AB5"/>
             </a:solidFill>
             <a:prstDash val="solid"/>
             <a:tailEnd type="arrow"/>
@@ -3145,18 +3145,18 @@
             </a:avLst>
           </a:prstGeom>
           <a:solidFill>
-            <a:srgbClr val="161B22"/>
+            <a:srgbClr val="F5F1EB"/>
           </a:solidFill>
           <a:ln w="19050">
             <a:solidFill>
-              <a:srgbClr val="E36209"/>
+              <a:srgbClr val="C4804A"/>
             </a:solidFill>
             <a:prstDash val="solid"/>
           </a:ln>
           <a:effectLst>
             <a:outerShdw sx="100000" sy="100000" kx="0" ky="0" algn="bl" rotWithShape="0" blurRad="76200" dist="25400" dir="2700000">
-              <a:srgbClr val="000000">
-                <a:alpha val="30000"/>
+              <a:srgbClr val="9E9488">
+                <a:alpha val="15000"/>
               </a:srgbClr>
             </a:outerShdw>
           </a:effectLst>
@@ -3225,7 +3225,7 @@
             <a:r>
               <a:rPr lang="en-US" sz="1050" b="1" dirty="0">
                 <a:solidFill>
-                  <a:srgbClr val="E6EDF3"/>
+                  <a:srgbClr val="2D2926"/>
                 </a:solidFill>
                 <a:latin typeface="Calibri" pitchFamily="34" charset="0"/>
                 <a:ea typeface="Calibri" pitchFamily="34" charset="-122"/>
@@ -3264,7 +3264,7 @@
             <a:r>
               <a:rPr lang="en-US" sz="800" dirty="0">
                 <a:solidFill>
-                  <a:srgbClr val="8B949E"/>
+                  <a:srgbClr val="8A8078"/>
                 </a:solidFill>
                 <a:latin typeface="Consolas" pitchFamily="34" charset="0"/>
                 <a:ea typeface="Consolas" pitchFamily="34" charset="-122"/>
@@ -3293,7 +3293,7 @@
           <a:noFill/>
           <a:ln w="19050">
             <a:solidFill>
-              <a:srgbClr val="E36209"/>
+              <a:srgbClr val="C4804A"/>
             </a:solidFill>
             <a:prstDash val="solid"/>
             <a:tailEnd type="arrow"/>
@@ -3317,7 +3317,7 @@
           <a:noFill/>
           <a:ln w="19050">
             <a:solidFill>
-              <a:srgbClr val="E36209"/>
+              <a:srgbClr val="C4804A"/>
             </a:solidFill>
             <a:prstDash val="solid"/>
             <a:tailEnd type="arrow"/>
@@ -3341,7 +3341,7 @@
           <a:noFill/>
           <a:ln w="19050">
             <a:solidFill>
-              <a:srgbClr val="E36209"/>
+              <a:srgbClr val="C4804A"/>
             </a:solidFill>
             <a:prstDash val="solid"/>
             <a:tailEnd type="arrow"/>
@@ -3363,11 +3363,11 @@
             <a:avLst/>
           </a:prstGeom>
           <a:solidFill>
-            <a:srgbClr val="0F2A1A"/>
+            <a:srgbClr val="E5F0E9"/>
           </a:solidFill>
           <a:ln w="6350">
             <a:solidFill>
-              <a:srgbClr val="3FB950"/>
+              <a:srgbClr val="4A9968"/>
             </a:solidFill>
             <a:prstDash val="solid"/>
           </a:ln>
@@ -3388,11 +3388,11 @@
             <a:avLst/>
           </a:prstGeom>
           <a:solidFill>
-            <a:srgbClr val="2A0F0F"/>
+            <a:srgbClr val="F8ECEC"/>
           </a:solidFill>
           <a:ln w="6350">
             <a:solidFill>
-              <a:srgbClr val="F85149"/>
+              <a:srgbClr val="C4605B"/>
             </a:solidFill>
             <a:prstDash val="solid"/>
           </a:ln>
@@ -3425,13 +3425,13 @@
             <a:r>
               <a:rPr lang="en-US" sz="1050" b="1" dirty="0">
                 <a:solidFill>
-                  <a:srgbClr val="3FB950"/>
-                </a:solidFill>
-                <a:latin typeface="Calibri" pitchFamily="34" charset="0"/>
-                <a:ea typeface="Calibri" pitchFamily="34" charset="-122"/>
-                <a:cs typeface="Calibri" pitchFamily="34" charset="-120"/>
-              </a:rPr>
-              <a:t>✅  優點 / 適用場景</a:t>
+                  <a:srgbClr val="4A9968"/>
+                </a:solidFill>
+                <a:latin typeface="Calibri" pitchFamily="34" charset="0"/>
+                <a:ea typeface="Calibri" pitchFamily="34" charset="-122"/>
+                <a:cs typeface="Calibri" pitchFamily="34" charset="-120"/>
+              </a:rPr>
+              <a:t>✅  Advantages</a:t>
             </a:r>
             <a:endParaRPr lang="en-US" sz="1050" dirty="0"/>
           </a:p>
@@ -3464,13 +3464,13 @@
             <a:r>
               <a:rPr lang="en-US" sz="1050" b="1" dirty="0">
                 <a:solidFill>
-                  <a:srgbClr val="F85149"/>
-                </a:solidFill>
-                <a:latin typeface="Calibri" pitchFamily="34" charset="0"/>
-                <a:ea typeface="Calibri" pitchFamily="34" charset="-122"/>
-                <a:cs typeface="Calibri" pitchFamily="34" charset="-120"/>
-              </a:rPr>
-              <a:t>⚠️  限制 / 痛點</a:t>
+                  <a:srgbClr val="C4605B"/>
+                </a:solidFill>
+                <a:latin typeface="Calibri" pitchFamily="34" charset="0"/>
+                <a:ea typeface="Calibri" pitchFamily="34" charset="-122"/>
+                <a:cs typeface="Calibri" pitchFamily="34" charset="-120"/>
+              </a:rPr>
+              <a:t>⚠️  Limitations</a:t>
             </a:r>
             <a:endParaRPr lang="en-US" sz="1050" dirty="0"/>
           </a:p>
@@ -3491,11 +3491,11 @@
             <a:avLst/>
           </a:prstGeom>
           <a:solidFill>
-            <a:srgbClr val="3FB950"/>
+            <a:srgbClr val="4A9968"/>
           </a:solidFill>
           <a:ln w="12700">
             <a:solidFill>
-              <a:srgbClr val="3FB950"/>
+              <a:srgbClr val="4A9968"/>
             </a:solidFill>
             <a:prstDash val="solid"/>
           </a:ln>
@@ -3528,13 +3528,13 @@
             <a:r>
               <a:rPr lang="en-US" sz="1050" b="1" dirty="0">
                 <a:solidFill>
-                  <a:srgbClr val="E6EDF3"/>
-                </a:solidFill>
-                <a:latin typeface="Calibri" pitchFamily="34" charset="0"/>
-                <a:ea typeface="Calibri" pitchFamily="34" charset="-122"/>
-                <a:cs typeface="Calibri" pitchFamily="34" charset="-120"/>
-              </a:rPr>
-              <a:t>流量均勻分散</a:t>
+                  <a:srgbClr val="2D2926"/>
+                </a:solidFill>
+                <a:latin typeface="Calibri" pitchFamily="34" charset="0"/>
+                <a:ea typeface="Calibri" pitchFamily="34" charset="-122"/>
+                <a:cs typeface="Calibri" pitchFamily="34" charset="-120"/>
+              </a:rPr>
+              <a:t>Even Traffic Distribution</a:t>
             </a:r>
             <a:endParaRPr lang="en-US" sz="1050" dirty="0"/>
           </a:p>
@@ -3567,13 +3567,13 @@
             <a:r>
               <a:rPr lang="en-US" sz="900" dirty="0">
                 <a:solidFill>
-                  <a:srgbClr val="8B949E"/>
-                </a:solidFill>
-                <a:latin typeface="Calibri" pitchFamily="34" charset="0"/>
-                <a:ea typeface="Calibri" pitchFamily="34" charset="-122"/>
-                <a:cs typeface="Calibri" pitchFamily="34" charset="-120"/>
-              </a:rPr>
-              <a:t>避免單一節點過載</a:t>
+                  <a:srgbClr val="8A8078"/>
+                </a:solidFill>
+                <a:latin typeface="Calibri" pitchFamily="34" charset="0"/>
+                <a:ea typeface="Calibri" pitchFamily="34" charset="-122"/>
+                <a:cs typeface="Calibri" pitchFamily="34" charset="-120"/>
+              </a:rPr>
+              <a:t>Prevents single-node overload</a:t>
             </a:r>
             <a:endParaRPr lang="en-US" sz="900" dirty="0"/>
           </a:p>
@@ -3594,11 +3594,11 @@
             <a:avLst/>
           </a:prstGeom>
           <a:solidFill>
-            <a:srgbClr val="3FB950"/>
+            <a:srgbClr val="4A9968"/>
           </a:solidFill>
           <a:ln w="12700">
             <a:solidFill>
-              <a:srgbClr val="3FB950"/>
+              <a:srgbClr val="4A9968"/>
             </a:solidFill>
             <a:prstDash val="solid"/>
           </a:ln>
@@ -3631,13 +3631,13 @@
             <a:r>
               <a:rPr lang="en-US" sz="1050" b="1" dirty="0">
                 <a:solidFill>
-                  <a:srgbClr val="E6EDF3"/>
-                </a:solidFill>
-                <a:latin typeface="Calibri" pitchFamily="34" charset="0"/>
-                <a:ea typeface="Calibri" pitchFamily="34" charset="-122"/>
-                <a:cs typeface="Calibri" pitchFamily="34" charset="-120"/>
-              </a:rPr>
-              <a:t>高可用性 (HA)</a:t>
+                  <a:srgbClr val="2D2926"/>
+                </a:solidFill>
+                <a:latin typeface="Calibri" pitchFamily="34" charset="0"/>
+                <a:ea typeface="Calibri" pitchFamily="34" charset="-122"/>
+                <a:cs typeface="Calibri" pitchFamily="34" charset="-120"/>
+              </a:rPr>
+              <a:t>High Availability (HA)</a:t>
             </a:r>
             <a:endParaRPr lang="en-US" sz="1050" dirty="0"/>
           </a:p>
@@ -3670,13 +3670,13 @@
             <a:r>
               <a:rPr lang="en-US" sz="900" dirty="0">
                 <a:solidFill>
-                  <a:srgbClr val="8B949E"/>
-                </a:solidFill>
-                <a:latin typeface="Calibri" pitchFamily="34" charset="0"/>
-                <a:ea typeface="Calibri" pitchFamily="34" charset="-122"/>
-                <a:cs typeface="Calibri" pitchFamily="34" charset="-120"/>
-              </a:rPr>
-              <a:t>一台掛掉，LB 自動排除，服務不中斷</a:t>
+                  <a:srgbClr val="8A8078"/>
+                </a:solidFill>
+                <a:latin typeface="Calibri" pitchFamily="34" charset="0"/>
+                <a:ea typeface="Calibri" pitchFamily="34" charset="-122"/>
+                <a:cs typeface="Calibri" pitchFamily="34" charset="-120"/>
+              </a:rPr>
+              <a:t>If one server fails, LB auto-excludes it — no service interruption</a:t>
             </a:r>
             <a:endParaRPr lang="en-US" sz="900" dirty="0"/>
           </a:p>
@@ -3697,11 +3697,11 @@
             <a:avLst/>
           </a:prstGeom>
           <a:solidFill>
-            <a:srgbClr val="F85149"/>
+            <a:srgbClr val="C4605B"/>
           </a:solidFill>
           <a:ln w="12700">
             <a:solidFill>
-              <a:srgbClr val="F85149"/>
+              <a:srgbClr val="C4605B"/>
             </a:solidFill>
             <a:prstDash val="solid"/>
           </a:ln>
@@ -3734,13 +3734,13 @@
             <a:r>
               <a:rPr lang="en-US" sz="1050" b="1" dirty="0">
                 <a:solidFill>
-                  <a:srgbClr val="E6EDF3"/>
-                </a:solidFill>
-                <a:latin typeface="Calibri" pitchFamily="34" charset="0"/>
-                <a:ea typeface="Calibri" pitchFamily="34" charset="-122"/>
-                <a:cs typeface="Calibri" pitchFamily="34" charset="-120"/>
-              </a:rPr>
-              <a:t>Session 黏性問題</a:t>
+                  <a:srgbClr val="2D2926"/>
+                </a:solidFill>
+                <a:latin typeface="Calibri" pitchFamily="34" charset="0"/>
+                <a:ea typeface="Calibri" pitchFamily="34" charset="-122"/>
+                <a:cs typeface="Calibri" pitchFamily="34" charset="-120"/>
+              </a:rPr>
+              <a:t>Session Stickiness Issue</a:t>
             </a:r>
             <a:endParaRPr lang="en-US" sz="1050" dirty="0"/>
           </a:p>
@@ -3773,13 +3773,13 @@
             <a:r>
               <a:rPr lang="en-US" sz="900" dirty="0">
                 <a:solidFill>
-                  <a:srgbClr val="8B949E"/>
-                </a:solidFill>
-                <a:latin typeface="Calibri" pitchFamily="34" charset="0"/>
-                <a:ea typeface="Calibri" pitchFamily="34" charset="-122"/>
-                <a:cs typeface="Calibri" pitchFamily="34" charset="-120"/>
-              </a:rPr>
-              <a:t>同一使用者可能被派到不同 Server</a:t>
+                  <a:srgbClr val="8A8078"/>
+                </a:solidFill>
+                <a:latin typeface="Calibri" pitchFamily="34" charset="0"/>
+                <a:ea typeface="Calibri" pitchFamily="34" charset="-122"/>
+                <a:cs typeface="Calibri" pitchFamily="34" charset="-120"/>
+              </a:rPr>
+              <a:t>Same user may be routed to different servers</a:t>
             </a:r>
             <a:endParaRPr lang="en-US" sz="900" dirty="0"/>
           </a:p>
@@ -3800,11 +3800,11 @@
             <a:avLst/>
           </a:prstGeom>
           <a:solidFill>
-            <a:srgbClr val="F85149"/>
+            <a:srgbClr val="C4605B"/>
           </a:solidFill>
           <a:ln w="12700">
             <a:solidFill>
-              <a:srgbClr val="F85149"/>
+              <a:srgbClr val="C4605B"/>
             </a:solidFill>
             <a:prstDash val="solid"/>
           </a:ln>
@@ -3837,13 +3837,13 @@
             <a:r>
               <a:rPr lang="en-US" sz="1050" b="1" dirty="0">
                 <a:solidFill>
-                  <a:srgbClr val="E6EDF3"/>
-                </a:solidFill>
-                <a:latin typeface="Calibri" pitchFamily="34" charset="0"/>
-                <a:ea typeface="Calibri" pitchFamily="34" charset="-122"/>
-                <a:cs typeface="Calibri" pitchFamily="34" charset="-120"/>
-              </a:rPr>
-              <a:t>LB 本身也需要 HA</a:t>
+                  <a:srgbClr val="2D2926"/>
+                </a:solidFill>
+                <a:latin typeface="Calibri" pitchFamily="34" charset="0"/>
+                <a:ea typeface="Calibri" pitchFamily="34" charset="-122"/>
+                <a:cs typeface="Calibri" pitchFamily="34" charset="-120"/>
+              </a:rPr>
+              <a:t>LB Itself Needs HA</a:t>
             </a:r>
             <a:endParaRPr lang="en-US" sz="1050" dirty="0"/>
           </a:p>
@@ -3876,13 +3876,13 @@
             <a:r>
               <a:rPr lang="en-US" sz="900" dirty="0">
                 <a:solidFill>
-                  <a:srgbClr val="8B949E"/>
-                </a:solidFill>
-                <a:latin typeface="Calibri" pitchFamily="34" charset="0"/>
-                <a:ea typeface="Calibri" pitchFamily="34" charset="-122"/>
-                <a:cs typeface="Calibri" pitchFamily="34" charset="-120"/>
-              </a:rPr>
-              <a:t>LB 掛掉 → 整個服務掛</a:t>
+                  <a:srgbClr val="8A8078"/>
+                </a:solidFill>
+                <a:latin typeface="Calibri" pitchFamily="34" charset="0"/>
+                <a:ea typeface="Calibri" pitchFamily="34" charset="-122"/>
+                <a:cs typeface="Calibri" pitchFamily="34" charset="-120"/>
+              </a:rPr>
+              <a:t>LB failure → entire service goes down</a:t>
             </a:r>
             <a:endParaRPr lang="en-US" sz="900" dirty="0"/>
           </a:p>
@@ -3902,7 +3902,7 @@
     <p:bg>
       <p:bgPr>
         <a:solidFill>
-          <a:srgbClr val="0D1117"/>
+          <a:srgbClr val="FFFDF8"/>
         </a:solidFill>
       </p:bgPr>
     </p:bg>
@@ -3935,11 +3935,11 @@
             <a:avLst/>
           </a:prstGeom>
           <a:solidFill>
-            <a:srgbClr val="161B22"/>
+            <a:srgbClr val="F5F1EB"/>
           </a:solidFill>
           <a:ln w="6350">
             <a:solidFill>
-              <a:srgbClr val="30363D"/>
+              <a:srgbClr val="D6CCBF"/>
             </a:solidFill>
             <a:prstDash val="solid"/>
           </a:ln>
@@ -3960,11 +3960,11 @@
             <a:avLst/>
           </a:prstGeom>
           <a:solidFill>
-            <a:srgbClr val="F85149"/>
+            <a:srgbClr val="C4605B"/>
           </a:solidFill>
           <a:ln w="12700">
             <a:solidFill>
-              <a:srgbClr val="F85149"/>
+              <a:srgbClr val="C4605B"/>
             </a:solidFill>
             <a:prstDash val="solid"/>
           </a:ln>
@@ -3997,13 +3997,13 @@
             <a:r>
               <a:rPr lang="en-US" sz="1600" b="1" dirty="0">
                 <a:solidFill>
-                  <a:srgbClr val="E6EDF3"/>
-                </a:solidFill>
-                <a:latin typeface="Calibri" pitchFamily="34" charset="0"/>
-                <a:ea typeface="Calibri" pitchFamily="34" charset="-122"/>
-                <a:cs typeface="Calibri" pitchFamily="34" charset="-120"/>
-              </a:rPr>
-              <a:t>Scale Out 的陷阱：Session 狀態問題</a:t>
+                  <a:srgbClr val="2D2926"/>
+                </a:solidFill>
+                <a:latin typeface="Calibri" pitchFamily="34" charset="0"/>
+                <a:ea typeface="Calibri" pitchFamily="34" charset="-122"/>
+                <a:cs typeface="Calibri" pitchFamily="34" charset="-120"/>
+              </a:rPr>
+              <a:t>Scale Out Pitfalls: Session State Issues</a:t>
             </a:r>
             <a:endParaRPr lang="en-US" sz="1600" dirty="0"/>
           </a:p>
@@ -4036,13 +4036,13 @@
             <a:r>
               <a:rPr lang="en-US" sz="850" dirty="0">
                 <a:solidFill>
-                  <a:srgbClr val="8B949E"/>
-                </a:solidFill>
-                <a:latin typeface="Calibri" pitchFamily="34" charset="0"/>
-                <a:ea typeface="Calibri" pitchFamily="34" charset="-122"/>
-                <a:cs typeface="Calibri" pitchFamily="34" charset="-120"/>
-              </a:rPr>
-              <a:t>PART 2  ·  14 / 50</a:t>
+                  <a:srgbClr val="8A8078"/>
+                </a:solidFill>
+                <a:latin typeface="Calibri" pitchFamily="34" charset="0"/>
+                <a:ea typeface="Calibri" pitchFamily="34" charset="-122"/>
+                <a:cs typeface="Calibri" pitchFamily="34" charset="-120"/>
+              </a:rPr>
+              <a:t>PART 2</a:t>
             </a:r>
             <a:endParaRPr lang="en-US" sz="850" dirty="0"/>
           </a:p>
@@ -4065,11 +4065,11 @@
             </a:avLst>
           </a:prstGeom>
           <a:solidFill>
-            <a:srgbClr val="2A0F0F"/>
+            <a:srgbClr val="F8ECEC"/>
           </a:solidFill>
           <a:ln w="12700">
             <a:solidFill>
-              <a:srgbClr val="F85149"/>
+              <a:srgbClr val="C4605B"/>
             </a:solidFill>
             <a:prstDash val="solid"/>
           </a:ln>
@@ -4102,13 +4102,13 @@
             <a:r>
               <a:rPr lang="en-US" sz="1200" b="1" dirty="0">
                 <a:solidFill>
-                  <a:srgbClr val="F85149"/>
-                </a:solidFill>
-                <a:latin typeface="Calibri" pitchFamily="34" charset="0"/>
-                <a:ea typeface="Calibri" pitchFamily="34" charset="-122"/>
-                <a:cs typeface="Calibri" pitchFamily="34" charset="-120"/>
-              </a:rPr>
-              <a:t>❌  Session 黏性問題</a:t>
+                  <a:srgbClr val="C4605B"/>
+                </a:solidFill>
+                <a:latin typeface="Calibri" pitchFamily="34" charset="0"/>
+                <a:ea typeface="Calibri" pitchFamily="34" charset="-122"/>
+                <a:cs typeface="Calibri" pitchFamily="34" charset="-120"/>
+              </a:rPr>
+              <a:t>❌  Session Stickiness Problem</a:t>
             </a:r>
             <a:endParaRPr lang="en-US" sz="1200" dirty="0"/>
           </a:p>
@@ -4131,11 +4131,11 @@
             </a:avLst>
           </a:prstGeom>
           <a:solidFill>
-            <a:srgbClr val="161B22"/>
+            <a:srgbClr val="F5F1EB"/>
           </a:solidFill>
           <a:ln w="12700">
             <a:solidFill>
-              <a:srgbClr val="8B949E"/>
+              <a:srgbClr val="908880"/>
             </a:solidFill>
             <a:prstDash val="solid"/>
           </a:ln>
@@ -4204,7 +4204,7 @@
             <a:r>
               <a:rPr lang="en-US" sz="950" b="1" dirty="0">
                 <a:solidFill>
-                  <a:srgbClr val="E6EDF3"/>
+                  <a:srgbClr val="2D2926"/>
                 </a:solidFill>
                 <a:latin typeface="Calibri" pitchFamily="34" charset="0"/>
                 <a:ea typeface="Calibri" pitchFamily="34" charset="-122"/>
@@ -4233,11 +4233,11 @@
             </a:avLst>
           </a:prstGeom>
           <a:solidFill>
-            <a:srgbClr val="161B22"/>
+            <a:srgbClr val="F5F1EB"/>
           </a:solidFill>
           <a:ln w="12700">
             <a:solidFill>
-              <a:srgbClr val="6E40C9"/>
+              <a:srgbClr val="8B6AB5"/>
             </a:solidFill>
             <a:prstDash val="solid"/>
           </a:ln>
@@ -4306,7 +4306,7 @@
             <a:r>
               <a:rPr lang="en-US" sz="950" b="1" dirty="0">
                 <a:solidFill>
-                  <a:srgbClr val="E6EDF3"/>
+                  <a:srgbClr val="2D2926"/>
                 </a:solidFill>
                 <a:latin typeface="Calibri" pitchFamily="34" charset="0"/>
                 <a:ea typeface="Calibri" pitchFamily="34" charset="-122"/>
@@ -4335,7 +4335,7 @@
           <a:noFill/>
           <a:ln w="19050">
             <a:solidFill>
-              <a:srgbClr val="8B949E"/>
+              <a:srgbClr val="8A8078"/>
             </a:solidFill>
             <a:prstDash val="solid"/>
             <a:tailEnd type="arrow"/>
@@ -4359,11 +4359,11 @@
             </a:avLst>
           </a:prstGeom>
           <a:solidFill>
-            <a:srgbClr val="161B22"/>
+            <a:srgbClr val="F5F1EB"/>
           </a:solidFill>
           <a:ln w="12700">
             <a:solidFill>
-              <a:srgbClr val="238636"/>
+              <a:srgbClr val="5A9B6E"/>
             </a:solidFill>
             <a:prstDash val="solid"/>
           </a:ln>
@@ -4396,7 +4396,7 @@
             <a:r>
               <a:rPr lang="en-US" sz="950" b="1" dirty="0">
                 <a:solidFill>
-                  <a:srgbClr val="E6EDF3"/>
+                  <a:srgbClr val="2D2926"/>
                 </a:solidFill>
                 <a:latin typeface="Calibri" pitchFamily="34" charset="0"/>
                 <a:ea typeface="Calibri" pitchFamily="34" charset="-122"/>
@@ -4425,7 +4425,7 @@
           <a:noFill/>
           <a:ln w="19050">
             <a:solidFill>
-              <a:srgbClr val="8B949E"/>
+              <a:srgbClr val="8A8078"/>
             </a:solidFill>
             <a:prstDash val="solid"/>
             <a:tailEnd type="arrow"/>
@@ -4449,11 +4449,11 @@
             </a:avLst>
           </a:prstGeom>
           <a:solidFill>
-            <a:srgbClr val="161B22"/>
+            <a:srgbClr val="F5F1EB"/>
           </a:solidFill>
           <a:ln w="12700">
             <a:solidFill>
-              <a:srgbClr val="238636"/>
+              <a:srgbClr val="5A9B6E"/>
             </a:solidFill>
             <a:prstDash val="solid"/>
           </a:ln>
@@ -4486,7 +4486,7 @@
             <a:r>
               <a:rPr lang="en-US" sz="950" b="1" dirty="0">
                 <a:solidFill>
-                  <a:srgbClr val="E6EDF3"/>
+                  <a:srgbClr val="2D2926"/>
                 </a:solidFill>
                 <a:latin typeface="Calibri" pitchFamily="34" charset="0"/>
                 <a:ea typeface="Calibri" pitchFamily="34" charset="-122"/>
@@ -4515,7 +4515,7 @@
           <a:noFill/>
           <a:ln w="19050">
             <a:solidFill>
-              <a:srgbClr val="8B949E"/>
+              <a:srgbClr val="8A8078"/>
             </a:solidFill>
             <a:prstDash val="solid"/>
             <a:tailEnd type="arrow"/>
@@ -4549,13 +4549,13 @@
             <a:r>
               <a:rPr lang="en-US" sz="1000" b="1" dirty="0">
                 <a:solidFill>
-                  <a:srgbClr val="F85149"/>
-                </a:solidFill>
-                <a:latin typeface="Calibri" pitchFamily="34" charset="0"/>
-                <a:ea typeface="Calibri" pitchFamily="34" charset="-122"/>
-                <a:cs typeface="Calibri" pitchFamily="34" charset="-120"/>
-              </a:rPr>
-              <a:t>Request #2 → Server B → 找不到 Session → 被登出！</a:t>
+                  <a:srgbClr val="C4605B"/>
+                </a:solidFill>
+                <a:latin typeface="Calibri" pitchFamily="34" charset="0"/>
+                <a:ea typeface="Calibri" pitchFamily="34" charset="-122"/>
+                <a:cs typeface="Calibri" pitchFamily="34" charset="-120"/>
+              </a:rPr>
+              <a:t>Request #2 → Server B → Session not found → Logged out!</a:t>
             </a:r>
             <a:endParaRPr lang="en-US" sz="1000" dirty="0"/>
           </a:p>
@@ -4578,7 +4578,7 @@
           <a:noFill/>
           <a:ln w="6350">
             <a:solidFill>
-              <a:srgbClr val="30363D"/>
+              <a:srgbClr val="D6CCBF"/>
             </a:solidFill>
             <a:prstDash val="solid"/>
           </a:ln>
@@ -4601,11 +4601,11 @@
             </a:avLst>
           </a:prstGeom>
           <a:solidFill>
-            <a:srgbClr val="0F2A1A"/>
+            <a:srgbClr val="E5F0E9"/>
           </a:solidFill>
           <a:ln w="12700">
             <a:solidFill>
-              <a:srgbClr val="3FB950"/>
+              <a:srgbClr val="4A9968"/>
             </a:solidFill>
             <a:prstDash val="solid"/>
           </a:ln>
@@ -4638,13 +4638,13 @@
             <a:r>
               <a:rPr lang="en-US" sz="1200" b="1" dirty="0">
                 <a:solidFill>
-                  <a:srgbClr val="3FB950"/>
-                </a:solidFill>
-                <a:latin typeface="Calibri" pitchFamily="34" charset="0"/>
-                <a:ea typeface="Calibri" pitchFamily="34" charset="-122"/>
-                <a:cs typeface="Calibri" pitchFamily="34" charset="-120"/>
-              </a:rPr>
-              <a:t>✅  三種解決方案</a:t>
+                  <a:srgbClr val="4A9968"/>
+                </a:solidFill>
+                <a:latin typeface="Calibri" pitchFamily="34" charset="0"/>
+                <a:ea typeface="Calibri" pitchFamily="34" charset="-122"/>
+                <a:cs typeface="Calibri" pitchFamily="34" charset="-120"/>
+              </a:rPr>
+              <a:t>✅  Three Solutions</a:t>
             </a:r>
             <a:endParaRPr lang="en-US" sz="1200" dirty="0"/>
           </a:p>
@@ -4667,11 +4667,11 @@
             </a:avLst>
           </a:prstGeom>
           <a:solidFill>
-            <a:srgbClr val="161B22"/>
+            <a:srgbClr val="F5F1EB"/>
           </a:solidFill>
           <a:ln w="15240">
             <a:solidFill>
-              <a:srgbClr val="3FB950"/>
+              <a:srgbClr val="4A9968"/>
             </a:solidFill>
             <a:prstDash val="solid"/>
           </a:ln>
@@ -4704,13 +4704,13 @@
             <a:r>
               <a:rPr lang="en-US" sz="1200" b="1" dirty="0">
                 <a:solidFill>
-                  <a:srgbClr val="3FB950"/>
-                </a:solidFill>
-                <a:latin typeface="Calibri" pitchFamily="34" charset="0"/>
-                <a:ea typeface="Calibri" pitchFamily="34" charset="-122"/>
-                <a:cs typeface="Calibri" pitchFamily="34" charset="-120"/>
-              </a:rPr>
-              <a:t>① JWT Token（無狀態）</a:t>
+                  <a:srgbClr val="4A9968"/>
+                </a:solidFill>
+                <a:latin typeface="Calibri" pitchFamily="34" charset="0"/>
+                <a:ea typeface="Calibri" pitchFamily="34" charset="-122"/>
+                <a:cs typeface="Calibri" pitchFamily="34" charset="-120"/>
+              </a:rPr>
+              <a:t>① JWT Token (Stateless)</a:t>
             </a:r>
             <a:endParaRPr lang="en-US" sz="1200" dirty="0"/>
           </a:p>
@@ -4743,13 +4743,13 @@
             <a:r>
               <a:rPr lang="en-US" sz="950" dirty="0">
                 <a:solidFill>
-                  <a:srgbClr val="8B949E"/>
-                </a:solidFill>
-                <a:latin typeface="Calibri" pitchFamily="34" charset="0"/>
-                <a:ea typeface="Calibri" pitchFamily="34" charset="-122"/>
-                <a:cs typeface="Calibri" pitchFamily="34" charset="-120"/>
-              </a:rPr>
-              <a:t>Token存Client，Server無狀態 | 推薦 REST API</a:t>
+                  <a:srgbClr val="8A8078"/>
+                </a:solidFill>
+                <a:latin typeface="Calibri" pitchFamily="34" charset="0"/>
+                <a:ea typeface="Calibri" pitchFamily="34" charset="-122"/>
+                <a:cs typeface="Calibri" pitchFamily="34" charset="-120"/>
+              </a:rPr>
+              <a:t>Token stored on client, server is stateless | Recommended for REST API</a:t>
             </a:r>
             <a:endParaRPr lang="en-US" sz="950" dirty="0"/>
           </a:p>
@@ -4772,11 +4772,11 @@
             </a:avLst>
           </a:prstGeom>
           <a:solidFill>
-            <a:srgbClr val="161B22"/>
+            <a:srgbClr val="F5F1EB"/>
           </a:solidFill>
           <a:ln w="15240">
             <a:solidFill>
-              <a:srgbClr val="6E40C9"/>
+              <a:srgbClr val="8B6AB5"/>
             </a:solidFill>
             <a:prstDash val="solid"/>
           </a:ln>
@@ -4809,13 +4809,13 @@
             <a:r>
               <a:rPr lang="en-US" sz="1200" b="1" dirty="0">
                 <a:solidFill>
-                  <a:srgbClr val="6E40C9"/>
-                </a:solidFill>
-                <a:latin typeface="Calibri" pitchFamily="34" charset="0"/>
-                <a:ea typeface="Calibri" pitchFamily="34" charset="-122"/>
-                <a:cs typeface="Calibri" pitchFamily="34" charset="-120"/>
-              </a:rPr>
-              <a:t>② Redis 集中 Session</a:t>
+                  <a:srgbClr val="8B6AB5"/>
+                </a:solidFill>
+                <a:latin typeface="Calibri" pitchFamily="34" charset="0"/>
+                <a:ea typeface="Calibri" pitchFamily="34" charset="-122"/>
+                <a:cs typeface="Calibri" pitchFamily="34" charset="-120"/>
+              </a:rPr>
+              <a:t>② Redis Centralized Session</a:t>
             </a:r>
             <a:endParaRPr lang="en-US" sz="1200" dirty="0"/>
           </a:p>
@@ -4848,13 +4848,13 @@
             <a:r>
               <a:rPr lang="en-US" sz="950" dirty="0">
                 <a:solidFill>
-                  <a:srgbClr val="8B949E"/>
-                </a:solidFill>
-                <a:latin typeface="Calibri" pitchFamily="34" charset="0"/>
-                <a:ea typeface="Calibri" pitchFamily="34" charset="-122"/>
-                <a:cs typeface="Calibri" pitchFamily="34" charset="-120"/>
-              </a:rPr>
-              <a:t>Session集中存Redis，所有Server共用</a:t>
+                  <a:srgbClr val="8A8078"/>
+                </a:solidFill>
+                <a:latin typeface="Calibri" pitchFamily="34" charset="0"/>
+                <a:ea typeface="Calibri" pitchFamily="34" charset="-122"/>
+                <a:cs typeface="Calibri" pitchFamily="34" charset="-120"/>
+              </a:rPr>
+              <a:t>Sessions stored centrally in Redis, shared by all servers</a:t>
             </a:r>
             <a:endParaRPr lang="en-US" sz="950" dirty="0"/>
           </a:p>
@@ -4877,11 +4877,11 @@
             </a:avLst>
           </a:prstGeom>
           <a:solidFill>
-            <a:srgbClr val="161B22"/>
+            <a:srgbClr val="F5F1EB"/>
           </a:solidFill>
           <a:ln w="15240">
             <a:solidFill>
-              <a:srgbClr val="D29922"/>
+              <a:srgbClr val="B8892C"/>
             </a:solidFill>
             <a:prstDash val="solid"/>
           </a:ln>
@@ -4914,13 +4914,13 @@
             <a:r>
               <a:rPr lang="en-US" sz="1200" b="1" dirty="0">
                 <a:solidFill>
-                  <a:srgbClr val="D29922"/>
-                </a:solidFill>
-                <a:latin typeface="Calibri" pitchFamily="34" charset="0"/>
-                <a:ea typeface="Calibri" pitchFamily="34" charset="-122"/>
-                <a:cs typeface="Calibri" pitchFamily="34" charset="-120"/>
-              </a:rPr>
-              <a:t>③ Sticky Session（不推薦⚠️）</a:t>
+                  <a:srgbClr val="B8892C"/>
+                </a:solidFill>
+                <a:latin typeface="Calibri" pitchFamily="34" charset="0"/>
+                <a:ea typeface="Calibri" pitchFamily="34" charset="-122"/>
+                <a:cs typeface="Calibri" pitchFamily="34" charset="-120"/>
+              </a:rPr>
+              <a:t>③ Sticky Session (Not Recommended ⚠️)</a:t>
             </a:r>
             <a:endParaRPr lang="en-US" sz="1200" dirty="0"/>
           </a:p>
@@ -4953,13 +4953,13 @@
             <a:r>
               <a:rPr lang="en-US" sz="950" dirty="0">
                 <a:solidFill>
-                  <a:srgbClr val="8B949E"/>
-                </a:solidFill>
-                <a:latin typeface="Calibri" pitchFamily="34" charset="0"/>
-                <a:ea typeface="Calibri" pitchFamily="34" charset="-122"/>
-                <a:cs typeface="Calibri" pitchFamily="34" charset="-120"/>
-              </a:rPr>
-              <a:t>LB固定綁定IP | 失去Scale Out彈性</a:t>
+                  <a:srgbClr val="8A8078"/>
+                </a:solidFill>
+                <a:latin typeface="Calibri" pitchFamily="34" charset="0"/>
+                <a:ea typeface="Calibri" pitchFamily="34" charset="-122"/>
+                <a:cs typeface="Calibri" pitchFamily="34" charset="-120"/>
+              </a:rPr>
+              <a:t>LB binds to fixed IP | Loses scale out flexibility</a:t>
             </a:r>
             <a:endParaRPr lang="en-US" sz="950" dirty="0"/>
           </a:p>
@@ -4982,11 +4982,11 @@
             </a:avLst>
           </a:prstGeom>
           <a:solidFill>
-            <a:srgbClr val="0A1929"/>
+            <a:srgbClr val="EAF0F7"/>
           </a:solidFill>
           <a:ln w="9525">
             <a:solidFill>
-              <a:srgbClr val="58A6FF"/>
+              <a:srgbClr val="4A7FB5"/>
             </a:solidFill>
             <a:prstDash val="solid"/>
           </a:ln>
@@ -5019,13 +5019,13 @@
             <a:r>
               <a:rPr lang="en-US" sz="1000" i="1" dirty="0">
                 <a:solidFill>
-                  <a:srgbClr val="8B949E"/>
-                </a:solidFill>
-                <a:latin typeface="Calibri" pitchFamily="34" charset="0"/>
-                <a:ea typeface="Calibri" pitchFamily="34" charset="-122"/>
-                <a:cs typeface="Calibri" pitchFamily="34" charset="-120"/>
-              </a:rPr>
-              <a:t>💡  現代架構首選 JWT + Redis 的組合 — 讓 Server 真正 Stateless</a:t>
+                  <a:srgbClr val="8A8078"/>
+                </a:solidFill>
+                <a:latin typeface="Calibri" pitchFamily="34" charset="0"/>
+                <a:ea typeface="Calibri" pitchFamily="34" charset="-122"/>
+                <a:cs typeface="Calibri" pitchFamily="34" charset="-120"/>
+              </a:rPr>
+              <a:t>💡  Modern architectures prefer the JWT + Redis combo — making servers truly stateless</a:t>
             </a:r>
             <a:endParaRPr lang="en-US" sz="1000" dirty="0"/>
           </a:p>
@@ -5045,7 +5045,7 @@
     <p:bg>
       <p:bgPr>
         <a:solidFill>
-          <a:srgbClr val="0D1117"/>
+          <a:srgbClr val="FFFDF8"/>
         </a:solidFill>
       </p:bgPr>
     </p:bg>
@@ -5078,11 +5078,11 @@
             <a:avLst/>
           </a:prstGeom>
           <a:solidFill>
-            <a:srgbClr val="161B22"/>
+            <a:srgbClr val="F5F1EB"/>
           </a:solidFill>
           <a:ln w="6350">
             <a:solidFill>
-              <a:srgbClr val="30363D"/>
+              <a:srgbClr val="D6CCBF"/>
             </a:solidFill>
             <a:prstDash val="solid"/>
           </a:ln>
@@ -5103,11 +5103,11 @@
             <a:avLst/>
           </a:prstGeom>
           <a:solidFill>
-            <a:srgbClr val="E36209"/>
+            <a:srgbClr val="C4804A"/>
           </a:solidFill>
           <a:ln w="12700">
             <a:solidFill>
-              <a:srgbClr val="E36209"/>
+              <a:srgbClr val="C4804A"/>
             </a:solidFill>
             <a:prstDash val="solid"/>
           </a:ln>
@@ -5140,13 +5140,13 @@
             <a:r>
               <a:rPr lang="en-US" sz="1600" b="1" dirty="0">
                 <a:solidFill>
-                  <a:srgbClr val="E6EDF3"/>
-                </a:solidFill>
-                <a:latin typeface="Calibri" pitchFamily="34" charset="0"/>
-                <a:ea typeface="Calibri" pitchFamily="34" charset="-122"/>
-                <a:cs typeface="Calibri" pitchFamily="34" charset="-120"/>
-              </a:rPr>
-              <a:t>資料庫的擴展：Read Replica 架構</a:t>
+                  <a:srgbClr val="2D2926"/>
+                </a:solidFill>
+                <a:latin typeface="Calibri" pitchFamily="34" charset="0"/>
+                <a:ea typeface="Calibri" pitchFamily="34" charset="-122"/>
+                <a:cs typeface="Calibri" pitchFamily="34" charset="-120"/>
+              </a:rPr>
+              <a:t>Database Scaling: Read Replica Architecture</a:t>
             </a:r>
             <a:endParaRPr lang="en-US" sz="1600" dirty="0"/>
           </a:p>
@@ -5179,13 +5179,13 @@
             <a:r>
               <a:rPr lang="en-US" sz="750" dirty="0">
                 <a:solidFill>
-                  <a:srgbClr val="8B949E"/>
-                </a:solidFill>
-                <a:latin typeface="Calibri" pitchFamily="34" charset="0"/>
-                <a:ea typeface="Calibri" pitchFamily="34" charset="-122"/>
-                <a:cs typeface="Calibri" pitchFamily="34" charset="-120"/>
-              </a:rPr>
-              <a:t>複雜度  7/10</a:t>
+                  <a:srgbClr val="8A8078"/>
+                </a:solidFill>
+                <a:latin typeface="Calibri" pitchFamily="34" charset="0"/>
+                <a:ea typeface="Calibri" pitchFamily="34" charset="-122"/>
+                <a:cs typeface="Calibri" pitchFamily="34" charset="-120"/>
+              </a:rPr>
+              <a:t>Complexity  7/10</a:t>
             </a:r>
             <a:endParaRPr lang="en-US" sz="750" dirty="0"/>
           </a:p>
@@ -5206,11 +5206,11 @@
             <a:avLst/>
           </a:prstGeom>
           <a:solidFill>
-            <a:srgbClr val="252D38"/>
+            <a:srgbClr val="D6CCBF"/>
           </a:solidFill>
           <a:ln w="12700">
             <a:solidFill>
-              <a:srgbClr val="252D38"/>
+              <a:srgbClr val="D6CCBF"/>
             </a:solidFill>
             <a:prstDash val="solid"/>
           </a:ln>
@@ -5231,11 +5231,11 @@
             <a:avLst/>
           </a:prstGeom>
           <a:solidFill>
-            <a:srgbClr val="D29922"/>
+            <a:srgbClr val="B8892C"/>
           </a:solidFill>
           <a:ln w="12700">
             <a:solidFill>
-              <a:srgbClr val="D29922"/>
+              <a:srgbClr val="B8892C"/>
             </a:solidFill>
             <a:prstDash val="solid"/>
           </a:ln>
@@ -5268,13 +5268,13 @@
             <a:r>
               <a:rPr lang="en-US" sz="850" dirty="0">
                 <a:solidFill>
-                  <a:srgbClr val="8B949E"/>
-                </a:solidFill>
-                <a:latin typeface="Calibri" pitchFamily="34" charset="0"/>
-                <a:ea typeface="Calibri" pitchFamily="34" charset="-122"/>
-                <a:cs typeface="Calibri" pitchFamily="34" charset="-120"/>
-              </a:rPr>
-              <a:t>PART 2  ·  15 / 50</a:t>
+                  <a:srgbClr val="8A8078"/>
+                </a:solidFill>
+                <a:latin typeface="Calibri" pitchFamily="34" charset="0"/>
+                <a:ea typeface="Calibri" pitchFamily="34" charset="-122"/>
+                <a:cs typeface="Calibri" pitchFamily="34" charset="-120"/>
+              </a:rPr>
+              <a:t>PART 2</a:t>
             </a:r>
             <a:endParaRPr lang="en-US" sz="850" dirty="0"/>
           </a:p>
@@ -5298,7 +5298,7 @@
           </a:prstGeom>
           <a:ln w="12700">
             <a:solidFill>
-              <a:srgbClr val="238636"/>
+              <a:srgbClr val="5A9B6E"/>
             </a:solidFill>
             <a:prstDash val="dash"/>
           </a:ln>
@@ -5321,11 +5321,11 @@
             </a:avLst>
           </a:prstGeom>
           <a:solidFill>
-            <a:srgbClr val="0D1117"/>
+            <a:srgbClr val="FFFDF8"/>
           </a:solidFill>
           <a:ln w="6350">
             <a:solidFill>
-              <a:srgbClr val="238636"/>
+              <a:srgbClr val="5A9B6E"/>
             </a:solidFill>
             <a:prstDash val="solid"/>
           </a:ln>
@@ -5358,7 +5358,7 @@
             <a:r>
               <a:rPr lang="en-US" sz="750" b="1" dirty="0">
                 <a:solidFill>
-                  <a:srgbClr val="238636"/>
+                  <a:srgbClr val="5A9B6E"/>
                 </a:solidFill>
                 <a:latin typeface="Calibri" pitchFamily="34" charset="0"/>
                 <a:ea typeface="Calibri" pitchFamily="34" charset="-122"/>
@@ -5387,11 +5387,11 @@
             </a:avLst>
           </a:prstGeom>
           <a:solidFill>
-            <a:srgbClr val="161B22"/>
+            <a:srgbClr val="F5F1EB"/>
           </a:solidFill>
           <a:ln w="12700">
             <a:solidFill>
-              <a:srgbClr val="238636"/>
+              <a:srgbClr val="5A9B6E"/>
             </a:solidFill>
             <a:prstDash val="solid"/>
           </a:ln>
@@ -5460,7 +5460,7 @@
             <a:r>
               <a:rPr lang="en-US" sz="950" b="1" dirty="0">
                 <a:solidFill>
-                  <a:srgbClr val="E6EDF3"/>
+                  <a:srgbClr val="2D2926"/>
                 </a:solidFill>
                 <a:latin typeface="Calibri" pitchFamily="34" charset="0"/>
                 <a:ea typeface="Calibri" pitchFamily="34" charset="-122"/>
@@ -5489,11 +5489,11 @@
             </a:avLst>
           </a:prstGeom>
           <a:solidFill>
-            <a:srgbClr val="161B22"/>
+            <a:srgbClr val="F5F1EB"/>
           </a:solidFill>
           <a:ln w="12700">
             <a:solidFill>
-              <a:srgbClr val="238636"/>
+              <a:srgbClr val="5A9B6E"/>
             </a:solidFill>
             <a:prstDash val="solid"/>
           </a:ln>
@@ -5562,7 +5562,7 @@
             <a:r>
               <a:rPr lang="en-US" sz="950" b="1" dirty="0">
                 <a:solidFill>
-                  <a:srgbClr val="E6EDF3"/>
+                  <a:srgbClr val="2D2926"/>
                 </a:solidFill>
                 <a:latin typeface="Calibri" pitchFamily="34" charset="0"/>
                 <a:ea typeface="Calibri" pitchFamily="34" charset="-122"/>
@@ -5591,11 +5591,11 @@
             </a:avLst>
           </a:prstGeom>
           <a:solidFill>
-            <a:srgbClr val="161B22"/>
+            <a:srgbClr val="F5F1EB"/>
           </a:solidFill>
           <a:ln w="12700">
             <a:solidFill>
-              <a:srgbClr val="238636"/>
+              <a:srgbClr val="5A9B6E"/>
             </a:solidFill>
             <a:prstDash val="solid"/>
           </a:ln>
@@ -5664,7 +5664,7 @@
             <a:r>
               <a:rPr lang="en-US" sz="950" b="1" dirty="0">
                 <a:solidFill>
-                  <a:srgbClr val="E6EDF3"/>
+                  <a:srgbClr val="2D2926"/>
                 </a:solidFill>
                 <a:latin typeface="Calibri" pitchFamily="34" charset="0"/>
                 <a:ea typeface="Calibri" pitchFamily="34" charset="-122"/>
@@ -5693,7 +5693,7 @@
           <a:noFill/>
           <a:ln w="19050">
             <a:solidFill>
-              <a:srgbClr val="F85149"/>
+              <a:srgbClr val="C4605B"/>
             </a:solidFill>
             <a:prstDash val="solid"/>
             <a:tailEnd type="arrow"/>
@@ -5702,14 +5702,41 @@
       </p:sp>
       <p:sp>
         <p:nvSpPr>
-          <p:cNvPr id="22" name="Text 20"/>
-          <p:cNvSpPr/>
-          <p:nvPr/>
-        </p:nvSpPr>
-        <p:spPr>
-          <a:xfrm>
-            <a:off x="2286000" y="1069848"/>
-            <a:ext cx="804672" cy="182880"/>
+          <p:cNvPr id="22" name="Shape 20"/>
+          <p:cNvSpPr/>
+          <p:nvPr/>
+        </p:nvSpPr>
+        <p:spPr>
+          <a:xfrm>
+            <a:off x="2385212" y="1051560"/>
+            <a:ext cx="606247" cy="201168"/>
+          </a:xfrm>
+          <a:prstGeom prst="roundRect">
+            <a:avLst>
+              <a:gd name="adj" fmla="val 27273"/>
+            </a:avLst>
+          </a:prstGeom>
+          <a:solidFill>
+            <a:srgbClr val="F5F1EB"/>
+          </a:solidFill>
+          <a:ln w="9525">
+            <a:solidFill>
+              <a:srgbClr val="C4605B"/>
+            </a:solidFill>
+            <a:prstDash val="solid"/>
+          </a:ln>
+        </p:spPr>
+      </p:sp>
+      <p:sp>
+        <p:nvSpPr>
+          <p:cNvPr id="23" name="Text 21"/>
+          <p:cNvSpPr/>
+          <p:nvPr/>
+        </p:nvSpPr>
+        <p:spPr>
+          <a:xfrm>
+            <a:off x="2385212" y="1051560"/>
+            <a:ext cx="606247" cy="201168"/>
           </a:xfrm>
           <a:prstGeom prst="rect">
             <a:avLst/>
@@ -5725,9 +5752,9 @@
               <a:buNone/>
             </a:pPr>
             <a:r>
-              <a:rPr lang="en-US" sz="800" dirty="0">
-                <a:solidFill>
-                  <a:srgbClr val="F85149"/>
+              <a:rPr lang="en-US" sz="750" b="1" dirty="0">
+                <a:solidFill>
+                  <a:srgbClr val="C4605B"/>
                 </a:solidFill>
                 <a:latin typeface="Consolas" pitchFamily="34" charset="0"/>
                 <a:ea typeface="Consolas" pitchFamily="34" charset="-122"/>
@@ -5735,13 +5762,13 @@
               </a:rPr>
               <a:t>WRITE</a:t>
             </a:r>
-            <a:endParaRPr lang="en-US" sz="800" dirty="0"/>
-          </a:p>
-        </p:txBody>
-      </p:sp>
-      <p:sp>
-        <p:nvSpPr>
-          <p:cNvPr id="23" name="Shape 21"/>
+            <a:endParaRPr lang="en-US" sz="750" dirty="0"/>
+          </a:p>
+        </p:txBody>
+      </p:sp>
+      <p:sp>
+        <p:nvSpPr>
+          <p:cNvPr id="24" name="Shape 22"/>
           <p:cNvSpPr/>
           <p:nvPr/>
         </p:nvSpPr>
@@ -5756,7 +5783,7 @@
           <a:noFill/>
           <a:ln w="19050">
             <a:solidFill>
-              <a:srgbClr val="3FB950"/>
+              <a:srgbClr val="4A9968"/>
             </a:solidFill>
             <a:prstDash val="solid"/>
             <a:tailEnd type="arrow"/>
@@ -5765,14 +5792,41 @@
       </p:sp>
       <p:sp>
         <p:nvSpPr>
-          <p:cNvPr id="24" name="Text 22"/>
-          <p:cNvSpPr/>
-          <p:nvPr/>
-        </p:nvSpPr>
-        <p:spPr>
-          <a:xfrm>
-            <a:off x="2286000" y="1801368"/>
-            <a:ext cx="804672" cy="182880"/>
+          <p:cNvPr id="25" name="Shape 23"/>
+          <p:cNvSpPr/>
+          <p:nvPr/>
+        </p:nvSpPr>
+        <p:spPr>
+          <a:xfrm>
+            <a:off x="2385212" y="1783080"/>
+            <a:ext cx="606247" cy="201168"/>
+          </a:xfrm>
+          <a:prstGeom prst="roundRect">
+            <a:avLst>
+              <a:gd name="adj" fmla="val 27273"/>
+            </a:avLst>
+          </a:prstGeom>
+          <a:solidFill>
+            <a:srgbClr val="F5F1EB"/>
+          </a:solidFill>
+          <a:ln w="9525">
+            <a:solidFill>
+              <a:srgbClr val="4A9968"/>
+            </a:solidFill>
+            <a:prstDash val="solid"/>
+          </a:ln>
+        </p:spPr>
+      </p:sp>
+      <p:sp>
+        <p:nvSpPr>
+          <p:cNvPr id="26" name="Text 24"/>
+          <p:cNvSpPr/>
+          <p:nvPr/>
+        </p:nvSpPr>
+        <p:spPr>
+          <a:xfrm>
+            <a:off x="2385212" y="1783080"/>
+            <a:ext cx="606247" cy="201168"/>
           </a:xfrm>
           <a:prstGeom prst="rect">
             <a:avLst/>
@@ -5788,9 +5842,9 @@
               <a:buNone/>
             </a:pPr>
             <a:r>
-              <a:rPr lang="en-US" sz="800" dirty="0">
-                <a:solidFill>
-                  <a:srgbClr val="3FB950"/>
+              <a:rPr lang="en-US" sz="750" b="1" dirty="0">
+                <a:solidFill>
+                  <a:srgbClr val="4A9968"/>
                 </a:solidFill>
                 <a:latin typeface="Consolas" pitchFamily="34" charset="0"/>
                 <a:ea typeface="Consolas" pitchFamily="34" charset="-122"/>
@@ -5798,13 +5852,13 @@
               </a:rPr>
               <a:t>READ</a:t>
             </a:r>
-            <a:endParaRPr lang="en-US" sz="800" dirty="0"/>
-          </a:p>
-        </p:txBody>
-      </p:sp>
-      <p:sp>
-        <p:nvSpPr>
-          <p:cNvPr id="25" name="Shape 23"/>
+            <a:endParaRPr lang="en-US" sz="750" dirty="0"/>
+          </a:p>
+        </p:txBody>
+      </p:sp>
+      <p:sp>
+        <p:nvSpPr>
+          <p:cNvPr id="27" name="Shape 25"/>
           <p:cNvSpPr/>
           <p:nvPr/>
         </p:nvSpPr>
@@ -5819,18 +5873,18 @@
             </a:avLst>
           </a:prstGeom>
           <a:solidFill>
-            <a:srgbClr val="161B22"/>
+            <a:srgbClr val="F5F1EB"/>
           </a:solidFill>
           <a:ln w="19050">
             <a:solidFill>
-              <a:srgbClr val="F85149"/>
+              <a:srgbClr val="C4605B"/>
             </a:solidFill>
             <a:prstDash val="solid"/>
           </a:ln>
           <a:effectLst>
             <a:outerShdw sx="100000" sy="100000" kx="0" ky="0" algn="bl" rotWithShape="0" blurRad="76200" dist="25400" dir="2700000">
-              <a:srgbClr val="000000">
-                <a:alpha val="30000"/>
+              <a:srgbClr val="9E9488">
+                <a:alpha val="15000"/>
               </a:srgbClr>
             </a:outerShdw>
           </a:effectLst>
@@ -5838,7 +5892,7 @@
       </p:sp>
       <p:sp>
         <p:nvSpPr>
-          <p:cNvPr id="26" name="Text 24"/>
+          <p:cNvPr id="28" name="Text 26"/>
           <p:cNvSpPr/>
           <p:nvPr/>
         </p:nvSpPr>
@@ -5874,7 +5928,7 @@
       </p:sp>
       <p:sp>
         <p:nvSpPr>
-          <p:cNvPr id="27" name="Text 25"/>
+          <p:cNvPr id="29" name="Text 27"/>
           <p:cNvSpPr/>
           <p:nvPr/>
         </p:nvSpPr>
@@ -5899,7 +5953,7 @@
             <a:r>
               <a:rPr lang="en-US" sz="1050" b="1" dirty="0">
                 <a:solidFill>
-                  <a:srgbClr val="E6EDF3"/>
+                  <a:srgbClr val="2D2926"/>
                 </a:solidFill>
                 <a:latin typeface="Calibri" pitchFamily="34" charset="0"/>
                 <a:ea typeface="Calibri" pitchFamily="34" charset="-122"/>
@@ -5913,7 +5967,7 @@
       </p:sp>
       <p:sp>
         <p:nvSpPr>
-          <p:cNvPr id="28" name="Text 26"/>
+          <p:cNvPr id="30" name="Text 28"/>
           <p:cNvSpPr/>
           <p:nvPr/>
         </p:nvSpPr>
@@ -5938,7 +5992,7 @@
             <a:r>
               <a:rPr lang="en-US" sz="800" dirty="0">
                 <a:solidFill>
-                  <a:srgbClr val="8B949E"/>
+                  <a:srgbClr val="8A8078"/>
                 </a:solidFill>
                 <a:latin typeface="Consolas" pitchFamily="34" charset="0"/>
                 <a:ea typeface="Consolas" pitchFamily="34" charset="-122"/>
@@ -5955,7 +6009,7 @@
             <a:r>
               <a:rPr lang="en-US" sz="800" dirty="0">
                 <a:solidFill>
-                  <a:srgbClr val="8B949E"/>
+                  <a:srgbClr val="8A8078"/>
                 </a:solidFill>
                 <a:latin typeface="Consolas" pitchFamily="34" charset="0"/>
                 <a:ea typeface="Consolas" pitchFamily="34" charset="-122"/>
@@ -5969,7 +6023,7 @@
       </p:sp>
       <p:sp>
         <p:nvSpPr>
-          <p:cNvPr id="29" name="Text 27"/>
+          <p:cNvPr id="31" name="Text 29"/>
           <p:cNvSpPr/>
           <p:nvPr/>
         </p:nvSpPr>
@@ -5994,7 +6048,7 @@
             <a:r>
               <a:rPr lang="en-US" sz="900" i="1" dirty="0">
                 <a:solidFill>
-                  <a:srgbClr val="8B949E"/>
+                  <a:srgbClr val="8A8078"/>
                 </a:solidFill>
                 <a:latin typeface="Consolas" pitchFamily="34" charset="0"/>
                 <a:ea typeface="Consolas" pitchFamily="34" charset="-122"/>
@@ -6008,7 +6062,7 @@
       </p:sp>
       <p:sp>
         <p:nvSpPr>
-          <p:cNvPr id="30" name="Shape 28"/>
+          <p:cNvPr id="32" name="Shape 30"/>
           <p:cNvSpPr/>
           <p:nvPr/>
         </p:nvSpPr>
@@ -6023,7 +6077,7 @@
           <a:noFill/>
           <a:ln w="19050">
             <a:solidFill>
-              <a:srgbClr val="8B949E"/>
+              <a:srgbClr val="8A8078"/>
             </a:solidFill>
             <a:prstDash val="solid"/>
             <a:tailEnd type="arrow"/>
@@ -6032,7 +6086,7 @@
       </p:sp>
       <p:sp>
         <p:nvSpPr>
-          <p:cNvPr id="31" name="Shape 29"/>
+          <p:cNvPr id="33" name="Shape 31"/>
           <p:cNvSpPr/>
           <p:nvPr/>
         </p:nvSpPr>
@@ -6048,7 +6102,7 @@
           </a:prstGeom>
           <a:ln w="12700">
             <a:solidFill>
-              <a:srgbClr val="3FB950"/>
+              <a:srgbClr val="4A9968"/>
             </a:solidFill>
             <a:prstDash val="dash"/>
           </a:ln>
@@ -6056,7 +6110,7 @@
       </p:sp>
       <p:sp>
         <p:nvSpPr>
-          <p:cNvPr id="32" name="Shape 30"/>
+          <p:cNvPr id="34" name="Shape 32"/>
           <p:cNvSpPr/>
           <p:nvPr/>
         </p:nvSpPr>
@@ -6071,19 +6125,19 @@
             </a:avLst>
           </a:prstGeom>
           <a:solidFill>
-            <a:srgbClr val="0D1117"/>
+            <a:srgbClr val="FFFDF8"/>
           </a:solidFill>
           <a:ln w="6350">
             <a:solidFill>
-              <a:srgbClr val="3FB950"/>
-            </a:solidFill>
-            <a:prstDash val="solid"/>
-          </a:ln>
-        </p:spPr>
-      </p:sp>
-      <p:sp>
-        <p:nvSpPr>
-          <p:cNvPr id="33" name="Text 31"/>
+              <a:srgbClr val="4A9968"/>
+            </a:solidFill>
+            <a:prstDash val="solid"/>
+          </a:ln>
+        </p:spPr>
+      </p:sp>
+      <p:sp>
+        <p:nvSpPr>
+          <p:cNvPr id="35" name="Text 33"/>
           <p:cNvSpPr/>
           <p:nvPr/>
         </p:nvSpPr>
@@ -6108,7 +6162,7 @@
             <a:r>
               <a:rPr lang="en-US" sz="750" b="1" dirty="0">
                 <a:solidFill>
-                  <a:srgbClr val="3FB950"/>
+                  <a:srgbClr val="4A9968"/>
                 </a:solidFill>
                 <a:latin typeface="Calibri" pitchFamily="34" charset="0"/>
                 <a:ea typeface="Calibri" pitchFamily="34" charset="-122"/>
@@ -6122,7 +6176,7 @@
       </p:sp>
       <p:sp>
         <p:nvSpPr>
-          <p:cNvPr id="34" name="Shape 32"/>
+          <p:cNvPr id="36" name="Shape 34"/>
           <p:cNvSpPr/>
           <p:nvPr/>
         </p:nvSpPr>
@@ -6137,19 +6191,19 @@
             </a:avLst>
           </a:prstGeom>
           <a:solidFill>
-            <a:srgbClr val="161B22"/>
+            <a:srgbClr val="F5F1EB"/>
           </a:solidFill>
           <a:ln w="12700">
             <a:solidFill>
-              <a:srgbClr val="E36209"/>
-            </a:solidFill>
-            <a:prstDash val="solid"/>
-          </a:ln>
-        </p:spPr>
-      </p:sp>
-      <p:sp>
-        <p:nvSpPr>
-          <p:cNvPr id="35" name="Text 33"/>
+              <a:srgbClr val="C4804A"/>
+            </a:solidFill>
+            <a:prstDash val="solid"/>
+          </a:ln>
+        </p:spPr>
+      </p:sp>
+      <p:sp>
+        <p:nvSpPr>
+          <p:cNvPr id="37" name="Text 35"/>
           <p:cNvSpPr/>
           <p:nvPr/>
         </p:nvSpPr>
@@ -6185,7 +6239,7 @@
       </p:sp>
       <p:sp>
         <p:nvSpPr>
-          <p:cNvPr id="36" name="Text 34"/>
+          <p:cNvPr id="38" name="Text 36"/>
           <p:cNvSpPr/>
           <p:nvPr/>
         </p:nvSpPr>
@@ -6210,7 +6264,7 @@
             <a:r>
               <a:rPr lang="en-US" sz="950" b="1" dirty="0">
                 <a:solidFill>
-                  <a:srgbClr val="E6EDF3"/>
+                  <a:srgbClr val="2D2926"/>
                 </a:solidFill>
                 <a:latin typeface="Calibri" pitchFamily="34" charset="0"/>
                 <a:ea typeface="Calibri" pitchFamily="34" charset="-122"/>
@@ -6224,7 +6278,7 @@
       </p:sp>
       <p:sp>
         <p:nvSpPr>
-          <p:cNvPr id="37" name="Shape 35"/>
+          <p:cNvPr id="39" name="Shape 37"/>
           <p:cNvSpPr/>
           <p:nvPr/>
         </p:nvSpPr>
@@ -6239,19 +6293,19 @@
             </a:avLst>
           </a:prstGeom>
           <a:solidFill>
-            <a:srgbClr val="161B22"/>
+            <a:srgbClr val="F5F1EB"/>
           </a:solidFill>
           <a:ln w="12700">
             <a:solidFill>
-              <a:srgbClr val="E36209"/>
-            </a:solidFill>
-            <a:prstDash val="solid"/>
-          </a:ln>
-        </p:spPr>
-      </p:sp>
-      <p:sp>
-        <p:nvSpPr>
-          <p:cNvPr id="38" name="Text 36"/>
+              <a:srgbClr val="C4804A"/>
+            </a:solidFill>
+            <a:prstDash val="solid"/>
+          </a:ln>
+        </p:spPr>
+      </p:sp>
+      <p:sp>
+        <p:nvSpPr>
+          <p:cNvPr id="40" name="Text 38"/>
           <p:cNvSpPr/>
           <p:nvPr/>
         </p:nvSpPr>
@@ -6287,7 +6341,7 @@
       </p:sp>
       <p:sp>
         <p:nvSpPr>
-          <p:cNvPr id="39" name="Text 37"/>
+          <p:cNvPr id="41" name="Text 39"/>
           <p:cNvSpPr/>
           <p:nvPr/>
         </p:nvSpPr>
@@ -6312,7 +6366,7 @@
             <a:r>
               <a:rPr lang="en-US" sz="950" b="1" dirty="0">
                 <a:solidFill>
-                  <a:srgbClr val="E6EDF3"/>
+                  <a:srgbClr val="2D2926"/>
                 </a:solidFill>
                 <a:latin typeface="Calibri" pitchFamily="34" charset="0"/>
                 <a:ea typeface="Calibri" pitchFamily="34" charset="-122"/>
@@ -6326,7 +6380,7 @@
       </p:sp>
       <p:sp>
         <p:nvSpPr>
-          <p:cNvPr id="40" name="Shape 38"/>
+          <p:cNvPr id="42" name="Shape 40"/>
           <p:cNvSpPr/>
           <p:nvPr/>
         </p:nvSpPr>
@@ -6341,19 +6395,19 @@
             </a:avLst>
           </a:prstGeom>
           <a:solidFill>
-            <a:srgbClr val="161B22"/>
+            <a:srgbClr val="F5F1EB"/>
           </a:solidFill>
           <a:ln w="12700">
             <a:solidFill>
-              <a:srgbClr val="E36209"/>
-            </a:solidFill>
-            <a:prstDash val="solid"/>
-          </a:ln>
-        </p:spPr>
-      </p:sp>
-      <p:sp>
-        <p:nvSpPr>
-          <p:cNvPr id="41" name="Text 39"/>
+              <a:srgbClr val="C4804A"/>
+            </a:solidFill>
+            <a:prstDash val="solid"/>
+          </a:ln>
+        </p:spPr>
+      </p:sp>
+      <p:sp>
+        <p:nvSpPr>
+          <p:cNvPr id="43" name="Text 41"/>
           <p:cNvSpPr/>
           <p:nvPr/>
         </p:nvSpPr>
@@ -6389,7 +6443,7 @@
       </p:sp>
       <p:sp>
         <p:nvSpPr>
-          <p:cNvPr id="42" name="Text 40"/>
+          <p:cNvPr id="44" name="Text 42"/>
           <p:cNvSpPr/>
           <p:nvPr/>
         </p:nvSpPr>
@@ -6414,7 +6468,7 @@
             <a:r>
               <a:rPr lang="en-US" sz="950" b="1" dirty="0">
                 <a:solidFill>
-                  <a:srgbClr val="E6EDF3"/>
+                  <a:srgbClr val="2D2926"/>
                 </a:solidFill>
                 <a:latin typeface="Calibri" pitchFamily="34" charset="0"/>
                 <a:ea typeface="Calibri" pitchFamily="34" charset="-122"/>
@@ -6428,7 +6482,7 @@
       </p:sp>
       <p:sp>
         <p:nvSpPr>
-          <p:cNvPr id="43" name="Shape 41"/>
+          <p:cNvPr id="45" name="Shape 43"/>
           <p:cNvSpPr/>
           <p:nvPr/>
         </p:nvSpPr>
@@ -6443,7 +6497,7 @@
           <a:noFill/>
           <a:ln w="19050">
             <a:solidFill>
-              <a:srgbClr val="3FB950"/>
+              <a:srgbClr val="4A9968"/>
             </a:solidFill>
             <a:prstDash val="solid"/>
             <a:tailEnd type="arrow"/>
@@ -6452,7 +6506,7 @@
       </p:sp>
       <p:sp>
         <p:nvSpPr>
-          <p:cNvPr id="44" name="Shape 42"/>
+          <p:cNvPr id="46" name="Shape 44"/>
           <p:cNvSpPr/>
           <p:nvPr/>
         </p:nvSpPr>
@@ -6467,7 +6521,7 @@
           <a:noFill/>
           <a:ln w="19050">
             <a:solidFill>
-              <a:srgbClr val="3FB950"/>
+              <a:srgbClr val="4A9968"/>
             </a:solidFill>
             <a:prstDash val="solid"/>
             <a:tailEnd type="arrow"/>
@@ -6476,7 +6530,7 @@
       </p:sp>
       <p:sp>
         <p:nvSpPr>
-          <p:cNvPr id="45" name="Shape 43"/>
+          <p:cNvPr id="47" name="Shape 45"/>
           <p:cNvSpPr/>
           <p:nvPr/>
         </p:nvSpPr>
@@ -6491,7 +6545,7 @@
           <a:noFill/>
           <a:ln w="19050">
             <a:solidFill>
-              <a:srgbClr val="3FB950"/>
+              <a:srgbClr val="4A9968"/>
             </a:solidFill>
             <a:prstDash val="solid"/>
             <a:tailEnd type="arrow"/>
@@ -6500,7 +6554,7 @@
       </p:sp>
       <p:sp>
         <p:nvSpPr>
-          <p:cNvPr id="46" name="Text 44"/>
+          <p:cNvPr id="48" name="Text 46"/>
           <p:cNvSpPr/>
           <p:nvPr/>
         </p:nvSpPr>
@@ -6525,13 +6579,13 @@
             <a:r>
               <a:rPr lang="en-US" sz="900" i="1" dirty="0">
                 <a:solidFill>
-                  <a:srgbClr val="8B949E"/>
-                </a:solidFill>
-                <a:latin typeface="Calibri" pitchFamily="34" charset="0"/>
-                <a:ea typeface="Calibri" pitchFamily="34" charset="-122"/>
-                <a:cs typeface="Calibri" pitchFamily="34" charset="-120"/>
-              </a:rPr>
-              <a:t>非同步複製 (async) — 可能有微小延遲 (Replication Lag)</a:t>
+                  <a:srgbClr val="8A8078"/>
+                </a:solidFill>
+                <a:latin typeface="Calibri" pitchFamily="34" charset="0"/>
+                <a:ea typeface="Calibri" pitchFamily="34" charset="-122"/>
+                <a:cs typeface="Calibri" pitchFamily="34" charset="-120"/>
+              </a:rPr>
+              <a:t>Async replication — may have slight delay (Replication Lag)</a:t>
             </a:r>
             <a:endParaRPr lang="en-US" sz="900" dirty="0"/>
           </a:p>
@@ -6539,7 +6593,7 @@
       </p:sp>
       <p:sp>
         <p:nvSpPr>
-          <p:cNvPr id="47" name="Shape 45"/>
+          <p:cNvPr id="49" name="Shape 47"/>
           <p:cNvSpPr/>
           <p:nvPr/>
         </p:nvSpPr>
@@ -6552,19 +6606,19 @@
             <a:avLst/>
           </a:prstGeom>
           <a:solidFill>
-            <a:srgbClr val="0F2A1A"/>
+            <a:srgbClr val="E5F0E9"/>
           </a:solidFill>
           <a:ln w="6350">
             <a:solidFill>
-              <a:srgbClr val="3FB950"/>
-            </a:solidFill>
-            <a:prstDash val="solid"/>
-          </a:ln>
-        </p:spPr>
-      </p:sp>
-      <p:sp>
-        <p:nvSpPr>
-          <p:cNvPr id="48" name="Shape 46"/>
+              <a:srgbClr val="4A9968"/>
+            </a:solidFill>
+            <a:prstDash val="solid"/>
+          </a:ln>
+        </p:spPr>
+      </p:sp>
+      <p:sp>
+        <p:nvSpPr>
+          <p:cNvPr id="50" name="Shape 48"/>
           <p:cNvSpPr/>
           <p:nvPr/>
         </p:nvSpPr>
@@ -6577,19 +6631,19 @@
             <a:avLst/>
           </a:prstGeom>
           <a:solidFill>
-            <a:srgbClr val="2A0F0F"/>
+            <a:srgbClr val="F8ECEC"/>
           </a:solidFill>
           <a:ln w="6350">
             <a:solidFill>
-              <a:srgbClr val="F85149"/>
-            </a:solidFill>
-            <a:prstDash val="solid"/>
-          </a:ln>
-        </p:spPr>
-      </p:sp>
-      <p:sp>
-        <p:nvSpPr>
-          <p:cNvPr id="49" name="Text 47"/>
+              <a:srgbClr val="C4605B"/>
+            </a:solidFill>
+            <a:prstDash val="solid"/>
+          </a:ln>
+        </p:spPr>
+      </p:sp>
+      <p:sp>
+        <p:nvSpPr>
+          <p:cNvPr id="51" name="Text 49"/>
           <p:cNvSpPr/>
           <p:nvPr/>
         </p:nvSpPr>
@@ -6614,13 +6668,13 @@
             <a:r>
               <a:rPr lang="en-US" sz="1050" b="1" dirty="0">
                 <a:solidFill>
-                  <a:srgbClr val="3FB950"/>
-                </a:solidFill>
-                <a:latin typeface="Calibri" pitchFamily="34" charset="0"/>
-                <a:ea typeface="Calibri" pitchFamily="34" charset="-122"/>
-                <a:cs typeface="Calibri" pitchFamily="34" charset="-120"/>
-              </a:rPr>
-              <a:t>✅  優點 / 適用場景</a:t>
+                  <a:srgbClr val="4A9968"/>
+                </a:solidFill>
+                <a:latin typeface="Calibri" pitchFamily="34" charset="0"/>
+                <a:ea typeface="Calibri" pitchFamily="34" charset="-122"/>
+                <a:cs typeface="Calibri" pitchFamily="34" charset="-120"/>
+              </a:rPr>
+              <a:t>✅  Advantages</a:t>
             </a:r>
             <a:endParaRPr lang="en-US" sz="1050" dirty="0"/>
           </a:p>
@@ -6628,7 +6682,7 @@
       </p:sp>
       <p:sp>
         <p:nvSpPr>
-          <p:cNvPr id="50" name="Text 48"/>
+          <p:cNvPr id="52" name="Text 50"/>
           <p:cNvSpPr/>
           <p:nvPr/>
         </p:nvSpPr>
@@ -6653,13 +6707,13 @@
             <a:r>
               <a:rPr lang="en-US" sz="1050" b="1" dirty="0">
                 <a:solidFill>
-                  <a:srgbClr val="F85149"/>
-                </a:solidFill>
-                <a:latin typeface="Calibri" pitchFamily="34" charset="0"/>
-                <a:ea typeface="Calibri" pitchFamily="34" charset="-122"/>
-                <a:cs typeface="Calibri" pitchFamily="34" charset="-120"/>
-              </a:rPr>
-              <a:t>⚠️  限制 / 痛點</a:t>
+                  <a:srgbClr val="C4605B"/>
+                </a:solidFill>
+                <a:latin typeface="Calibri" pitchFamily="34" charset="0"/>
+                <a:ea typeface="Calibri" pitchFamily="34" charset="-122"/>
+                <a:cs typeface="Calibri" pitchFamily="34" charset="-120"/>
+              </a:rPr>
+              <a:t>⚠️  Limitations</a:t>
             </a:r>
             <a:endParaRPr lang="en-US" sz="1050" dirty="0"/>
           </a:p>
@@ -6667,7 +6721,7 @@
       </p:sp>
       <p:sp>
         <p:nvSpPr>
-          <p:cNvPr id="51" name="Shape 49"/>
+          <p:cNvPr id="53" name="Shape 51"/>
           <p:cNvSpPr/>
           <p:nvPr/>
         </p:nvSpPr>
@@ -6680,19 +6734,19 @@
             <a:avLst/>
           </a:prstGeom>
           <a:solidFill>
-            <a:srgbClr val="3FB950"/>
+            <a:srgbClr val="4A9968"/>
           </a:solidFill>
           <a:ln w="12700">
             <a:solidFill>
-              <a:srgbClr val="3FB950"/>
-            </a:solidFill>
-            <a:prstDash val="solid"/>
-          </a:ln>
-        </p:spPr>
-      </p:sp>
-      <p:sp>
-        <p:nvSpPr>
-          <p:cNvPr id="52" name="Text 50"/>
+              <a:srgbClr val="4A9968"/>
+            </a:solidFill>
+            <a:prstDash val="solid"/>
+          </a:ln>
+        </p:spPr>
+      </p:sp>
+      <p:sp>
+        <p:nvSpPr>
+          <p:cNvPr id="54" name="Text 52"/>
           <p:cNvSpPr/>
           <p:nvPr/>
         </p:nvSpPr>
@@ -6717,13 +6771,13 @@
             <a:r>
               <a:rPr lang="en-US" sz="1050" b="1" dirty="0">
                 <a:solidFill>
-                  <a:srgbClr val="E6EDF3"/>
-                </a:solidFill>
-                <a:latin typeface="Calibri" pitchFamily="34" charset="0"/>
-                <a:ea typeface="Calibri" pitchFamily="34" charset="-122"/>
-                <a:cs typeface="Calibri" pitchFamily="34" charset="-120"/>
-              </a:rPr>
-              <a:t>讀取效能大幅提升</a:t>
+                  <a:srgbClr val="2D2926"/>
+                </a:solidFill>
+                <a:latin typeface="Calibri" pitchFamily="34" charset="0"/>
+                <a:ea typeface="Calibri" pitchFamily="34" charset="-122"/>
+                <a:cs typeface="Calibri" pitchFamily="34" charset="-120"/>
+              </a:rPr>
+              <a:t>Read Performance Boost</a:t>
             </a:r>
             <a:endParaRPr lang="en-US" sz="1050" dirty="0"/>
           </a:p>
@@ -6731,7 +6785,7 @@
       </p:sp>
       <p:sp>
         <p:nvSpPr>
-          <p:cNvPr id="53" name="Text 51"/>
+          <p:cNvPr id="55" name="Text 53"/>
           <p:cNvSpPr/>
           <p:nvPr/>
         </p:nvSpPr>
@@ -6756,13 +6810,13 @@
             <a:r>
               <a:rPr lang="en-US" sz="900" dirty="0">
                 <a:solidFill>
-                  <a:srgbClr val="8B949E"/>
-                </a:solidFill>
-                <a:latin typeface="Calibri" pitchFamily="34" charset="0"/>
-                <a:ea typeface="Calibri" pitchFamily="34" charset="-122"/>
-                <a:cs typeface="Calibri" pitchFamily="34" charset="-120"/>
-              </a:rPr>
-              <a:t>90% 操作是 Read，Replica 分流</a:t>
+                  <a:srgbClr val="8A8078"/>
+                </a:solidFill>
+                <a:latin typeface="Calibri" pitchFamily="34" charset="0"/>
+                <a:ea typeface="Calibri" pitchFamily="34" charset="-122"/>
+                <a:cs typeface="Calibri" pitchFamily="34" charset="-120"/>
+              </a:rPr>
+              <a:t>90% of operations are reads — offloaded to replicas</a:t>
             </a:r>
             <a:endParaRPr lang="en-US" sz="900" dirty="0"/>
           </a:p>
@@ -6770,7 +6824,7 @@
       </p:sp>
       <p:sp>
         <p:nvSpPr>
-          <p:cNvPr id="54" name="Shape 52"/>
+          <p:cNvPr id="56" name="Shape 54"/>
           <p:cNvSpPr/>
           <p:nvPr/>
         </p:nvSpPr>
@@ -6783,19 +6837,19 @@
             <a:avLst/>
           </a:prstGeom>
           <a:solidFill>
-            <a:srgbClr val="3FB950"/>
+            <a:srgbClr val="4A9968"/>
           </a:solidFill>
           <a:ln w="12700">
             <a:solidFill>
-              <a:srgbClr val="3FB950"/>
-            </a:solidFill>
-            <a:prstDash val="solid"/>
-          </a:ln>
-        </p:spPr>
-      </p:sp>
-      <p:sp>
-        <p:nvSpPr>
-          <p:cNvPr id="55" name="Text 53"/>
+              <a:srgbClr val="4A9968"/>
+            </a:solidFill>
+            <a:prstDash val="solid"/>
+          </a:ln>
+        </p:spPr>
+      </p:sp>
+      <p:sp>
+        <p:nvSpPr>
+          <p:cNvPr id="57" name="Text 55"/>
           <p:cNvSpPr/>
           <p:nvPr/>
         </p:nvSpPr>
@@ -6820,13 +6874,13 @@
             <a:r>
               <a:rPr lang="en-US" sz="1050" b="1" dirty="0">
                 <a:solidFill>
-                  <a:srgbClr val="E6EDF3"/>
-                </a:solidFill>
-                <a:latin typeface="Calibri" pitchFamily="34" charset="0"/>
-                <a:ea typeface="Calibri" pitchFamily="34" charset="-122"/>
-                <a:cs typeface="Calibri" pitchFamily="34" charset="-120"/>
-              </a:rPr>
-              <a:t>Primary 專注寫入</a:t>
+                  <a:srgbClr val="2D2926"/>
+                </a:solidFill>
+                <a:latin typeface="Calibri" pitchFamily="34" charset="0"/>
+                <a:ea typeface="Calibri" pitchFamily="34" charset="-122"/>
+                <a:cs typeface="Calibri" pitchFamily="34" charset="-120"/>
+              </a:rPr>
+              <a:t>Primary Focuses on Writes</a:t>
             </a:r>
             <a:endParaRPr lang="en-US" sz="1050" dirty="0"/>
           </a:p>
@@ -6834,7 +6888,7 @@
       </p:sp>
       <p:sp>
         <p:nvSpPr>
-          <p:cNvPr id="56" name="Text 54"/>
+          <p:cNvPr id="58" name="Text 56"/>
           <p:cNvSpPr/>
           <p:nvPr/>
         </p:nvSpPr>
@@ -6859,13 +6913,13 @@
             <a:r>
               <a:rPr lang="en-US" sz="900" dirty="0">
                 <a:solidFill>
-                  <a:srgbClr val="8B949E"/>
-                </a:solidFill>
-                <a:latin typeface="Calibri" pitchFamily="34" charset="0"/>
-                <a:ea typeface="Calibri" pitchFamily="34" charset="-122"/>
-                <a:cs typeface="Calibri" pitchFamily="34" charset="-120"/>
-              </a:rPr>
-              <a:t>Write 效能不受 Read 影響</a:t>
+                  <a:srgbClr val="8A8078"/>
+                </a:solidFill>
+                <a:latin typeface="Calibri" pitchFamily="34" charset="0"/>
+                <a:ea typeface="Calibri" pitchFamily="34" charset="-122"/>
+                <a:cs typeface="Calibri" pitchFamily="34" charset="-120"/>
+              </a:rPr>
+              <a:t>Write performance unaffected by reads</a:t>
             </a:r>
             <a:endParaRPr lang="en-US" sz="900" dirty="0"/>
           </a:p>
@@ -6873,7 +6927,7 @@
       </p:sp>
       <p:sp>
         <p:nvSpPr>
-          <p:cNvPr id="57" name="Shape 55"/>
+          <p:cNvPr id="59" name="Shape 57"/>
           <p:cNvSpPr/>
           <p:nvPr/>
         </p:nvSpPr>
@@ -6886,19 +6940,19 @@
             <a:avLst/>
           </a:prstGeom>
           <a:solidFill>
-            <a:srgbClr val="F85149"/>
+            <a:srgbClr val="C4605B"/>
           </a:solidFill>
           <a:ln w="12700">
             <a:solidFill>
-              <a:srgbClr val="F85149"/>
-            </a:solidFill>
-            <a:prstDash val="solid"/>
-          </a:ln>
-        </p:spPr>
-      </p:sp>
-      <p:sp>
-        <p:nvSpPr>
-          <p:cNvPr id="58" name="Text 56"/>
+              <a:srgbClr val="C4605B"/>
+            </a:solidFill>
+            <a:prstDash val="solid"/>
+          </a:ln>
+        </p:spPr>
+      </p:sp>
+      <p:sp>
+        <p:nvSpPr>
+          <p:cNvPr id="60" name="Text 58"/>
           <p:cNvSpPr/>
           <p:nvPr/>
         </p:nvSpPr>
@@ -6923,7 +6977,7 @@
             <a:r>
               <a:rPr lang="en-US" sz="1050" b="1" dirty="0">
                 <a:solidFill>
-                  <a:srgbClr val="E6EDF3"/>
+                  <a:srgbClr val="2D2926"/>
                 </a:solidFill>
                 <a:latin typeface="Calibri" pitchFamily="34" charset="0"/>
                 <a:ea typeface="Calibri" pitchFamily="34" charset="-122"/>
@@ -6937,7 +6991,7 @@
       </p:sp>
       <p:sp>
         <p:nvSpPr>
-          <p:cNvPr id="59" name="Text 57"/>
+          <p:cNvPr id="61" name="Text 59"/>
           <p:cNvSpPr/>
           <p:nvPr/>
         </p:nvSpPr>
@@ -6962,13 +7016,13 @@
             <a:r>
               <a:rPr lang="en-US" sz="900" dirty="0">
                 <a:solidFill>
-                  <a:srgbClr val="8B949E"/>
-                </a:solidFill>
-                <a:latin typeface="Calibri" pitchFamily="34" charset="0"/>
-                <a:ea typeface="Calibri" pitchFamily="34" charset="-122"/>
-                <a:cs typeface="Calibri" pitchFamily="34" charset="-120"/>
-              </a:rPr>
-              <a:t>Replica 資料可能落後 Primary 數毫秒</a:t>
+                  <a:srgbClr val="8A8078"/>
+                </a:solidFill>
+                <a:latin typeface="Calibri" pitchFamily="34" charset="0"/>
+                <a:ea typeface="Calibri" pitchFamily="34" charset="-122"/>
+                <a:cs typeface="Calibri" pitchFamily="34" charset="-120"/>
+              </a:rPr>
+              <a:t>Replica data may lag behind primary by milliseconds</a:t>
             </a:r>
             <a:endParaRPr lang="en-US" sz="900" dirty="0"/>
           </a:p>
@@ -6976,7 +7030,7 @@
       </p:sp>
       <p:sp>
         <p:nvSpPr>
-          <p:cNvPr id="60" name="Shape 58"/>
+          <p:cNvPr id="62" name="Shape 60"/>
           <p:cNvSpPr/>
           <p:nvPr/>
         </p:nvSpPr>
@@ -6989,19 +7043,19 @@
             <a:avLst/>
           </a:prstGeom>
           <a:solidFill>
-            <a:srgbClr val="F85149"/>
+            <a:srgbClr val="C4605B"/>
           </a:solidFill>
           <a:ln w="12700">
             <a:solidFill>
-              <a:srgbClr val="F85149"/>
-            </a:solidFill>
-            <a:prstDash val="solid"/>
-          </a:ln>
-        </p:spPr>
-      </p:sp>
-      <p:sp>
-        <p:nvSpPr>
-          <p:cNvPr id="61" name="Text 59"/>
+              <a:srgbClr val="C4605B"/>
+            </a:solidFill>
+            <a:prstDash val="solid"/>
+          </a:ln>
+        </p:spPr>
+      </p:sp>
+      <p:sp>
+        <p:nvSpPr>
+          <p:cNvPr id="63" name="Text 61"/>
           <p:cNvSpPr/>
           <p:nvPr/>
         </p:nvSpPr>
@@ -7026,13 +7080,13 @@
             <a:r>
               <a:rPr lang="en-US" sz="1050" b="1" dirty="0">
                 <a:solidFill>
-                  <a:srgbClr val="E6EDF3"/>
-                </a:solidFill>
-                <a:latin typeface="Calibri" pitchFamily="34" charset="0"/>
-                <a:ea typeface="Calibri" pitchFamily="34" charset="-122"/>
-                <a:cs typeface="Calibri" pitchFamily="34" charset="-120"/>
-              </a:rPr>
-              <a:t>不解決 Write 瓶頸</a:t>
+                  <a:srgbClr val="2D2926"/>
+                </a:solidFill>
+                <a:latin typeface="Calibri" pitchFamily="34" charset="0"/>
+                <a:ea typeface="Calibri" pitchFamily="34" charset="-122"/>
+                <a:cs typeface="Calibri" pitchFamily="34" charset="-120"/>
+              </a:rPr>
+              <a:t>Does Not Solve Write Bottleneck</a:t>
             </a:r>
             <a:endParaRPr lang="en-US" sz="1050" dirty="0"/>
           </a:p>
@@ -7040,7 +7094,7 @@
       </p:sp>
       <p:sp>
         <p:nvSpPr>
-          <p:cNvPr id="62" name="Text 60"/>
+          <p:cNvPr id="64" name="Text 62"/>
           <p:cNvSpPr/>
           <p:nvPr/>
         </p:nvSpPr>
@@ -7065,13 +7119,13 @@
             <a:r>
               <a:rPr lang="en-US" sz="900" dirty="0">
                 <a:solidFill>
-                  <a:srgbClr val="8B949E"/>
-                </a:solidFill>
-                <a:latin typeface="Calibri" pitchFamily="34" charset="0"/>
-                <a:ea typeface="Calibri" pitchFamily="34" charset="-122"/>
-                <a:cs typeface="Calibri" pitchFamily="34" charset="-120"/>
-              </a:rPr>
-              <a:t>高頻寫入仍然是 Primary 的問題</a:t>
+                  <a:srgbClr val="8A8078"/>
+                </a:solidFill>
+                <a:latin typeface="Calibri" pitchFamily="34" charset="0"/>
+                <a:ea typeface="Calibri" pitchFamily="34" charset="-122"/>
+                <a:cs typeface="Calibri" pitchFamily="34" charset="-120"/>
+              </a:rPr>
+              <a:t>High-frequency writes remain a primary-only problem</a:t>
             </a:r>
             <a:endParaRPr lang="en-US" sz="900" dirty="0"/>
           </a:p>
@@ -7091,7 +7145,7 @@
     <p:bg>
       <p:bgPr>
         <a:solidFill>
-          <a:srgbClr val="0D1117"/>
+          <a:srgbClr val="FFFDF8"/>
         </a:solidFill>
       </p:bgPr>
     </p:bg>
@@ -7124,11 +7178,11 @@
             <a:avLst/>
           </a:prstGeom>
           <a:solidFill>
-            <a:srgbClr val="161B22"/>
+            <a:srgbClr val="F5F1EB"/>
           </a:solidFill>
           <a:ln w="6350">
             <a:solidFill>
-              <a:srgbClr val="30363D"/>
+              <a:srgbClr val="D6CCBF"/>
             </a:solidFill>
             <a:prstDash val="solid"/>
           </a:ln>
@@ -7149,11 +7203,11 @@
             <a:avLst/>
           </a:prstGeom>
           <a:solidFill>
-            <a:srgbClr val="58A6FF"/>
+            <a:srgbClr val="4A7FB5"/>
           </a:solidFill>
           <a:ln w="12700">
             <a:solidFill>
-              <a:srgbClr val="58A6FF"/>
+              <a:srgbClr val="4A7FB5"/>
             </a:solidFill>
             <a:prstDash val="solid"/>
           </a:ln>
@@ -7186,13 +7240,13 @@
             <a:r>
               <a:rPr lang="en-US" sz="1600" b="1" dirty="0">
                 <a:solidFill>
-                  <a:srgbClr val="E6EDF3"/>
-                </a:solidFill>
-                <a:latin typeface="Calibri" pitchFamily="34" charset="0"/>
-                <a:ea typeface="Calibri" pitchFamily="34" charset="-122"/>
-                <a:cs typeface="Calibri" pitchFamily="34" charset="-120"/>
-              </a:rPr>
-              <a:t>三層 Caching 策略：從外到內</a:t>
+                  <a:srgbClr val="2D2926"/>
+                </a:solidFill>
+                <a:latin typeface="Calibri" pitchFamily="34" charset="0"/>
+                <a:ea typeface="Calibri" pitchFamily="34" charset="-122"/>
+                <a:cs typeface="Calibri" pitchFamily="34" charset="-120"/>
+              </a:rPr>
+              <a:t>Three-Tier Caching Strategy: Outside to Inside</a:t>
             </a:r>
             <a:endParaRPr lang="en-US" sz="1600" dirty="0"/>
           </a:p>
@@ -7225,13 +7279,13 @@
             <a:r>
               <a:rPr lang="en-US" sz="850" dirty="0">
                 <a:solidFill>
-                  <a:srgbClr val="8B949E"/>
-                </a:solidFill>
-                <a:latin typeface="Calibri" pitchFamily="34" charset="0"/>
-                <a:ea typeface="Calibri" pitchFamily="34" charset="-122"/>
-                <a:cs typeface="Calibri" pitchFamily="34" charset="-120"/>
-              </a:rPr>
-              <a:t>PART 2  ·  16 / 50</a:t>
+                  <a:srgbClr val="8A8078"/>
+                </a:solidFill>
+                <a:latin typeface="Calibri" pitchFamily="34" charset="0"/>
+                <a:ea typeface="Calibri" pitchFamily="34" charset="-122"/>
+                <a:cs typeface="Calibri" pitchFamily="34" charset="-120"/>
+              </a:rPr>
+              <a:t>PART 2</a:t>
             </a:r>
             <a:endParaRPr lang="en-US" sz="850" dirty="0"/>
           </a:p>
@@ -7254,11 +7308,11 @@
             </a:avLst>
           </a:prstGeom>
           <a:solidFill>
-            <a:srgbClr val="161B22"/>
+            <a:srgbClr val="F5F1EB"/>
           </a:solidFill>
           <a:ln w="15240">
             <a:solidFill>
-              <a:srgbClr val="1A7F64"/>
+              <a:srgbClr val="4A917E"/>
             </a:solidFill>
             <a:prstDash val="solid"/>
           </a:ln>
@@ -7279,11 +7333,11 @@
             <a:avLst/>
           </a:prstGeom>
           <a:solidFill>
-            <a:srgbClr val="1C2128"/>
+            <a:srgbClr val="ECE6DD"/>
           </a:solidFill>
           <a:ln w="12700">
             <a:solidFill>
-              <a:srgbClr val="30363D"/>
+              <a:srgbClr val="D6CCBF"/>
             </a:solidFill>
             <a:prstDash val="solid"/>
           </a:ln>
@@ -7352,7 +7406,7 @@
             <a:r>
               <a:rPr lang="en-US" sz="1200" b="1" dirty="0">
                 <a:solidFill>
-                  <a:srgbClr val="1A7F64"/>
+                  <a:srgbClr val="4A917E"/>
                 </a:solidFill>
                 <a:latin typeface="Calibri" pitchFamily="34" charset="0"/>
                 <a:ea typeface="Calibri" pitchFamily="34" charset="-122"/>
@@ -7379,11 +7433,11 @@
             <a:avLst/>
           </a:prstGeom>
           <a:solidFill>
-            <a:srgbClr val="1A7F64"/>
+            <a:srgbClr val="4A917E"/>
           </a:solidFill>
           <a:ln w="12700">
             <a:solidFill>
-              <a:srgbClr val="1A7F64"/>
+              <a:srgbClr val="4A917E"/>
             </a:solidFill>
             <a:prstDash val="solid"/>
           </a:ln>
@@ -7416,13 +7470,13 @@
             <a:r>
               <a:rPr lang="en-US" sz="1050" b="1" dirty="0">
                 <a:solidFill>
-                  <a:srgbClr val="E6EDF3"/>
-                </a:solidFill>
-                <a:latin typeface="Calibri" pitchFamily="34" charset="0"/>
-                <a:ea typeface="Calibri" pitchFamily="34" charset="-122"/>
-                <a:cs typeface="Calibri" pitchFamily="34" charset="-120"/>
-              </a:rPr>
-              <a:t>靜態資源 (JS/CSS/圖片)</a:t>
+                  <a:srgbClr val="2D2926"/>
+                </a:solidFill>
+                <a:latin typeface="Calibri" pitchFamily="34" charset="0"/>
+                <a:ea typeface="Calibri" pitchFamily="34" charset="-122"/>
+                <a:cs typeface="Calibri" pitchFamily="34" charset="-120"/>
+              </a:rPr>
+              <a:t>Static assets (JS/CSS/images)</a:t>
             </a:r>
             <a:endParaRPr lang="en-US" sz="1050" dirty="0"/>
           </a:p>
@@ -7455,13 +7509,13 @@
             <a:r>
               <a:rPr lang="en-US" sz="850" dirty="0">
                 <a:solidFill>
-                  <a:srgbClr val="8B949E"/>
-                </a:solidFill>
-                <a:latin typeface="Calibri" pitchFamily="34" charset="0"/>
-                <a:ea typeface="Calibri" pitchFamily="34" charset="-122"/>
-                <a:cs typeface="Calibri" pitchFamily="34" charset="-120"/>
-              </a:rPr>
-              <a:t>TTL: 天/週</a:t>
+                  <a:srgbClr val="8A8078"/>
+                </a:solidFill>
+                <a:latin typeface="Calibri" pitchFamily="34" charset="0"/>
+                <a:ea typeface="Calibri" pitchFamily="34" charset="-122"/>
+                <a:cs typeface="Calibri" pitchFamily="34" charset="-120"/>
+              </a:rPr>
+              <a:t>TTL: days/weeks</a:t>
             </a:r>
             <a:endParaRPr lang="en-US" sz="850" dirty="0"/>
           </a:p>
@@ -7482,11 +7536,11 @@
             <a:avLst/>
           </a:prstGeom>
           <a:solidFill>
-            <a:srgbClr val="1A7F64"/>
+            <a:srgbClr val="4A917E"/>
           </a:solidFill>
           <a:ln w="12700">
             <a:solidFill>
-              <a:srgbClr val="1A7F64"/>
+              <a:srgbClr val="4A917E"/>
             </a:solidFill>
             <a:prstDash val="solid"/>
           </a:ln>
@@ -7519,13 +7573,13 @@
             <a:r>
               <a:rPr lang="en-US" sz="1050" b="1" dirty="0">
                 <a:solidFill>
-                  <a:srgbClr val="E6EDF3"/>
-                </a:solidFill>
-                <a:latin typeface="Calibri" pitchFamily="34" charset="0"/>
-                <a:ea typeface="Calibri" pitchFamily="34" charset="-122"/>
-                <a:cs typeface="Calibri" pitchFamily="34" charset="-120"/>
-              </a:rPr>
-              <a:t>工具: Cloudflare, CloudFront</a:t>
+                  <a:srgbClr val="2D2926"/>
+                </a:solidFill>
+                <a:latin typeface="Calibri" pitchFamily="34" charset="0"/>
+                <a:ea typeface="Calibri" pitchFamily="34" charset="-122"/>
+                <a:cs typeface="Calibri" pitchFamily="34" charset="-120"/>
+              </a:rPr>
+              <a:t>Tools: Cloudflare, CloudFront</a:t>
             </a:r>
             <a:endParaRPr lang="en-US" sz="1050" dirty="0"/>
           </a:p>
@@ -7546,11 +7600,11 @@
             <a:avLst/>
           </a:prstGeom>
           <a:solidFill>
-            <a:srgbClr val="1A7F64"/>
+            <a:srgbClr val="4A917E"/>
           </a:solidFill>
           <a:ln w="12700">
             <a:solidFill>
-              <a:srgbClr val="1A7F64"/>
+              <a:srgbClr val="4A917E"/>
             </a:solidFill>
             <a:prstDash val="solid"/>
           </a:ln>
@@ -7583,13 +7637,13 @@
             <a:r>
               <a:rPr lang="en-US" sz="1050" b="1" dirty="0">
                 <a:solidFill>
-                  <a:srgbClr val="E6EDF3"/>
-                </a:solidFill>
-                <a:latin typeface="Calibri" pitchFamily="34" charset="0"/>
-                <a:ea typeface="Calibri" pitchFamily="34" charset="-122"/>
-                <a:cs typeface="Calibri" pitchFamily="34" charset="-120"/>
-              </a:rPr>
-              <a:t>Cache Hit → 不碰後端</a:t>
+                  <a:srgbClr val="2D2926"/>
+                </a:solidFill>
+                <a:latin typeface="Calibri" pitchFamily="34" charset="0"/>
+                <a:ea typeface="Calibri" pitchFamily="34" charset="-122"/>
+                <a:cs typeface="Calibri" pitchFamily="34" charset="-120"/>
+              </a:rPr>
+              <a:t>Cache Hit → no backend contact</a:t>
             </a:r>
             <a:endParaRPr lang="en-US" sz="1050" dirty="0"/>
           </a:p>
@@ -7610,11 +7664,11 @@
             <a:avLst/>
           </a:prstGeom>
           <a:solidFill>
-            <a:srgbClr val="1A7F64"/>
+            <a:srgbClr val="4A917E"/>
           </a:solidFill>
           <a:ln w="12700">
             <a:solidFill>
-              <a:srgbClr val="1A7F64"/>
+              <a:srgbClr val="4A917E"/>
             </a:solidFill>
             <a:prstDash val="solid"/>
           </a:ln>
@@ -7647,7 +7701,7 @@
             <a:r>
               <a:rPr lang="en-US" sz="1050" b="1" dirty="0">
                 <a:solidFill>
-                  <a:srgbClr val="E6EDF3"/>
+                  <a:srgbClr val="2D2926"/>
                 </a:solidFill>
                 <a:latin typeface="Calibri" pitchFamily="34" charset="0"/>
                 <a:ea typeface="Calibri" pitchFamily="34" charset="-122"/>
@@ -7676,11 +7730,11 @@
             </a:avLst>
           </a:prstGeom>
           <a:solidFill>
-            <a:srgbClr val="161B22"/>
+            <a:srgbClr val="F5F1EB"/>
           </a:solidFill>
           <a:ln w="15240">
             <a:solidFill>
-              <a:srgbClr val="6E40C9"/>
+              <a:srgbClr val="8B6AB5"/>
             </a:solidFill>
             <a:prstDash val="solid"/>
           </a:ln>
@@ -7701,11 +7755,11 @@
             <a:avLst/>
           </a:prstGeom>
           <a:solidFill>
-            <a:srgbClr val="1C2128"/>
+            <a:srgbClr val="ECE6DD"/>
           </a:solidFill>
           <a:ln w="12700">
             <a:solidFill>
-              <a:srgbClr val="30363D"/>
+              <a:srgbClr val="D6CCBF"/>
             </a:solidFill>
             <a:prstDash val="solid"/>
           </a:ln>
@@ -7774,13 +7828,13 @@
             <a:r>
               <a:rPr lang="en-US" sz="1200" b="1" dirty="0">
                 <a:solidFill>
-                  <a:srgbClr val="6E40C9"/>
-                </a:solidFill>
-                <a:latin typeface="Calibri" pitchFamily="34" charset="0"/>
-                <a:ea typeface="Calibri" pitchFamily="34" charset="-122"/>
-                <a:cs typeface="Calibri" pitchFamily="34" charset="-120"/>
-              </a:rPr>
-              <a:t>② Redis 快取</a:t>
+                  <a:srgbClr val="8B6AB5"/>
+                </a:solidFill>
+                <a:latin typeface="Calibri" pitchFamily="34" charset="0"/>
+                <a:ea typeface="Calibri" pitchFamily="34" charset="-122"/>
+                <a:cs typeface="Calibri" pitchFamily="34" charset="-120"/>
+              </a:rPr>
+              <a:t>② Redis Cache</a:t>
             </a:r>
             <a:endParaRPr lang="en-US" sz="1200" dirty="0"/>
           </a:p>
@@ -7801,11 +7855,11 @@
             <a:avLst/>
           </a:prstGeom>
           <a:solidFill>
-            <a:srgbClr val="6E40C9"/>
+            <a:srgbClr val="8B6AB5"/>
           </a:solidFill>
           <a:ln w="12700">
             <a:solidFill>
-              <a:srgbClr val="6E40C9"/>
+              <a:srgbClr val="8B6AB5"/>
             </a:solidFill>
             <a:prstDash val="solid"/>
           </a:ln>
@@ -7838,13 +7892,13 @@
             <a:r>
               <a:rPr lang="en-US" sz="1050" b="1" dirty="0">
                 <a:solidFill>
-                  <a:srgbClr val="E6EDF3"/>
-                </a:solidFill>
-                <a:latin typeface="Calibri" pitchFamily="34" charset="0"/>
-                <a:ea typeface="Calibri" pitchFamily="34" charset="-122"/>
-                <a:cs typeface="Calibri" pitchFamily="34" charset="-120"/>
-              </a:rPr>
-              <a:t>API 回應快取</a:t>
+                  <a:srgbClr val="2D2926"/>
+                </a:solidFill>
+                <a:latin typeface="Calibri" pitchFamily="34" charset="0"/>
+                <a:ea typeface="Calibri" pitchFamily="34" charset="-122"/>
+                <a:cs typeface="Calibri" pitchFamily="34" charset="-120"/>
+              </a:rPr>
+              <a:t>API response caching</a:t>
             </a:r>
             <a:endParaRPr lang="en-US" sz="1050" dirty="0"/>
           </a:p>
@@ -7877,13 +7931,13 @@
             <a:r>
               <a:rPr lang="en-US" sz="850" dirty="0">
                 <a:solidFill>
-                  <a:srgbClr val="8B949E"/>
-                </a:solidFill>
-                <a:latin typeface="Calibri" pitchFamily="34" charset="0"/>
-                <a:ea typeface="Calibri" pitchFamily="34" charset="-122"/>
-                <a:cs typeface="Calibri" pitchFamily="34" charset="-120"/>
-              </a:rPr>
-              <a:t>TTL: 秒/分鐘</a:t>
+                  <a:srgbClr val="8A8078"/>
+                </a:solidFill>
+                <a:latin typeface="Calibri" pitchFamily="34" charset="0"/>
+                <a:ea typeface="Calibri" pitchFamily="34" charset="-122"/>
+                <a:cs typeface="Calibri" pitchFamily="34" charset="-120"/>
+              </a:rPr>
+              <a:t>TTL: seconds/minutes</a:t>
             </a:r>
             <a:endParaRPr lang="en-US" sz="850" dirty="0"/>
           </a:p>
@@ -7904,11 +7958,11 @@
             <a:avLst/>
           </a:prstGeom>
           <a:solidFill>
-            <a:srgbClr val="6E40C9"/>
+            <a:srgbClr val="8B6AB5"/>
           </a:solidFill>
           <a:ln w="12700">
             <a:solidFill>
-              <a:srgbClr val="6E40C9"/>
+              <a:srgbClr val="8B6AB5"/>
             </a:solidFill>
             <a:prstDash val="solid"/>
           </a:ln>
@@ -7941,13 +7995,13 @@
             <a:r>
               <a:rPr lang="en-US" sz="1050" b="1" dirty="0">
                 <a:solidFill>
-                  <a:srgbClr val="E6EDF3"/>
-                </a:solidFill>
-                <a:latin typeface="Calibri" pitchFamily="34" charset="0"/>
-                <a:ea typeface="Calibri" pitchFamily="34" charset="-122"/>
-                <a:cs typeface="Calibri" pitchFamily="34" charset="-120"/>
-              </a:rPr>
-              <a:t>Session 儲存</a:t>
+                  <a:srgbClr val="2D2926"/>
+                </a:solidFill>
+                <a:latin typeface="Calibri" pitchFamily="34" charset="0"/>
+                <a:ea typeface="Calibri" pitchFamily="34" charset="-122"/>
+                <a:cs typeface="Calibri" pitchFamily="34" charset="-120"/>
+              </a:rPr>
+              <a:t>Session storage</a:t>
             </a:r>
             <a:endParaRPr lang="en-US" sz="1050" dirty="0"/>
           </a:p>
@@ -7968,11 +8022,11 @@
             <a:avLst/>
           </a:prstGeom>
           <a:solidFill>
-            <a:srgbClr val="6E40C9"/>
+            <a:srgbClr val="8B6AB5"/>
           </a:solidFill>
           <a:ln w="12700">
             <a:solidFill>
-              <a:srgbClr val="6E40C9"/>
+              <a:srgbClr val="8B6AB5"/>
             </a:solidFill>
             <a:prstDash val="solid"/>
           </a:ln>
@@ -8005,13 +8059,13 @@
             <a:r>
               <a:rPr lang="en-US" sz="1050" b="1" dirty="0">
                 <a:solidFill>
-                  <a:srgbClr val="E6EDF3"/>
-                </a:solidFill>
-                <a:latin typeface="Calibri" pitchFamily="34" charset="0"/>
-                <a:ea typeface="Calibri" pitchFamily="34" charset="-122"/>
-                <a:cs typeface="Calibri" pitchFamily="34" charset="-120"/>
-              </a:rPr>
-              <a:t>工具: Redis, Memcached</a:t>
+                  <a:srgbClr val="2D2926"/>
+                </a:solidFill>
+                <a:latin typeface="Calibri" pitchFamily="34" charset="0"/>
+                <a:ea typeface="Calibri" pitchFamily="34" charset="-122"/>
+                <a:cs typeface="Calibri" pitchFamily="34" charset="-120"/>
+              </a:rPr>
+              <a:t>Tools: Redis, Memcached</a:t>
             </a:r>
             <a:endParaRPr lang="en-US" sz="1050" dirty="0"/>
           </a:p>
@@ -8032,11 +8086,11 @@
             <a:avLst/>
           </a:prstGeom>
           <a:solidFill>
-            <a:srgbClr val="6E40C9"/>
+            <a:srgbClr val="8B6AB5"/>
           </a:solidFill>
           <a:ln w="12700">
             <a:solidFill>
-              <a:srgbClr val="6E40C9"/>
+              <a:srgbClr val="8B6AB5"/>
             </a:solidFill>
             <a:prstDash val="solid"/>
           </a:ln>
@@ -8069,7 +8123,7 @@
             <a:r>
               <a:rPr lang="en-US" sz="1050" b="1" dirty="0">
                 <a:solidFill>
-                  <a:srgbClr val="E6EDF3"/>
+                  <a:srgbClr val="2D2926"/>
                 </a:solidFill>
                 <a:latin typeface="Calibri" pitchFamily="34" charset="0"/>
                 <a:ea typeface="Calibri" pitchFamily="34" charset="-122"/>
@@ -8098,11 +8152,11 @@
             </a:avLst>
           </a:prstGeom>
           <a:solidFill>
-            <a:srgbClr val="161B22"/>
+            <a:srgbClr val="F5F1EB"/>
           </a:solidFill>
           <a:ln w="15240">
             <a:solidFill>
-              <a:srgbClr val="D29922"/>
+              <a:srgbClr val="B8892C"/>
             </a:solidFill>
             <a:prstDash val="solid"/>
           </a:ln>
@@ -8123,11 +8177,11 @@
             <a:avLst/>
           </a:prstGeom>
           <a:solidFill>
-            <a:srgbClr val="1C2128"/>
+            <a:srgbClr val="ECE6DD"/>
           </a:solidFill>
           <a:ln w="12700">
             <a:solidFill>
-              <a:srgbClr val="30363D"/>
+              <a:srgbClr val="D6CCBF"/>
             </a:solidFill>
             <a:prstDash val="solid"/>
           </a:ln>
@@ -8196,13 +8250,13 @@
             <a:r>
               <a:rPr lang="en-US" sz="1200" b="1" dirty="0">
                 <a:solidFill>
-                  <a:srgbClr val="D29922"/>
-                </a:solidFill>
-                <a:latin typeface="Calibri" pitchFamily="34" charset="0"/>
-                <a:ea typeface="Calibri" pitchFamily="34" charset="-122"/>
-                <a:cs typeface="Calibri" pitchFamily="34" charset="-120"/>
-              </a:rPr>
-              <a:t>③ In-Process 快取</a:t>
+                  <a:srgbClr val="B8892C"/>
+                </a:solidFill>
+                <a:latin typeface="Calibri" pitchFamily="34" charset="0"/>
+                <a:ea typeface="Calibri" pitchFamily="34" charset="-122"/>
+                <a:cs typeface="Calibri" pitchFamily="34" charset="-120"/>
+              </a:rPr>
+              <a:t>③ In-Process Cache</a:t>
             </a:r>
             <a:endParaRPr lang="en-US" sz="1200" dirty="0"/>
           </a:p>
@@ -8223,11 +8277,11 @@
             <a:avLst/>
           </a:prstGeom>
           <a:solidFill>
-            <a:srgbClr val="D29922"/>
+            <a:srgbClr val="B8892C"/>
           </a:solidFill>
           <a:ln w="12700">
             <a:solidFill>
-              <a:srgbClr val="D29922"/>
+              <a:srgbClr val="B8892C"/>
             </a:solidFill>
             <a:prstDash val="solid"/>
           </a:ln>
@@ -8260,13 +8314,13 @@
             <a:r>
               <a:rPr lang="en-US" sz="1050" b="1" dirty="0">
                 <a:solidFill>
-                  <a:srgbClr val="E6EDF3"/>
-                </a:solidFill>
-                <a:latin typeface="Calibri" pitchFamily="34" charset="0"/>
-                <a:ea typeface="Calibri" pitchFamily="34" charset="-122"/>
-                <a:cs typeface="Calibri" pitchFamily="34" charset="-120"/>
-              </a:rPr>
-              <a:t>超熱資料 (config/常數)</a:t>
+                  <a:srgbClr val="2D2926"/>
+                </a:solidFill>
+                <a:latin typeface="Calibri" pitchFamily="34" charset="0"/>
+                <a:ea typeface="Calibri" pitchFamily="34" charset="-122"/>
+                <a:cs typeface="Calibri" pitchFamily="34" charset="-120"/>
+              </a:rPr>
+              <a:t>Hot data (config/constants)</a:t>
             </a:r>
             <a:endParaRPr lang="en-US" sz="1050" dirty="0"/>
           </a:p>
@@ -8299,13 +8353,13 @@
             <a:r>
               <a:rPr lang="en-US" sz="850" dirty="0">
                 <a:solidFill>
-                  <a:srgbClr val="8B949E"/>
-                </a:solidFill>
-                <a:latin typeface="Calibri" pitchFamily="34" charset="0"/>
-                <a:ea typeface="Calibri" pitchFamily="34" charset="-122"/>
-                <a:cs typeface="Calibri" pitchFamily="34" charset="-120"/>
-              </a:rPr>
-              <a:t>TTL: 秒級</a:t>
+                  <a:srgbClr val="8A8078"/>
+                </a:solidFill>
+                <a:latin typeface="Calibri" pitchFamily="34" charset="0"/>
+                <a:ea typeface="Calibri" pitchFamily="34" charset="-122"/>
+                <a:cs typeface="Calibri" pitchFamily="34" charset="-120"/>
+              </a:rPr>
+              <a:t>TTL: seconds</a:t>
             </a:r>
             <a:endParaRPr lang="en-US" sz="850" dirty="0"/>
           </a:p>
@@ -8326,11 +8380,11 @@
             <a:avLst/>
           </a:prstGeom>
           <a:solidFill>
-            <a:srgbClr val="D29922"/>
+            <a:srgbClr val="B8892C"/>
           </a:solidFill>
           <a:ln w="12700">
             <a:solidFill>
-              <a:srgbClr val="D29922"/>
+              <a:srgbClr val="B8892C"/>
             </a:solidFill>
             <a:prstDash val="solid"/>
           </a:ln>
@@ -8363,13 +8417,13 @@
             <a:r>
               <a:rPr lang="en-US" sz="1050" b="1" dirty="0">
                 <a:solidFill>
-                  <a:srgbClr val="E6EDF3"/>
-                </a:solidFill>
-                <a:latin typeface="Calibri" pitchFamily="34" charset="0"/>
-                <a:ea typeface="Calibri" pitchFamily="34" charset="-122"/>
-                <a:cs typeface="Calibri" pitchFamily="34" charset="-120"/>
-              </a:rPr>
-              <a:t>不可跨 Server 共用</a:t>
+                  <a:srgbClr val="2D2926"/>
+                </a:solidFill>
+                <a:latin typeface="Calibri" pitchFamily="34" charset="0"/>
+                <a:ea typeface="Calibri" pitchFamily="34" charset="-122"/>
+                <a:cs typeface="Calibri" pitchFamily="34" charset="-120"/>
+              </a:rPr>
+              <a:t>Cannot be shared across servers</a:t>
             </a:r>
             <a:endParaRPr lang="en-US" sz="1050" dirty="0"/>
           </a:p>
@@ -8390,11 +8444,11 @@
             <a:avLst/>
           </a:prstGeom>
           <a:solidFill>
-            <a:srgbClr val="D29922"/>
+            <a:srgbClr val="B8892C"/>
           </a:solidFill>
           <a:ln w="12700">
             <a:solidFill>
-              <a:srgbClr val="D29922"/>
+              <a:srgbClr val="B8892C"/>
             </a:solidFill>
             <a:prstDash val="solid"/>
           </a:ln>
@@ -8427,13 +8481,13 @@
             <a:r>
               <a:rPr lang="en-US" sz="1050" b="1" dirty="0">
                 <a:solidFill>
-                  <a:srgbClr val="E6EDF3"/>
-                </a:solidFill>
-                <a:latin typeface="Calibri" pitchFamily="34" charset="0"/>
-                <a:ea typeface="Calibri" pitchFamily="34" charset="-122"/>
-                <a:cs typeface="Calibri" pitchFamily="34" charset="-120"/>
-              </a:rPr>
-              <a:t>Scale Out 需特別處理</a:t>
+                  <a:srgbClr val="2D2926"/>
+                </a:solidFill>
+                <a:latin typeface="Calibri" pitchFamily="34" charset="0"/>
+                <a:ea typeface="Calibri" pitchFamily="34" charset="-122"/>
+                <a:cs typeface="Calibri" pitchFamily="34" charset="-120"/>
+              </a:rPr>
+              <a:t>Requires special handling for scale out</a:t>
             </a:r>
             <a:endParaRPr lang="en-US" sz="1050" dirty="0"/>
           </a:p>
@@ -8454,11 +8508,11 @@
             <a:avLst/>
           </a:prstGeom>
           <a:solidFill>
-            <a:srgbClr val="D29922"/>
+            <a:srgbClr val="B8892C"/>
           </a:solidFill>
           <a:ln w="12700">
             <a:solidFill>
-              <a:srgbClr val="D29922"/>
+              <a:srgbClr val="B8892C"/>
             </a:solidFill>
             <a:prstDash val="solid"/>
           </a:ln>
@@ -8491,7 +8545,7 @@
             <a:r>
               <a:rPr lang="en-US" sz="1050" b="1" dirty="0">
                 <a:solidFill>
-                  <a:srgbClr val="E6EDF3"/>
+                  <a:srgbClr val="2D2926"/>
                 </a:solidFill>
                 <a:latin typeface="Calibri" pitchFamily="34" charset="0"/>
                 <a:ea typeface="Calibri" pitchFamily="34" charset="-122"/>
@@ -8520,11 +8574,11 @@
             </a:avLst>
           </a:prstGeom>
           <a:solidFill>
-            <a:srgbClr val="0A1929"/>
+            <a:srgbClr val="EAF0F7"/>
           </a:solidFill>
           <a:ln w="9525">
             <a:solidFill>
-              <a:srgbClr val="58A6FF"/>
+              <a:srgbClr val="4A7FB5"/>
             </a:solidFill>
             <a:prstDash val="solid"/>
           </a:ln>
@@ -8557,13 +8611,13 @@
             <a:r>
               <a:rPr lang="en-US" sz="1000" i="1" dirty="0">
                 <a:solidFill>
-                  <a:srgbClr val="8B949E"/>
-                </a:solidFill>
-                <a:latin typeface="Calibri" pitchFamily="34" charset="0"/>
-                <a:ea typeface="Calibri" pitchFamily="34" charset="-122"/>
-                <a:cs typeface="Calibri" pitchFamily="34" charset="-120"/>
-              </a:rPr>
-              <a:t>💡  快取失效 (Cache Invalidation) 是分散式系統中最難的問題之一 — 想清楚 TTL 再設計</a:t>
+                  <a:srgbClr val="8A8078"/>
+                </a:solidFill>
+                <a:latin typeface="Calibri" pitchFamily="34" charset="0"/>
+                <a:ea typeface="Calibri" pitchFamily="34" charset="-122"/>
+                <a:cs typeface="Calibri" pitchFamily="34" charset="-120"/>
+              </a:rPr>
+              <a:t>💡  Cache invalidation is one of the hardest problems in distributed systems — design your TTL strategy carefully</a:t>
             </a:r>
             <a:endParaRPr lang="en-US" sz="1000" dirty="0"/>
           </a:p>
@@ -8583,7 +8637,7 @@
     <p:bg>
       <p:bgPr>
         <a:solidFill>
-          <a:srgbClr val="0D1117"/>
+          <a:srgbClr val="FFFDF8"/>
         </a:solidFill>
       </p:bgPr>
     </p:bg>
@@ -8616,11 +8670,11 @@
             <a:avLst/>
           </a:prstGeom>
           <a:solidFill>
-            <a:srgbClr val="161B22"/>
+            <a:srgbClr val="F5F1EB"/>
           </a:solidFill>
           <a:ln w="6350">
             <a:solidFill>
-              <a:srgbClr val="30363D"/>
+              <a:srgbClr val="D6CCBF"/>
             </a:solidFill>
             <a:prstDash val="solid"/>
           </a:ln>
@@ -8641,11 +8695,11 @@
             <a:avLst/>
           </a:prstGeom>
           <a:solidFill>
-            <a:srgbClr val="6E40C9"/>
+            <a:srgbClr val="8B6AB5"/>
           </a:solidFill>
           <a:ln w="12700">
             <a:solidFill>
-              <a:srgbClr val="6E40C9"/>
+              <a:srgbClr val="8B6AB5"/>
             </a:solidFill>
             <a:prstDash val="solid"/>
           </a:ln>
@@ -8678,13 +8732,13 @@
             <a:r>
               <a:rPr lang="en-US" sz="1600" b="1" dirty="0">
                 <a:solidFill>
-                  <a:srgbClr val="E6EDF3"/>
-                </a:solidFill>
-                <a:latin typeface="Calibri" pitchFamily="34" charset="0"/>
-                <a:ea typeface="Calibri" pitchFamily="34" charset="-122"/>
-                <a:cs typeface="Calibri" pitchFamily="34" charset="-120"/>
-              </a:rPr>
-              <a:t>訊息佇列：非同步解耦的利器</a:t>
+                  <a:srgbClr val="2D2926"/>
+                </a:solidFill>
+                <a:latin typeface="Calibri" pitchFamily="34" charset="0"/>
+                <a:ea typeface="Calibri" pitchFamily="34" charset="-122"/>
+                <a:cs typeface="Calibri" pitchFamily="34" charset="-120"/>
+              </a:rPr>
+              <a:t>Message Queues: Async Decoupling Tool</a:t>
             </a:r>
             <a:endParaRPr lang="en-US" sz="1600" dirty="0"/>
           </a:p>
@@ -8717,13 +8771,13 @@
             <a:r>
               <a:rPr lang="en-US" sz="850" dirty="0">
                 <a:solidFill>
-                  <a:srgbClr val="8B949E"/>
-                </a:solidFill>
-                <a:latin typeface="Calibri" pitchFamily="34" charset="0"/>
-                <a:ea typeface="Calibri" pitchFamily="34" charset="-122"/>
-                <a:cs typeface="Calibri" pitchFamily="34" charset="-120"/>
-              </a:rPr>
-              <a:t>PART 2  ·  17 / 50</a:t>
+                  <a:srgbClr val="8A8078"/>
+                </a:solidFill>
+                <a:latin typeface="Calibri" pitchFamily="34" charset="0"/>
+                <a:ea typeface="Calibri" pitchFamily="34" charset="-122"/>
+                <a:cs typeface="Calibri" pitchFamily="34" charset="-120"/>
+              </a:rPr>
+              <a:t>PART 2</a:t>
             </a:r>
             <a:endParaRPr lang="en-US" sz="850" dirty="0"/>
           </a:p>
@@ -8746,11 +8800,11 @@
             </a:avLst>
           </a:prstGeom>
           <a:solidFill>
-            <a:srgbClr val="2A0F0F"/>
+            <a:srgbClr val="F8ECEC"/>
           </a:solidFill>
           <a:ln w="12700">
             <a:solidFill>
-              <a:srgbClr val="F85149"/>
+              <a:srgbClr val="C4605B"/>
             </a:solidFill>
             <a:prstDash val="solid"/>
           </a:ln>
@@ -8783,13 +8837,13 @@
             <a:r>
               <a:rPr lang="en-US" sz="1200" b="1" dirty="0">
                 <a:solidFill>
-                  <a:srgbClr val="F85149"/>
-                </a:solidFill>
-                <a:latin typeface="Calibri" pitchFamily="34" charset="0"/>
-                <a:ea typeface="Calibri" pitchFamily="34" charset="-122"/>
-                <a:cs typeface="Calibri" pitchFamily="34" charset="-120"/>
-              </a:rPr>
-              <a:t>❌  同步呼叫鏈</a:t>
+                  <a:srgbClr val="C4605B"/>
+                </a:solidFill>
+                <a:latin typeface="Calibri" pitchFamily="34" charset="0"/>
+                <a:ea typeface="Calibri" pitchFamily="34" charset="-122"/>
+                <a:cs typeface="Calibri" pitchFamily="34" charset="-120"/>
+              </a:rPr>
+              <a:t>❌  Synchronous Call Chain</a:t>
             </a:r>
             <a:endParaRPr lang="en-US" sz="1200" dirty="0"/>
           </a:p>
@@ -8812,11 +8866,11 @@
             </a:avLst>
           </a:prstGeom>
           <a:solidFill>
-            <a:srgbClr val="161B22"/>
+            <a:srgbClr val="F5F1EB"/>
           </a:solidFill>
           <a:ln w="12700">
             <a:solidFill>
-              <a:srgbClr val="238636"/>
+              <a:srgbClr val="5A9B6E"/>
             </a:solidFill>
             <a:prstDash val="solid"/>
           </a:ln>
@@ -8885,7 +8939,7 @@
             <a:r>
               <a:rPr lang="en-US" sz="950" b="1" dirty="0">
                 <a:solidFill>
-                  <a:srgbClr val="E6EDF3"/>
+                  <a:srgbClr val="2D2926"/>
                 </a:solidFill>
                 <a:latin typeface="Calibri" pitchFamily="34" charset="0"/>
                 <a:ea typeface="Calibri" pitchFamily="34" charset="-122"/>
@@ -8914,11 +8968,11 @@
             </a:avLst>
           </a:prstGeom>
           <a:solidFill>
-            <a:srgbClr val="161B22"/>
+            <a:srgbClr val="F5F1EB"/>
           </a:solidFill>
           <a:ln w="12700">
             <a:solidFill>
-              <a:srgbClr val="238636"/>
+              <a:srgbClr val="5A9B6E"/>
             </a:solidFill>
             <a:prstDash val="solid"/>
           </a:ln>
@@ -8987,7 +9041,7 @@
             <a:r>
               <a:rPr lang="en-US" sz="950" b="1" dirty="0">
                 <a:solidFill>
-                  <a:srgbClr val="E6EDF3"/>
+                  <a:srgbClr val="2D2926"/>
                 </a:solidFill>
                 <a:latin typeface="Calibri" pitchFamily="34" charset="0"/>
                 <a:ea typeface="Calibri" pitchFamily="34" charset="-122"/>
@@ -9016,11 +9070,11 @@
             </a:avLst>
           </a:prstGeom>
           <a:solidFill>
-            <a:srgbClr val="161B22"/>
+            <a:srgbClr val="F5F1EB"/>
           </a:solidFill>
           <a:ln w="12700">
             <a:solidFill>
-              <a:srgbClr val="238636"/>
+              <a:srgbClr val="5A9B6E"/>
             </a:solidFill>
             <a:prstDash val="solid"/>
           </a:ln>
@@ -9089,7 +9143,7 @@
             <a:r>
               <a:rPr lang="en-US" sz="950" b="1" dirty="0">
                 <a:solidFill>
-                  <a:srgbClr val="E6EDF3"/>
+                  <a:srgbClr val="2D2926"/>
                 </a:solidFill>
                 <a:latin typeface="Calibri" pitchFamily="34" charset="0"/>
                 <a:ea typeface="Calibri" pitchFamily="34" charset="-122"/>
@@ -9118,7 +9172,7 @@
           <a:noFill/>
           <a:ln w="19050">
             <a:solidFill>
-              <a:srgbClr val="8B949E"/>
+              <a:srgbClr val="8A8078"/>
             </a:solidFill>
             <a:prstDash val="solid"/>
             <a:tailEnd type="arrow"/>
@@ -9127,14 +9181,41 @@
       </p:sp>
       <p:sp>
         <p:nvSpPr>
-          <p:cNvPr id="18" name="Text 16"/>
-          <p:cNvSpPr/>
-          <p:nvPr/>
-        </p:nvSpPr>
-        <p:spPr>
-          <a:xfrm>
-            <a:off x="1234440" y="1289304"/>
-            <a:ext cx="457200" cy="182880"/>
+          <p:cNvPr id="18" name="Shape 16"/>
+          <p:cNvSpPr/>
+          <p:nvPr/>
+        </p:nvSpPr>
+        <p:spPr>
+          <a:xfrm>
+            <a:off x="1188720" y="1271016"/>
+            <a:ext cx="548640" cy="201168"/>
+          </a:xfrm>
+          <a:prstGeom prst="roundRect">
+            <a:avLst>
+              <a:gd name="adj" fmla="val 27273"/>
+            </a:avLst>
+          </a:prstGeom>
+          <a:solidFill>
+            <a:srgbClr val="F5F1EB"/>
+          </a:solidFill>
+          <a:ln w="9525">
+            <a:solidFill>
+              <a:srgbClr val="8A8078"/>
+            </a:solidFill>
+            <a:prstDash val="solid"/>
+          </a:ln>
+        </p:spPr>
+      </p:sp>
+      <p:sp>
+        <p:nvSpPr>
+          <p:cNvPr id="19" name="Text 17"/>
+          <p:cNvSpPr/>
+          <p:nvPr/>
+        </p:nvSpPr>
+        <p:spPr>
+          <a:xfrm>
+            <a:off x="1188720" y="1271016"/>
+            <a:ext cx="548640" cy="201168"/>
           </a:xfrm>
           <a:prstGeom prst="rect">
             <a:avLst/>
@@ -9150,9 +9231,9 @@
               <a:buNone/>
             </a:pPr>
             <a:r>
-              <a:rPr lang="en-US" sz="800" dirty="0">
-                <a:solidFill>
-                  <a:srgbClr val="8B949E"/>
+              <a:rPr lang="en-US" sz="750" b="1" dirty="0">
+                <a:solidFill>
+                  <a:srgbClr val="8A8078"/>
                 </a:solidFill>
                 <a:latin typeface="Consolas" pitchFamily="34" charset="0"/>
                 <a:ea typeface="Consolas" pitchFamily="34" charset="-122"/>
@@ -9160,13 +9241,13 @@
               </a:rPr>
               <a:t>sync</a:t>
             </a:r>
-            <a:endParaRPr lang="en-US" sz="800" dirty="0"/>
-          </a:p>
-        </p:txBody>
-      </p:sp>
-      <p:sp>
-        <p:nvSpPr>
-          <p:cNvPr id="19" name="Shape 17"/>
+            <a:endParaRPr lang="en-US" sz="750" dirty="0"/>
+          </a:p>
+        </p:txBody>
+      </p:sp>
+      <p:sp>
+        <p:nvSpPr>
+          <p:cNvPr id="20" name="Shape 18"/>
           <p:cNvSpPr/>
           <p:nvPr/>
         </p:nvSpPr>
@@ -9181,7 +9262,7 @@
           <a:noFill/>
           <a:ln w="19050">
             <a:solidFill>
-              <a:srgbClr val="8B949E"/>
+              <a:srgbClr val="8A8078"/>
             </a:solidFill>
             <a:prstDash val="solid"/>
             <a:tailEnd type="arrow"/>
@@ -9190,14 +9271,41 @@
       </p:sp>
       <p:sp>
         <p:nvSpPr>
-          <p:cNvPr id="20" name="Text 18"/>
-          <p:cNvSpPr/>
-          <p:nvPr/>
-        </p:nvSpPr>
-        <p:spPr>
-          <a:xfrm>
-            <a:off x="2560320" y="1289304"/>
-            <a:ext cx="457200" cy="182880"/>
+          <p:cNvPr id="21" name="Shape 19"/>
+          <p:cNvSpPr/>
+          <p:nvPr/>
+        </p:nvSpPr>
+        <p:spPr>
+          <a:xfrm>
+            <a:off x="2514600" y="1271016"/>
+            <a:ext cx="548640" cy="201168"/>
+          </a:xfrm>
+          <a:prstGeom prst="roundRect">
+            <a:avLst>
+              <a:gd name="adj" fmla="val 27273"/>
+            </a:avLst>
+          </a:prstGeom>
+          <a:solidFill>
+            <a:srgbClr val="F5F1EB"/>
+          </a:solidFill>
+          <a:ln w="9525">
+            <a:solidFill>
+              <a:srgbClr val="8A8078"/>
+            </a:solidFill>
+            <a:prstDash val="solid"/>
+          </a:ln>
+        </p:spPr>
+      </p:sp>
+      <p:sp>
+        <p:nvSpPr>
+          <p:cNvPr id="22" name="Text 20"/>
+          <p:cNvSpPr/>
+          <p:nvPr/>
+        </p:nvSpPr>
+        <p:spPr>
+          <a:xfrm>
+            <a:off x="2514600" y="1271016"/>
+            <a:ext cx="548640" cy="201168"/>
           </a:xfrm>
           <a:prstGeom prst="rect">
             <a:avLst/>
@@ -9213,9 +9321,9 @@
               <a:buNone/>
             </a:pPr>
             <a:r>
-              <a:rPr lang="en-US" sz="800" dirty="0">
-                <a:solidFill>
-                  <a:srgbClr val="8B949E"/>
+              <a:rPr lang="en-US" sz="750" b="1" dirty="0">
+                <a:solidFill>
+                  <a:srgbClr val="8A8078"/>
                 </a:solidFill>
                 <a:latin typeface="Consolas" pitchFamily="34" charset="0"/>
                 <a:ea typeface="Consolas" pitchFamily="34" charset="-122"/>
@@ -9223,13 +9331,13 @@
               </a:rPr>
               <a:t>sync</a:t>
             </a:r>
-            <a:endParaRPr lang="en-US" sz="800" dirty="0"/>
-          </a:p>
-        </p:txBody>
-      </p:sp>
-      <p:sp>
-        <p:nvSpPr>
-          <p:cNvPr id="21" name="Shape 19"/>
+            <a:endParaRPr lang="en-US" sz="750" dirty="0"/>
+          </a:p>
+        </p:txBody>
+      </p:sp>
+      <p:sp>
+        <p:nvSpPr>
+          <p:cNvPr id="23" name="Shape 21"/>
           <p:cNvSpPr/>
           <p:nvPr/>
         </p:nvSpPr>
@@ -9244,19 +9352,19 @@
             </a:avLst>
           </a:prstGeom>
           <a:solidFill>
-            <a:srgbClr val="2A0F0F"/>
+            <a:srgbClr val="F8ECEC"/>
           </a:solidFill>
           <a:ln w="9525">
             <a:solidFill>
-              <a:srgbClr val="F85149"/>
-            </a:solidFill>
-            <a:prstDash val="solid"/>
-          </a:ln>
-        </p:spPr>
-      </p:sp>
-      <p:sp>
-        <p:nvSpPr>
-          <p:cNvPr id="22" name="Text 20"/>
+              <a:srgbClr val="C4605B"/>
+            </a:solidFill>
+            <a:prstDash val="solid"/>
+          </a:ln>
+        </p:spPr>
+      </p:sp>
+      <p:sp>
+        <p:nvSpPr>
+          <p:cNvPr id="24" name="Text 22"/>
           <p:cNvSpPr/>
           <p:nvPr/>
         </p:nvSpPr>
@@ -9281,13 +9389,13 @@
             <a:r>
               <a:rPr lang="en-US" sz="950" dirty="0">
                 <a:solidFill>
-                  <a:srgbClr val="F85149"/>
-                </a:solidFill>
-                <a:latin typeface="Calibri" pitchFamily="34" charset="0"/>
-                <a:ea typeface="Calibri" pitchFamily="34" charset="-122"/>
-                <a:cs typeface="Calibri" pitchFamily="34" charset="-120"/>
-              </a:rPr>
-              <a:t>任一步驟慢 → 全部等待</a:t>
+                  <a:srgbClr val="C4605B"/>
+                </a:solidFill>
+                <a:latin typeface="Calibri" pitchFamily="34" charset="0"/>
+                <a:ea typeface="Calibri" pitchFamily="34" charset="-122"/>
+                <a:cs typeface="Calibri" pitchFamily="34" charset="-120"/>
+              </a:rPr>
+              <a:t>Any slow step → everything waits</a:t>
             </a:r>
             <a:endParaRPr lang="en-US" sz="950" dirty="0"/>
           </a:p>
@@ -9298,13 +9406,13 @@
             <a:r>
               <a:rPr lang="en-US" sz="950" dirty="0">
                 <a:solidFill>
-                  <a:srgbClr val="F85149"/>
-                </a:solidFill>
-                <a:latin typeface="Calibri" pitchFamily="34" charset="0"/>
-                <a:ea typeface="Calibri" pitchFamily="34" charset="-122"/>
-                <a:cs typeface="Calibri" pitchFamily="34" charset="-120"/>
-              </a:rPr>
-              <a:t>任一步驟失敗 → 整個 Request 失敗</a:t>
+                  <a:srgbClr val="C4605B"/>
+                </a:solidFill>
+                <a:latin typeface="Calibri" pitchFamily="34" charset="0"/>
+                <a:ea typeface="Calibri" pitchFamily="34" charset="-122"/>
+                <a:cs typeface="Calibri" pitchFamily="34" charset="-120"/>
+              </a:rPr>
+              <a:t>Any failed step → entire request fails</a:t>
             </a:r>
             <a:endParaRPr lang="en-US" sz="950" dirty="0"/>
           </a:p>
@@ -9312,7 +9420,7 @@
       </p:sp>
       <p:sp>
         <p:nvSpPr>
-          <p:cNvPr id="23" name="Text 21"/>
+          <p:cNvPr id="25" name="Text 23"/>
           <p:cNvSpPr/>
           <p:nvPr/>
         </p:nvSpPr>
@@ -9337,13 +9445,13 @@
             <a:r>
               <a:rPr lang="en-US" sz="900" b="1" dirty="0">
                 <a:solidFill>
-                  <a:srgbClr val="F85149"/>
-                </a:solidFill>
-                <a:latin typeface="Calibri" pitchFamily="34" charset="0"/>
-                <a:ea typeface="Calibri" pitchFamily="34" charset="-122"/>
-                <a:cs typeface="Calibri" pitchFamily="34" charset="-120"/>
-              </a:rPr>
-              <a:t>⏱  總延遲 = 所有步驟之和</a:t>
+                  <a:srgbClr val="C4605B"/>
+                </a:solidFill>
+                <a:latin typeface="Calibri" pitchFamily="34" charset="0"/>
+                <a:ea typeface="Calibri" pitchFamily="34" charset="-122"/>
+                <a:cs typeface="Calibri" pitchFamily="34" charset="-120"/>
+              </a:rPr>
+              <a:t>⏱  Total latency = sum of all steps</a:t>
             </a:r>
             <a:endParaRPr lang="en-US" sz="900" dirty="0"/>
           </a:p>
@@ -9351,7 +9459,7 @@
       </p:sp>
       <p:sp>
         <p:nvSpPr>
-          <p:cNvPr id="24" name="Shape 22"/>
+          <p:cNvPr id="26" name="Shape 24"/>
           <p:cNvSpPr/>
           <p:nvPr/>
         </p:nvSpPr>
@@ -9364,19 +9472,19 @@
             <a:avLst/>
           </a:prstGeom>
           <a:solidFill>
-            <a:srgbClr val="238636"/>
+            <a:srgbClr val="5A9B6E"/>
           </a:solidFill>
           <a:ln w="6350">
             <a:solidFill>
-              <a:srgbClr val="0D1117"/>
-            </a:solidFill>
-            <a:prstDash val="solid"/>
-          </a:ln>
-        </p:spPr>
-      </p:sp>
-      <p:sp>
-        <p:nvSpPr>
-          <p:cNvPr id="25" name="Shape 23"/>
+              <a:srgbClr val="FFFDF8"/>
+            </a:solidFill>
+            <a:prstDash val="solid"/>
+          </a:ln>
+        </p:spPr>
+      </p:sp>
+      <p:sp>
+        <p:nvSpPr>
+          <p:cNvPr id="27" name="Shape 25"/>
           <p:cNvSpPr/>
           <p:nvPr/>
         </p:nvSpPr>
@@ -9389,19 +9497,19 @@
             <a:avLst/>
           </a:prstGeom>
           <a:solidFill>
-            <a:srgbClr val="D29922"/>
+            <a:srgbClr val="B8892C"/>
           </a:solidFill>
           <a:ln w="6350">
             <a:solidFill>
-              <a:srgbClr val="0D1117"/>
-            </a:solidFill>
-            <a:prstDash val="solid"/>
-          </a:ln>
-        </p:spPr>
-      </p:sp>
-      <p:sp>
-        <p:nvSpPr>
-          <p:cNvPr id="26" name="Shape 24"/>
+              <a:srgbClr val="FFFDF8"/>
+            </a:solidFill>
+            <a:prstDash val="solid"/>
+          </a:ln>
+        </p:spPr>
+      </p:sp>
+      <p:sp>
+        <p:nvSpPr>
+          <p:cNvPr id="28" name="Shape 26"/>
           <p:cNvSpPr/>
           <p:nvPr/>
         </p:nvSpPr>
@@ -9414,19 +9522,19 @@
             <a:avLst/>
           </a:prstGeom>
           <a:solidFill>
-            <a:srgbClr val="F85149"/>
+            <a:srgbClr val="C4605B"/>
           </a:solidFill>
           <a:ln w="6350">
             <a:solidFill>
-              <a:srgbClr val="0D1117"/>
-            </a:solidFill>
-            <a:prstDash val="solid"/>
-          </a:ln>
-        </p:spPr>
-      </p:sp>
-      <p:sp>
-        <p:nvSpPr>
-          <p:cNvPr id="27" name="Shape 25"/>
+              <a:srgbClr val="FFFDF8"/>
+            </a:solidFill>
+            <a:prstDash val="solid"/>
+          </a:ln>
+        </p:spPr>
+      </p:sp>
+      <p:sp>
+        <p:nvSpPr>
+          <p:cNvPr id="29" name="Shape 27"/>
           <p:cNvSpPr/>
           <p:nvPr/>
         </p:nvSpPr>
@@ -9441,19 +9549,19 @@
             </a:avLst>
           </a:prstGeom>
           <a:solidFill>
-            <a:srgbClr val="0F2A1A"/>
+            <a:srgbClr val="E5F0E9"/>
           </a:solidFill>
           <a:ln w="12700">
             <a:solidFill>
-              <a:srgbClr val="3FB950"/>
-            </a:solidFill>
-            <a:prstDash val="solid"/>
-          </a:ln>
-        </p:spPr>
-      </p:sp>
-      <p:sp>
-        <p:nvSpPr>
-          <p:cNvPr id="28" name="Text 26"/>
+              <a:srgbClr val="4A9968"/>
+            </a:solidFill>
+            <a:prstDash val="solid"/>
+          </a:ln>
+        </p:spPr>
+      </p:sp>
+      <p:sp>
+        <p:nvSpPr>
+          <p:cNvPr id="30" name="Text 28"/>
           <p:cNvSpPr/>
           <p:nvPr/>
         </p:nvSpPr>
@@ -9478,13 +9586,13 @@
             <a:r>
               <a:rPr lang="en-US" sz="1200" b="1" dirty="0">
                 <a:solidFill>
-                  <a:srgbClr val="3FB950"/>
-                </a:solidFill>
-                <a:latin typeface="Calibri" pitchFamily="34" charset="0"/>
-                <a:ea typeface="Calibri" pitchFamily="34" charset="-122"/>
-                <a:cs typeface="Calibri" pitchFamily="34" charset="-120"/>
-              </a:rPr>
-              <a:t>✅  訊息佇列（非同步）</a:t>
+                  <a:srgbClr val="4A9968"/>
+                </a:solidFill>
+                <a:latin typeface="Calibri" pitchFamily="34" charset="0"/>
+                <a:ea typeface="Calibri" pitchFamily="34" charset="-122"/>
+                <a:cs typeface="Calibri" pitchFamily="34" charset="-120"/>
+              </a:rPr>
+              <a:t>✅  Message Queue (Async)</a:t>
             </a:r>
             <a:endParaRPr lang="en-US" sz="1200" dirty="0"/>
           </a:p>
@@ -9492,7 +9600,7 @@
       </p:sp>
       <p:sp>
         <p:nvSpPr>
-          <p:cNvPr id="29" name="Shape 27"/>
+          <p:cNvPr id="31" name="Shape 29"/>
           <p:cNvSpPr/>
           <p:nvPr/>
         </p:nvSpPr>
@@ -9507,18 +9615,18 @@
             </a:avLst>
           </a:prstGeom>
           <a:solidFill>
-            <a:srgbClr val="161B22"/>
+            <a:srgbClr val="F5F1EB"/>
           </a:solidFill>
           <a:ln w="19050">
             <a:solidFill>
-              <a:srgbClr val="238636"/>
+              <a:srgbClr val="5A9B6E"/>
             </a:solidFill>
             <a:prstDash val="solid"/>
           </a:ln>
           <a:effectLst>
             <a:outerShdw sx="100000" sy="100000" kx="0" ky="0" algn="bl" rotWithShape="0" blurRad="76200" dist="25400" dir="2700000">
-              <a:srgbClr val="000000">
-                <a:alpha val="30000"/>
+              <a:srgbClr val="9E9488">
+                <a:alpha val="15000"/>
               </a:srgbClr>
             </a:outerShdw>
           </a:effectLst>
@@ -9526,7 +9634,7 @@
       </p:sp>
       <p:sp>
         <p:nvSpPr>
-          <p:cNvPr id="30" name="Text 28"/>
+          <p:cNvPr id="32" name="Text 30"/>
           <p:cNvSpPr/>
           <p:nvPr/>
         </p:nvSpPr>
@@ -9562,7 +9670,7 @@
       </p:sp>
       <p:sp>
         <p:nvSpPr>
-          <p:cNvPr id="31" name="Text 29"/>
+          <p:cNvPr id="33" name="Text 31"/>
           <p:cNvSpPr/>
           <p:nvPr/>
         </p:nvSpPr>
@@ -9587,7 +9695,7 @@
             <a:r>
               <a:rPr lang="en-US" sz="1050" b="1" dirty="0">
                 <a:solidFill>
-                  <a:srgbClr val="E6EDF3"/>
+                  <a:srgbClr val="2D2926"/>
                 </a:solidFill>
                 <a:latin typeface="Calibri" pitchFamily="34" charset="0"/>
                 <a:ea typeface="Calibri" pitchFamily="34" charset="-122"/>
@@ -9601,7 +9709,7 @@
       </p:sp>
       <p:sp>
         <p:nvSpPr>
-          <p:cNvPr id="32" name="Text 30"/>
+          <p:cNvPr id="34" name="Text 32"/>
           <p:cNvSpPr/>
           <p:nvPr/>
         </p:nvSpPr>
@@ -9626,7 +9734,7 @@
             <a:r>
               <a:rPr lang="en-US" sz="800" dirty="0">
                 <a:solidFill>
-                  <a:srgbClr val="8B949E"/>
+                  <a:srgbClr val="8A8078"/>
                 </a:solidFill>
                 <a:latin typeface="Consolas" pitchFamily="34" charset="0"/>
                 <a:ea typeface="Consolas" pitchFamily="34" charset="-122"/>
@@ -9640,7 +9748,7 @@
       </p:sp>
       <p:sp>
         <p:nvSpPr>
-          <p:cNvPr id="33" name="Shape 31"/>
+          <p:cNvPr id="35" name="Shape 33"/>
           <p:cNvSpPr/>
           <p:nvPr/>
         </p:nvSpPr>
@@ -9655,7 +9763,7 @@
           <a:noFill/>
           <a:ln w="19050">
             <a:solidFill>
-              <a:srgbClr val="6E40C9"/>
+              <a:srgbClr val="8B6AB5"/>
             </a:solidFill>
             <a:prstDash val="solid"/>
             <a:tailEnd type="arrow"/>
@@ -9664,14 +9772,41 @@
       </p:sp>
       <p:sp>
         <p:nvSpPr>
-          <p:cNvPr id="34" name="Text 32"/>
-          <p:cNvSpPr/>
-          <p:nvPr/>
-        </p:nvSpPr>
-        <p:spPr>
-          <a:xfrm>
-            <a:off x="6126480" y="1170432"/>
-            <a:ext cx="640080" cy="182880"/>
+          <p:cNvPr id="36" name="Shape 34"/>
+          <p:cNvSpPr/>
+          <p:nvPr/>
+        </p:nvSpPr>
+        <p:spPr>
+          <a:xfrm>
+            <a:off x="6172200" y="1152144"/>
+            <a:ext cx="548640" cy="201168"/>
+          </a:xfrm>
+          <a:prstGeom prst="roundRect">
+            <a:avLst>
+              <a:gd name="adj" fmla="val 27273"/>
+            </a:avLst>
+          </a:prstGeom>
+          <a:solidFill>
+            <a:srgbClr val="F5F1EB"/>
+          </a:solidFill>
+          <a:ln w="9525">
+            <a:solidFill>
+              <a:srgbClr val="8B6AB5"/>
+            </a:solidFill>
+            <a:prstDash val="solid"/>
+          </a:ln>
+        </p:spPr>
+      </p:sp>
+      <p:sp>
+        <p:nvSpPr>
+          <p:cNvPr id="37" name="Text 35"/>
+          <p:cNvSpPr/>
+          <p:nvPr/>
+        </p:nvSpPr>
+        <p:spPr>
+          <a:xfrm>
+            <a:off x="6172200" y="1152144"/>
+            <a:ext cx="548640" cy="201168"/>
           </a:xfrm>
           <a:prstGeom prst="rect">
             <a:avLst/>
@@ -9687,9 +9822,9 @@
               <a:buNone/>
             </a:pPr>
             <a:r>
-              <a:rPr lang="en-US" sz="800" dirty="0">
-                <a:solidFill>
-                  <a:srgbClr val="6E40C9"/>
+              <a:rPr lang="en-US" sz="750" b="1" dirty="0">
+                <a:solidFill>
+                  <a:srgbClr val="8B6AB5"/>
                 </a:solidFill>
                 <a:latin typeface="Consolas" pitchFamily="34" charset="0"/>
                 <a:ea typeface="Consolas" pitchFamily="34" charset="-122"/>
@@ -9697,13 +9832,13 @@
               </a:rPr>
               <a:t>publish</a:t>
             </a:r>
-            <a:endParaRPr lang="en-US" sz="800" dirty="0"/>
-          </a:p>
-        </p:txBody>
-      </p:sp>
-      <p:sp>
-        <p:nvSpPr>
-          <p:cNvPr id="35" name="Shape 33"/>
+            <a:endParaRPr lang="en-US" sz="750" dirty="0"/>
+          </a:p>
+        </p:txBody>
+      </p:sp>
+      <p:sp>
+        <p:nvSpPr>
+          <p:cNvPr id="38" name="Shape 36"/>
           <p:cNvSpPr/>
           <p:nvPr/>
         </p:nvSpPr>
@@ -9718,18 +9853,18 @@
             </a:avLst>
           </a:prstGeom>
           <a:solidFill>
-            <a:srgbClr val="161B22"/>
+            <a:srgbClr val="F5F1EB"/>
           </a:solidFill>
           <a:ln w="19050">
             <a:solidFill>
-              <a:srgbClr val="6E40C9"/>
+              <a:srgbClr val="8B6AB5"/>
             </a:solidFill>
             <a:prstDash val="solid"/>
           </a:ln>
           <a:effectLst>
             <a:outerShdw sx="100000" sy="100000" kx="0" ky="0" algn="bl" rotWithShape="0" blurRad="76200" dist="25400" dir="2700000">
-              <a:srgbClr val="000000">
-                <a:alpha val="30000"/>
+              <a:srgbClr val="9E9488">
+                <a:alpha val="15000"/>
               </a:srgbClr>
             </a:outerShdw>
           </a:effectLst>
@@ -9737,7 +9872,7 @@
       </p:sp>
       <p:sp>
         <p:nvSpPr>
-          <p:cNvPr id="36" name="Text 34"/>
+          <p:cNvPr id="39" name="Text 37"/>
           <p:cNvSpPr/>
           <p:nvPr/>
         </p:nvSpPr>
@@ -9773,7 +9908,7 @@
       </p:sp>
       <p:sp>
         <p:nvSpPr>
-          <p:cNvPr id="37" name="Text 35"/>
+          <p:cNvPr id="40" name="Text 38"/>
           <p:cNvSpPr/>
           <p:nvPr/>
         </p:nvSpPr>
@@ -9798,7 +9933,7 @@
             <a:r>
               <a:rPr lang="en-US" sz="1050" b="1" dirty="0">
                 <a:solidFill>
-                  <a:srgbClr val="E6EDF3"/>
+                  <a:srgbClr val="2D2926"/>
                 </a:solidFill>
                 <a:latin typeface="Calibri" pitchFamily="34" charset="0"/>
                 <a:ea typeface="Calibri" pitchFamily="34" charset="-122"/>
@@ -9812,7 +9947,7 @@
       </p:sp>
       <p:sp>
         <p:nvSpPr>
-          <p:cNvPr id="38" name="Text 36"/>
+          <p:cNvPr id="41" name="Text 39"/>
           <p:cNvSpPr/>
           <p:nvPr/>
         </p:nvSpPr>
@@ -9837,7 +9972,7 @@
             <a:r>
               <a:rPr lang="en-US" sz="800" dirty="0">
                 <a:solidFill>
-                  <a:srgbClr val="8B949E"/>
+                  <a:srgbClr val="8A8078"/>
                 </a:solidFill>
                 <a:latin typeface="Consolas" pitchFamily="34" charset="0"/>
                 <a:ea typeface="Consolas" pitchFamily="34" charset="-122"/>
@@ -9851,7 +9986,7 @@
       </p:sp>
       <p:sp>
         <p:nvSpPr>
-          <p:cNvPr id="39" name="Shape 37"/>
+          <p:cNvPr id="42" name="Shape 40"/>
           <p:cNvSpPr/>
           <p:nvPr/>
         </p:nvSpPr>
@@ -9866,7 +10001,7 @@
           <a:noFill/>
           <a:ln w="19050">
             <a:solidFill>
-              <a:srgbClr val="6E40C9"/>
+              <a:srgbClr val="8B6AB5"/>
             </a:solidFill>
             <a:prstDash val="solid"/>
             <a:tailEnd type="arrow"/>
@@ -9875,7 +10010,7 @@
       </p:sp>
       <p:sp>
         <p:nvSpPr>
-          <p:cNvPr id="40" name="Shape 38"/>
+          <p:cNvPr id="43" name="Shape 41"/>
           <p:cNvSpPr/>
           <p:nvPr/>
         </p:nvSpPr>
@@ -9890,19 +10025,19 @@
             </a:avLst>
           </a:prstGeom>
           <a:solidFill>
-            <a:srgbClr val="161B22"/>
+            <a:srgbClr val="F5F1EB"/>
           </a:solidFill>
           <a:ln w="12700">
             <a:solidFill>
-              <a:srgbClr val="3FB950"/>
-            </a:solidFill>
-            <a:prstDash val="solid"/>
-          </a:ln>
-        </p:spPr>
-      </p:sp>
-      <p:sp>
-        <p:nvSpPr>
-          <p:cNvPr id="41" name="Text 39"/>
+              <a:srgbClr val="4A9968"/>
+            </a:solidFill>
+            <a:prstDash val="solid"/>
+          </a:ln>
+        </p:spPr>
+      </p:sp>
+      <p:sp>
+        <p:nvSpPr>
+          <p:cNvPr id="44" name="Text 42"/>
           <p:cNvSpPr/>
           <p:nvPr/>
         </p:nvSpPr>
@@ -9938,7 +10073,7 @@
       </p:sp>
       <p:sp>
         <p:nvSpPr>
-          <p:cNvPr id="42" name="Text 40"/>
+          <p:cNvPr id="45" name="Text 43"/>
           <p:cNvSpPr/>
           <p:nvPr/>
         </p:nvSpPr>
@@ -9963,7 +10098,7 @@
             <a:r>
               <a:rPr lang="en-US" sz="950" b="1" dirty="0">
                 <a:solidFill>
-                  <a:srgbClr val="E6EDF3"/>
+                  <a:srgbClr val="2D2926"/>
                 </a:solidFill>
                 <a:latin typeface="Calibri" pitchFamily="34" charset="0"/>
                 <a:ea typeface="Calibri" pitchFamily="34" charset="-122"/>
@@ -9977,7 +10112,7 @@
       </p:sp>
       <p:sp>
         <p:nvSpPr>
-          <p:cNvPr id="43" name="Shape 41"/>
+          <p:cNvPr id="46" name="Shape 44"/>
           <p:cNvSpPr/>
           <p:nvPr/>
         </p:nvSpPr>
@@ -9992,7 +10127,7 @@
           <a:noFill/>
           <a:ln w="19050">
             <a:solidFill>
-              <a:srgbClr val="6E40C9"/>
+              <a:srgbClr val="8B6AB5"/>
             </a:solidFill>
             <a:prstDash val="solid"/>
             <a:tailEnd type="arrow"/>
@@ -10001,7 +10136,7 @@
       </p:sp>
       <p:sp>
         <p:nvSpPr>
-          <p:cNvPr id="44" name="Shape 42"/>
+          <p:cNvPr id="47" name="Shape 45"/>
           <p:cNvSpPr/>
           <p:nvPr/>
         </p:nvSpPr>
@@ -10016,19 +10151,19 @@
             </a:avLst>
           </a:prstGeom>
           <a:solidFill>
-            <a:srgbClr val="161B22"/>
+            <a:srgbClr val="F5F1EB"/>
           </a:solidFill>
           <a:ln w="12700">
             <a:solidFill>
-              <a:srgbClr val="3FB950"/>
-            </a:solidFill>
-            <a:prstDash val="solid"/>
-          </a:ln>
-        </p:spPr>
-      </p:sp>
-      <p:sp>
-        <p:nvSpPr>
-          <p:cNvPr id="45" name="Text 43"/>
+              <a:srgbClr val="4A9968"/>
+            </a:solidFill>
+            <a:prstDash val="solid"/>
+          </a:ln>
+        </p:spPr>
+      </p:sp>
+      <p:sp>
+        <p:nvSpPr>
+          <p:cNvPr id="48" name="Text 46"/>
           <p:cNvSpPr/>
           <p:nvPr/>
         </p:nvSpPr>
@@ -10064,7 +10199,7 @@
       </p:sp>
       <p:sp>
         <p:nvSpPr>
-          <p:cNvPr id="46" name="Text 44"/>
+          <p:cNvPr id="49" name="Text 47"/>
           <p:cNvSpPr/>
           <p:nvPr/>
         </p:nvSpPr>
@@ -10089,7 +10224,7 @@
             <a:r>
               <a:rPr lang="en-US" sz="950" b="1" dirty="0">
                 <a:solidFill>
-                  <a:srgbClr val="E6EDF3"/>
+                  <a:srgbClr val="2D2926"/>
                 </a:solidFill>
                 <a:latin typeface="Calibri" pitchFamily="34" charset="0"/>
                 <a:ea typeface="Calibri" pitchFamily="34" charset="-122"/>
@@ -10103,7 +10238,7 @@
       </p:sp>
       <p:sp>
         <p:nvSpPr>
-          <p:cNvPr id="47" name="Shape 45"/>
+          <p:cNvPr id="50" name="Shape 48"/>
           <p:cNvSpPr/>
           <p:nvPr/>
         </p:nvSpPr>
@@ -10118,7 +10253,7 @@
           <a:noFill/>
           <a:ln w="19050">
             <a:solidFill>
-              <a:srgbClr val="6E40C9"/>
+              <a:srgbClr val="8B6AB5"/>
             </a:solidFill>
             <a:prstDash val="solid"/>
             <a:tailEnd type="arrow"/>
@@ -10127,7 +10262,7 @@
       </p:sp>
       <p:sp>
         <p:nvSpPr>
-          <p:cNvPr id="48" name="Shape 46"/>
+          <p:cNvPr id="51" name="Shape 49"/>
           <p:cNvSpPr/>
           <p:nvPr/>
         </p:nvSpPr>
@@ -10142,19 +10277,19 @@
             </a:avLst>
           </a:prstGeom>
           <a:solidFill>
-            <a:srgbClr val="161B22"/>
+            <a:srgbClr val="F5F1EB"/>
           </a:solidFill>
           <a:ln w="12700">
             <a:solidFill>
-              <a:srgbClr val="3FB950"/>
-            </a:solidFill>
-            <a:prstDash val="solid"/>
-          </a:ln>
-        </p:spPr>
-      </p:sp>
-      <p:sp>
-        <p:nvSpPr>
-          <p:cNvPr id="49" name="Text 47"/>
+              <a:srgbClr val="4A9968"/>
+            </a:solidFill>
+            <a:prstDash val="solid"/>
+          </a:ln>
+        </p:spPr>
+      </p:sp>
+      <p:sp>
+        <p:nvSpPr>
+          <p:cNvPr id="52" name="Text 50"/>
           <p:cNvSpPr/>
           <p:nvPr/>
         </p:nvSpPr>
@@ -10190,7 +10325,7 @@
       </p:sp>
       <p:sp>
         <p:nvSpPr>
-          <p:cNvPr id="50" name="Text 48"/>
+          <p:cNvPr id="53" name="Text 51"/>
           <p:cNvSpPr/>
           <p:nvPr/>
         </p:nvSpPr>
@@ -10215,7 +10350,7 @@
             <a:r>
               <a:rPr lang="en-US" sz="950" b="1" dirty="0">
                 <a:solidFill>
-                  <a:srgbClr val="E6EDF3"/>
+                  <a:srgbClr val="2D2926"/>
                 </a:solidFill>
                 <a:latin typeface="Calibri" pitchFamily="34" charset="0"/>
                 <a:ea typeface="Calibri" pitchFamily="34" charset="-122"/>
@@ -10229,7 +10364,7 @@
       </p:sp>
       <p:sp>
         <p:nvSpPr>
-          <p:cNvPr id="51" name="Shape 49"/>
+          <p:cNvPr id="54" name="Shape 52"/>
           <p:cNvSpPr/>
           <p:nvPr/>
         </p:nvSpPr>
@@ -10244,19 +10379,19 @@
             </a:avLst>
           </a:prstGeom>
           <a:solidFill>
-            <a:srgbClr val="161B22"/>
+            <a:srgbClr val="F5F1EB"/>
           </a:solidFill>
           <a:ln w="12700">
             <a:solidFill>
-              <a:srgbClr val="6E40C9"/>
-            </a:solidFill>
-            <a:prstDash val="solid"/>
-          </a:ln>
-        </p:spPr>
-      </p:sp>
-      <p:sp>
-        <p:nvSpPr>
-          <p:cNvPr id="52" name="Text 50"/>
+              <a:srgbClr val="8B6AB5"/>
+            </a:solidFill>
+            <a:prstDash val="solid"/>
+          </a:ln>
+        </p:spPr>
+      </p:sp>
+      <p:sp>
+        <p:nvSpPr>
+          <p:cNvPr id="55" name="Text 53"/>
           <p:cNvSpPr/>
           <p:nvPr/>
         </p:nvSpPr>
@@ -10281,13 +10416,13 @@
             <a:r>
               <a:rPr lang="en-US" sz="1100" b="1" dirty="0">
                 <a:solidFill>
-                  <a:srgbClr val="6E40C9"/>
-                </a:solidFill>
-                <a:latin typeface="Calibri" pitchFamily="34" charset="0"/>
-                <a:ea typeface="Calibri" pitchFamily="34" charset="-122"/>
-                <a:cs typeface="Calibri" pitchFamily="34" charset="-120"/>
-              </a:rPr>
-              <a:t>📬 訂單→通知</a:t>
+                  <a:srgbClr val="8B6AB5"/>
+                </a:solidFill>
+                <a:latin typeface="Calibri" pitchFamily="34" charset="0"/>
+                <a:ea typeface="Calibri" pitchFamily="34" charset="-122"/>
+                <a:cs typeface="Calibri" pitchFamily="34" charset="-120"/>
+              </a:rPr>
+              <a:t>📬 Order→Notify</a:t>
             </a:r>
             <a:endParaRPr lang="en-US" sz="1100" dirty="0"/>
           </a:p>
@@ -10295,7 +10430,7 @@
       </p:sp>
       <p:sp>
         <p:nvSpPr>
-          <p:cNvPr id="53" name="Text 51"/>
+          <p:cNvPr id="56" name="Text 54"/>
           <p:cNvSpPr/>
           <p:nvPr/>
         </p:nvSpPr>
@@ -10320,13 +10455,13 @@
             <a:r>
               <a:rPr lang="en-US" sz="900" dirty="0">
                 <a:solidFill>
-                  <a:srgbClr val="8B949E"/>
-                </a:solidFill>
-                <a:latin typeface="Calibri" pitchFamily="34" charset="0"/>
-                <a:ea typeface="Calibri" pitchFamily="34" charset="-122"/>
-                <a:cs typeface="Calibri" pitchFamily="34" charset="-120"/>
-              </a:rPr>
-              <a:t>非同步寄信  ·  用戶無需等待</a:t>
+                  <a:srgbClr val="8A8078"/>
+                </a:solidFill>
+                <a:latin typeface="Calibri" pitchFamily="34" charset="0"/>
+                <a:ea typeface="Calibri" pitchFamily="34" charset="-122"/>
+                <a:cs typeface="Calibri" pitchFamily="34" charset="-120"/>
+              </a:rPr>
+              <a:t>Async email sending  ·  Users don't wait</a:t>
             </a:r>
             <a:endParaRPr lang="en-US" sz="900" dirty="0"/>
           </a:p>
@@ -10334,7 +10469,7 @@
       </p:sp>
       <p:sp>
         <p:nvSpPr>
-          <p:cNvPr id="54" name="Shape 52"/>
+          <p:cNvPr id="57" name="Shape 55"/>
           <p:cNvSpPr/>
           <p:nvPr/>
         </p:nvSpPr>
@@ -10349,19 +10484,19 @@
             </a:avLst>
           </a:prstGeom>
           <a:solidFill>
-            <a:srgbClr val="161B22"/>
+            <a:srgbClr val="F5F1EB"/>
           </a:solidFill>
           <a:ln w="12700">
             <a:solidFill>
-              <a:srgbClr val="6E40C9"/>
-            </a:solidFill>
-            <a:prstDash val="solid"/>
-          </a:ln>
-        </p:spPr>
-      </p:sp>
-      <p:sp>
-        <p:nvSpPr>
-          <p:cNvPr id="55" name="Text 53"/>
+              <a:srgbClr val="8B6AB5"/>
+            </a:solidFill>
+            <a:prstDash val="solid"/>
+          </a:ln>
+        </p:spPr>
+      </p:sp>
+      <p:sp>
+        <p:nvSpPr>
+          <p:cNvPr id="58" name="Text 56"/>
           <p:cNvSpPr/>
           <p:nvPr/>
         </p:nvSpPr>
@@ -10386,13 +10521,13 @@
             <a:r>
               <a:rPr lang="en-US" sz="1100" b="1" dirty="0">
                 <a:solidFill>
-                  <a:srgbClr val="6E40C9"/>
-                </a:solidFill>
-                <a:latin typeface="Calibri" pitchFamily="34" charset="0"/>
-                <a:ea typeface="Calibri" pitchFamily="34" charset="-122"/>
-                <a:cs typeface="Calibri" pitchFamily="34" charset="-120"/>
-              </a:rPr>
-              <a:t>🏔️ 削峰填谷</a:t>
+                  <a:srgbClr val="8B6AB5"/>
+                </a:solidFill>
+                <a:latin typeface="Calibri" pitchFamily="34" charset="0"/>
+                <a:ea typeface="Calibri" pitchFamily="34" charset="-122"/>
+                <a:cs typeface="Calibri" pitchFamily="34" charset="-120"/>
+              </a:rPr>
+              <a:t>🏔️ Peak Shaving</a:t>
             </a:r>
             <a:endParaRPr lang="en-US" sz="1100" dirty="0"/>
           </a:p>
@@ -10400,7 +10535,7 @@
       </p:sp>
       <p:sp>
         <p:nvSpPr>
-          <p:cNvPr id="56" name="Text 54"/>
+          <p:cNvPr id="59" name="Text 57"/>
           <p:cNvSpPr/>
           <p:nvPr/>
         </p:nvSpPr>
@@ -10425,13 +10560,13 @@
             <a:r>
               <a:rPr lang="en-US" sz="900" dirty="0">
                 <a:solidFill>
-                  <a:srgbClr val="8B949E"/>
-                </a:solidFill>
-                <a:latin typeface="Calibri" pitchFamily="34" charset="0"/>
-                <a:ea typeface="Calibri" pitchFamily="34" charset="-122"/>
-                <a:cs typeface="Calibri" pitchFamily="34" charset="-120"/>
-              </a:rPr>
-              <a:t>瞬間大量請求  ·  Queue緩衝消化</a:t>
+                  <a:srgbClr val="8A8078"/>
+                </a:solidFill>
+                <a:latin typeface="Calibri" pitchFamily="34" charset="0"/>
+                <a:ea typeface="Calibri" pitchFamily="34" charset="-122"/>
+                <a:cs typeface="Calibri" pitchFamily="34" charset="-120"/>
+              </a:rPr>
+              <a:t>Sudden traffic spikes  ·  Queue absorbs the load</a:t>
             </a:r>
             <a:endParaRPr lang="en-US" sz="900" dirty="0"/>
           </a:p>
@@ -10439,7 +10574,7 @@
       </p:sp>
       <p:sp>
         <p:nvSpPr>
-          <p:cNvPr id="57" name="Shape 55"/>
+          <p:cNvPr id="60" name="Shape 58"/>
           <p:cNvSpPr/>
           <p:nvPr/>
         </p:nvSpPr>
@@ -10454,19 +10589,19 @@
             </a:avLst>
           </a:prstGeom>
           <a:solidFill>
-            <a:srgbClr val="161B22"/>
+            <a:srgbClr val="F5F1EB"/>
           </a:solidFill>
           <a:ln w="12700">
             <a:solidFill>
-              <a:srgbClr val="6E40C9"/>
-            </a:solidFill>
-            <a:prstDash val="solid"/>
-          </a:ln>
-        </p:spPr>
-      </p:sp>
-      <p:sp>
-        <p:nvSpPr>
-          <p:cNvPr id="58" name="Text 56"/>
+              <a:srgbClr val="8B6AB5"/>
+            </a:solidFill>
+            <a:prstDash val="solid"/>
+          </a:ln>
+        </p:spPr>
+      </p:sp>
+      <p:sp>
+        <p:nvSpPr>
+          <p:cNvPr id="61" name="Text 59"/>
           <p:cNvSpPr/>
           <p:nvPr/>
         </p:nvSpPr>
@@ -10491,13 +10626,13 @@
             <a:r>
               <a:rPr lang="en-US" sz="1100" b="1" dirty="0">
                 <a:solidFill>
-                  <a:srgbClr val="6E40C9"/>
-                </a:solidFill>
-                <a:latin typeface="Calibri" pitchFamily="34" charset="0"/>
-                <a:ea typeface="Calibri" pitchFamily="34" charset="-122"/>
-                <a:cs typeface="Calibri" pitchFamily="34" charset="-120"/>
-              </a:rPr>
-              <a:t>🔓 服務解耦</a:t>
+                  <a:srgbClr val="8B6AB5"/>
+                </a:solidFill>
+                <a:latin typeface="Calibri" pitchFamily="34" charset="0"/>
+                <a:ea typeface="Calibri" pitchFamily="34" charset="-122"/>
+                <a:cs typeface="Calibri" pitchFamily="34" charset="-120"/>
+              </a:rPr>
+              <a:t>🔓 Service Decoupling</a:t>
             </a:r>
             <a:endParaRPr lang="en-US" sz="1100" dirty="0"/>
           </a:p>
@@ -10505,7 +10640,7 @@
       </p:sp>
       <p:sp>
         <p:nvSpPr>
-          <p:cNvPr id="59" name="Text 57"/>
+          <p:cNvPr id="62" name="Text 60"/>
           <p:cNvSpPr/>
           <p:nvPr/>
         </p:nvSpPr>
@@ -10530,13 +10665,13 @@
             <a:r>
               <a:rPr lang="en-US" sz="900" dirty="0">
                 <a:solidFill>
-                  <a:srgbClr val="8B949E"/>
-                </a:solidFill>
-                <a:latin typeface="Calibri" pitchFamily="34" charset="0"/>
-                <a:ea typeface="Calibri" pitchFamily="34" charset="-122"/>
-                <a:cs typeface="Calibri" pitchFamily="34" charset="-120"/>
-              </a:rPr>
-              <a:t>各服務獨立Scale  ·  互不影響</a:t>
+                  <a:srgbClr val="8A8078"/>
+                </a:solidFill>
+                <a:latin typeface="Calibri" pitchFamily="34" charset="0"/>
+                <a:ea typeface="Calibri" pitchFamily="34" charset="-122"/>
+                <a:cs typeface="Calibri" pitchFamily="34" charset="-120"/>
+              </a:rPr>
+              <a:t>Services scale independently  ·  No mutual impact</a:t>
             </a:r>
             <a:endParaRPr lang="en-US" sz="900" dirty="0"/>
           </a:p>
@@ -10556,7 +10691,7 @@
     <p:bg>
       <p:bgPr>
         <a:solidFill>
-          <a:srgbClr val="0D1117"/>
+          <a:srgbClr val="FFFDF8"/>
         </a:solidFill>
       </p:bgPr>
     </p:bg>
@@ -10589,11 +10724,11 @@
             <a:avLst/>
           </a:prstGeom>
           <a:solidFill>
-            <a:srgbClr val="161B22"/>
+            <a:srgbClr val="F5F1EB"/>
           </a:solidFill>
           <a:ln w="6350">
             <a:solidFill>
-              <a:srgbClr val="30363D"/>
+              <a:srgbClr val="D6CCBF"/>
             </a:solidFill>
             <a:prstDash val="solid"/>
           </a:ln>
@@ -10614,11 +10749,11 @@
             <a:avLst/>
           </a:prstGeom>
           <a:solidFill>
-            <a:srgbClr val="F85149"/>
+            <a:srgbClr val="C4605B"/>
           </a:solidFill>
           <a:ln w="12700">
             <a:solidFill>
-              <a:srgbClr val="F85149"/>
+              <a:srgbClr val="C4605B"/>
             </a:solidFill>
             <a:prstDash val="solid"/>
           </a:ln>
@@ -10651,13 +10786,13 @@
             <a:r>
               <a:rPr lang="en-US" sz="1600" b="1" dirty="0">
                 <a:solidFill>
-                  <a:srgbClr val="E6EDF3"/>
-                </a:solidFill>
-                <a:latin typeface="Calibri" pitchFamily="34" charset="0"/>
-                <a:ea typeface="Calibri" pitchFamily="34" charset="-122"/>
-                <a:cs typeface="Calibri" pitchFamily="34" charset="-120"/>
-              </a:rPr>
-              <a:t>完整分散式架構：你現在需要維運什麼？</a:t>
+                  <a:srgbClr val="2D2926"/>
+                </a:solidFill>
+                <a:latin typeface="Calibri" pitchFamily="34" charset="0"/>
+                <a:ea typeface="Calibri" pitchFamily="34" charset="-122"/>
+                <a:cs typeface="Calibri" pitchFamily="34" charset="-120"/>
+              </a:rPr>
+              <a:t>Complete Distributed Architecture: What You Now Need to Operate</a:t>
             </a:r>
             <a:endParaRPr lang="en-US" sz="1600" dirty="0"/>
           </a:p>
@@ -10690,13 +10825,13 @@
             <a:r>
               <a:rPr lang="en-US" sz="750" dirty="0">
                 <a:solidFill>
-                  <a:srgbClr val="8B949E"/>
-                </a:solidFill>
-                <a:latin typeface="Calibri" pitchFamily="34" charset="0"/>
-                <a:ea typeface="Calibri" pitchFamily="34" charset="-122"/>
-                <a:cs typeface="Calibri" pitchFamily="34" charset="-120"/>
-              </a:rPr>
-              <a:t>複雜度  9/10</a:t>
+                  <a:srgbClr val="8A8078"/>
+                </a:solidFill>
+                <a:latin typeface="Calibri" pitchFamily="34" charset="0"/>
+                <a:ea typeface="Calibri" pitchFamily="34" charset="-122"/>
+                <a:cs typeface="Calibri" pitchFamily="34" charset="-120"/>
+              </a:rPr>
+              <a:t>Complexity  9/10</a:t>
             </a:r>
             <a:endParaRPr lang="en-US" sz="750" dirty="0"/>
           </a:p>
@@ -10717,11 +10852,11 @@
             <a:avLst/>
           </a:prstGeom>
           <a:solidFill>
-            <a:srgbClr val="252D38"/>
+            <a:srgbClr val="D6CCBF"/>
           </a:solidFill>
           <a:ln w="12700">
             <a:solidFill>
-              <a:srgbClr val="252D38"/>
+              <a:srgbClr val="D6CCBF"/>
             </a:solidFill>
             <a:prstDash val="solid"/>
           </a:ln>
@@ -10742,11 +10877,11 @@
             <a:avLst/>
           </a:prstGeom>
           <a:solidFill>
-            <a:srgbClr val="F85149"/>
+            <a:srgbClr val="C4605B"/>
           </a:solidFill>
           <a:ln w="12700">
             <a:solidFill>
-              <a:srgbClr val="F85149"/>
+              <a:srgbClr val="C4605B"/>
             </a:solidFill>
             <a:prstDash val="solid"/>
           </a:ln>
@@ -10779,13 +10914,13 @@
             <a:r>
               <a:rPr lang="en-US" sz="850" dirty="0">
                 <a:solidFill>
-                  <a:srgbClr val="8B949E"/>
-                </a:solidFill>
-                <a:latin typeface="Calibri" pitchFamily="34" charset="0"/>
-                <a:ea typeface="Calibri" pitchFamily="34" charset="-122"/>
-                <a:cs typeface="Calibri" pitchFamily="34" charset="-120"/>
-              </a:rPr>
-              <a:t>PART 2  ·  18 / 50</a:t>
+                  <a:srgbClr val="8A8078"/>
+                </a:solidFill>
+                <a:latin typeface="Calibri" pitchFamily="34" charset="0"/>
+                <a:ea typeface="Calibri" pitchFamily="34" charset="-122"/>
+                <a:cs typeface="Calibri" pitchFamily="34" charset="-120"/>
+              </a:rPr>
+              <a:t>PART 2</a:t>
             </a:r>
             <a:endParaRPr lang="en-US" sz="850" dirty="0"/>
           </a:p>
@@ -10818,7 +10953,7 @@
             <a:r>
               <a:rPr lang="en-US" sz="700" dirty="0">
                 <a:solidFill>
-                  <a:srgbClr val="8B949E"/>
+                  <a:srgbClr val="8A8078"/>
                 </a:solidFill>
                 <a:latin typeface="Calibri" pitchFamily="34" charset="0"/>
                 <a:ea typeface="Calibri" pitchFamily="34" charset="-122"/>
@@ -10847,11 +10982,11 @@
             </a:avLst>
           </a:prstGeom>
           <a:solidFill>
-            <a:srgbClr val="161B22"/>
+            <a:srgbClr val="F5F1EB"/>
           </a:solidFill>
           <a:ln w="12700">
             <a:solidFill>
-              <a:srgbClr val="8B949E"/>
+              <a:srgbClr val="908880"/>
             </a:solidFill>
             <a:prstDash val="solid"/>
           </a:ln>
@@ -10920,7 +11055,7 @@
             <a:r>
               <a:rPr lang="en-US" sz="950" b="1" dirty="0">
                 <a:solidFill>
-                  <a:srgbClr val="E6EDF3"/>
+                  <a:srgbClr val="2D2926"/>
                 </a:solidFill>
                 <a:latin typeface="Calibri" pitchFamily="34" charset="0"/>
                 <a:ea typeface="Calibri" pitchFamily="34" charset="-122"/>
@@ -10949,11 +11084,11 @@
             </a:avLst>
           </a:prstGeom>
           <a:solidFill>
-            <a:srgbClr val="161B22"/>
+            <a:srgbClr val="F5F1EB"/>
           </a:solidFill>
           <a:ln w="12700">
             <a:solidFill>
-              <a:srgbClr val="1A7F64"/>
+              <a:srgbClr val="4A917E"/>
             </a:solidFill>
             <a:prstDash val="solid"/>
           </a:ln>
@@ -11022,7 +11157,7 @@
             <a:r>
               <a:rPr lang="en-US" sz="950" b="1" dirty="0">
                 <a:solidFill>
-                  <a:srgbClr val="E6EDF3"/>
+                  <a:srgbClr val="2D2926"/>
                 </a:solidFill>
                 <a:latin typeface="Calibri" pitchFamily="34" charset="0"/>
                 <a:ea typeface="Calibri" pitchFamily="34" charset="-122"/>
@@ -11051,11 +11186,11 @@
             </a:avLst>
           </a:prstGeom>
           <a:solidFill>
-            <a:srgbClr val="161B22"/>
+            <a:srgbClr val="F5F1EB"/>
           </a:solidFill>
           <a:ln w="12700">
             <a:solidFill>
-              <a:srgbClr val="D29922"/>
+              <a:srgbClr val="B8892C"/>
             </a:solidFill>
             <a:prstDash val="solid"/>
           </a:ln>
@@ -11124,7 +11259,7 @@
             <a:r>
               <a:rPr lang="en-US" sz="950" b="1" dirty="0">
                 <a:solidFill>
-                  <a:srgbClr val="E6EDF3"/>
+                  <a:srgbClr val="2D2926"/>
                 </a:solidFill>
                 <a:latin typeface="Calibri" pitchFamily="34" charset="0"/>
                 <a:ea typeface="Calibri" pitchFamily="34" charset="-122"/>
@@ -11153,7 +11288,7 @@
           <a:noFill/>
           <a:ln w="19050">
             <a:solidFill>
-              <a:srgbClr val="30363D"/>
+              <a:srgbClr val="D6CCBF"/>
             </a:solidFill>
             <a:prstDash val="solid"/>
             <a:tailEnd type="arrow"/>
@@ -11187,7 +11322,7 @@
             <a:r>
               <a:rPr lang="en-US" sz="700" dirty="0">
                 <a:solidFill>
-                  <a:srgbClr val="8B949E"/>
+                  <a:srgbClr val="8A8078"/>
                 </a:solidFill>
                 <a:latin typeface="Calibri" pitchFamily="34" charset="0"/>
                 <a:ea typeface="Calibri" pitchFamily="34" charset="-122"/>
@@ -11216,11 +11351,11 @@
             </a:avLst>
           </a:prstGeom>
           <a:solidFill>
-            <a:srgbClr val="161B22"/>
+            <a:srgbClr val="F5F1EB"/>
           </a:solidFill>
           <a:ln w="12700">
             <a:solidFill>
-              <a:srgbClr val="6E40C9"/>
+              <a:srgbClr val="8B6AB5"/>
             </a:solidFill>
             <a:prstDash val="solid"/>
           </a:ln>
@@ -11289,7 +11424,7 @@
             <a:r>
               <a:rPr lang="en-US" sz="950" b="1" dirty="0">
                 <a:solidFill>
-                  <a:srgbClr val="E6EDF3"/>
+                  <a:srgbClr val="2D2926"/>
                 </a:solidFill>
                 <a:latin typeface="Calibri" pitchFamily="34" charset="0"/>
                 <a:ea typeface="Calibri" pitchFamily="34" charset="-122"/>
@@ -11318,7 +11453,7 @@
           <a:noFill/>
           <a:ln w="19050">
             <a:solidFill>
-              <a:srgbClr val="30363D"/>
+              <a:srgbClr val="D6CCBF"/>
             </a:solidFill>
             <a:prstDash val="solid"/>
             <a:tailEnd type="arrow"/>
@@ -11343,7 +11478,7 @@
           </a:prstGeom>
           <a:ln w="12700">
             <a:solidFill>
-              <a:srgbClr val="1F6FEB"/>
+              <a:srgbClr val="5B8DB8"/>
             </a:solidFill>
             <a:prstDash val="dash"/>
           </a:ln>
@@ -11366,11 +11501,11 @@
             </a:avLst>
           </a:prstGeom>
           <a:solidFill>
-            <a:srgbClr val="0D1117"/>
+            <a:srgbClr val="FFFDF8"/>
           </a:solidFill>
           <a:ln w="6350">
             <a:solidFill>
-              <a:srgbClr val="1F6FEB"/>
+              <a:srgbClr val="5B8DB8"/>
             </a:solidFill>
             <a:prstDash val="solid"/>
           </a:ln>
@@ -11403,7 +11538,7 @@
             <a:r>
               <a:rPr lang="en-US" sz="750" b="1" dirty="0">
                 <a:solidFill>
-                  <a:srgbClr val="1F6FEB"/>
+                  <a:srgbClr val="5B8DB8"/>
                 </a:solidFill>
                 <a:latin typeface="Calibri" pitchFamily="34" charset="0"/>
                 <a:ea typeface="Calibri" pitchFamily="34" charset="-122"/>
@@ -11432,11 +11567,11 @@
             </a:avLst>
           </a:prstGeom>
           <a:solidFill>
-            <a:srgbClr val="161B22"/>
+            <a:srgbClr val="F5F1EB"/>
           </a:solidFill>
           <a:ln w="12700">
             <a:solidFill>
-              <a:srgbClr val="1F6FEB"/>
+              <a:srgbClr val="5B8DB8"/>
             </a:solidFill>
             <a:prstDash val="solid"/>
           </a:ln>
@@ -11505,7 +11640,7 @@
             <a:r>
               <a:rPr lang="en-US" sz="950" b="1" dirty="0">
                 <a:solidFill>
-                  <a:srgbClr val="E6EDF3"/>
+                  <a:srgbClr val="2D2926"/>
                 </a:solidFill>
                 <a:latin typeface="Calibri" pitchFamily="34" charset="0"/>
                 <a:ea typeface="Calibri" pitchFamily="34" charset="-122"/>
@@ -11534,11 +11669,11 @@
             </a:avLst>
           </a:prstGeom>
           <a:solidFill>
-            <a:srgbClr val="161B22"/>
+            <a:srgbClr val="F5F1EB"/>
           </a:solidFill>
           <a:ln w="12700">
             <a:solidFill>
-              <a:srgbClr val="1F6FEB"/>
+              <a:srgbClr val="5B8DB8"/>
             </a:solidFill>
             <a:prstDash val="solid"/>
           </a:ln>
@@ -11607,7 +11742,7 @@
             <a:r>
               <a:rPr lang="en-US" sz="950" b="1" dirty="0">
                 <a:solidFill>
-                  <a:srgbClr val="E6EDF3"/>
+                  <a:srgbClr val="2D2926"/>
                 </a:solidFill>
                 <a:latin typeface="Calibri" pitchFamily="34" charset="0"/>
                 <a:ea typeface="Calibri" pitchFamily="34" charset="-122"/>
@@ -11636,7 +11771,7 @@
           <a:noFill/>
           <a:ln w="19050">
             <a:solidFill>
-              <a:srgbClr val="30363D"/>
+              <a:srgbClr val="D6CCBF"/>
             </a:solidFill>
             <a:prstDash val="solid"/>
             <a:tailEnd type="arrow"/>
@@ -11661,7 +11796,7 @@
           </a:prstGeom>
           <a:ln w="12700">
             <a:solidFill>
-              <a:srgbClr val="238636"/>
+              <a:srgbClr val="5A9B6E"/>
             </a:solidFill>
             <a:prstDash val="dash"/>
           </a:ln>
@@ -11684,11 +11819,11 @@
             </a:avLst>
           </a:prstGeom>
           <a:solidFill>
-            <a:srgbClr val="0D1117"/>
+            <a:srgbClr val="FFFDF8"/>
           </a:solidFill>
           <a:ln w="6350">
             <a:solidFill>
-              <a:srgbClr val="238636"/>
+              <a:srgbClr val="5A9B6E"/>
             </a:solidFill>
             <a:prstDash val="solid"/>
           </a:ln>
@@ -11721,7 +11856,7 @@
             <a:r>
               <a:rPr lang="en-US" sz="750" b="1" dirty="0">
                 <a:solidFill>
-                  <a:srgbClr val="238636"/>
+                  <a:srgbClr val="5A9B6E"/>
                 </a:solidFill>
                 <a:latin typeface="Calibri" pitchFamily="34" charset="0"/>
                 <a:ea typeface="Calibri" pitchFamily="34" charset="-122"/>
@@ -11750,11 +11885,11 @@
             </a:avLst>
           </a:prstGeom>
           <a:solidFill>
-            <a:srgbClr val="161B22"/>
+            <a:srgbClr val="F5F1EB"/>
           </a:solidFill>
           <a:ln w="12700">
             <a:solidFill>
-              <a:srgbClr val="238636"/>
+              <a:srgbClr val="5A9B6E"/>
             </a:solidFill>
             <a:prstDash val="solid"/>
           </a:ln>
@@ -11823,7 +11958,7 @@
             <a:r>
               <a:rPr lang="en-US" sz="950" b="1" dirty="0">
                 <a:solidFill>
-                  <a:srgbClr val="E6EDF3"/>
+                  <a:srgbClr val="2D2926"/>
                 </a:solidFill>
                 <a:latin typeface="Calibri" pitchFamily="34" charset="0"/>
                 <a:ea typeface="Calibri" pitchFamily="34" charset="-122"/>
@@ -11852,11 +11987,11 @@
             </a:avLst>
           </a:prstGeom>
           <a:solidFill>
-            <a:srgbClr val="161B22"/>
+            <a:srgbClr val="F5F1EB"/>
           </a:solidFill>
           <a:ln w="12700">
             <a:solidFill>
-              <a:srgbClr val="238636"/>
+              <a:srgbClr val="5A9B6E"/>
             </a:solidFill>
             <a:prstDash val="solid"/>
           </a:ln>
@@ -11925,7 +12060,7 @@
             <a:r>
               <a:rPr lang="en-US" sz="950" b="1" dirty="0">
                 <a:solidFill>
-                  <a:srgbClr val="E6EDF3"/>
+                  <a:srgbClr val="2D2926"/>
                 </a:solidFill>
                 <a:latin typeface="Calibri" pitchFamily="34" charset="0"/>
                 <a:ea typeface="Calibri" pitchFamily="34" charset="-122"/>
@@ -11954,11 +12089,11 @@
             </a:avLst>
           </a:prstGeom>
           <a:solidFill>
-            <a:srgbClr val="161B22"/>
+            <a:srgbClr val="F5F1EB"/>
           </a:solidFill>
           <a:ln w="12700">
             <a:solidFill>
-              <a:srgbClr val="6E40C9"/>
+              <a:srgbClr val="8B6AB5"/>
             </a:solidFill>
             <a:prstDash val="solid"/>
           </a:ln>
@@ -12027,7 +12162,7 @@
             <a:r>
               <a:rPr lang="en-US" sz="950" b="1" dirty="0">
                 <a:solidFill>
-                  <a:srgbClr val="E6EDF3"/>
+                  <a:srgbClr val="2D2926"/>
                 </a:solidFill>
                 <a:latin typeface="Calibri" pitchFamily="34" charset="0"/>
                 <a:ea typeface="Calibri" pitchFamily="34" charset="-122"/>
@@ -12056,11 +12191,11 @@
             </a:avLst>
           </a:prstGeom>
           <a:solidFill>
-            <a:srgbClr val="161B22"/>
+            <a:srgbClr val="F5F1EB"/>
           </a:solidFill>
           <a:ln w="12700">
             <a:solidFill>
-              <a:srgbClr val="6E40C9"/>
+              <a:srgbClr val="8B6AB5"/>
             </a:solidFill>
             <a:prstDash val="solid"/>
           </a:ln>
@@ -12129,7 +12264,7 @@
             <a:r>
               <a:rPr lang="en-US" sz="950" b="1" dirty="0">
                 <a:solidFill>
-                  <a:srgbClr val="E6EDF3"/>
+                  <a:srgbClr val="2D2926"/>
                 </a:solidFill>
                 <a:latin typeface="Calibri" pitchFamily="34" charset="0"/>
                 <a:ea typeface="Calibri" pitchFamily="34" charset="-122"/>
@@ -12158,7 +12293,7 @@
           <a:noFill/>
           <a:ln w="19050">
             <a:solidFill>
-              <a:srgbClr val="30363D"/>
+              <a:srgbClr val="D6CCBF"/>
             </a:solidFill>
             <a:prstDash val="solid"/>
             <a:tailEnd type="arrow"/>
@@ -12182,11 +12317,11 @@
             </a:avLst>
           </a:prstGeom>
           <a:solidFill>
-            <a:srgbClr val="161B22"/>
+            <a:srgbClr val="F5F1EB"/>
           </a:solidFill>
           <a:ln w="12700">
             <a:solidFill>
-              <a:srgbClr val="F85149"/>
+              <a:srgbClr val="C4605B"/>
             </a:solidFill>
             <a:prstDash val="solid"/>
           </a:ln>
@@ -12255,7 +12390,7 @@
             <a:r>
               <a:rPr lang="en-US" sz="950" b="1" dirty="0">
                 <a:solidFill>
-                  <a:srgbClr val="E6EDF3"/>
+                  <a:srgbClr val="2D2926"/>
                 </a:solidFill>
                 <a:latin typeface="Calibri" pitchFamily="34" charset="0"/>
                 <a:ea typeface="Calibri" pitchFamily="34" charset="-122"/>
@@ -12294,7 +12429,7 @@
             <a:r>
               <a:rPr lang="en-US" sz="800" dirty="0">
                 <a:solidFill>
-                  <a:srgbClr val="8B949E"/>
+                  <a:srgbClr val="8A8078"/>
                 </a:solidFill>
                 <a:latin typeface="Consolas" pitchFamily="34" charset="0"/>
                 <a:ea typeface="Consolas" pitchFamily="34" charset="-122"/>
@@ -12323,11 +12458,11 @@
             </a:avLst>
           </a:prstGeom>
           <a:solidFill>
-            <a:srgbClr val="161B22"/>
+            <a:srgbClr val="F5F1EB"/>
           </a:solidFill>
           <a:ln w="12700">
             <a:solidFill>
-              <a:srgbClr val="E36209"/>
+              <a:srgbClr val="C4804A"/>
             </a:solidFill>
             <a:prstDash val="solid"/>
           </a:ln>
@@ -12396,7 +12531,7 @@
             <a:r>
               <a:rPr lang="en-US" sz="950" b="1" dirty="0">
                 <a:solidFill>
-                  <a:srgbClr val="E6EDF3"/>
+                  <a:srgbClr val="2D2926"/>
                 </a:solidFill>
                 <a:latin typeface="Calibri" pitchFamily="34" charset="0"/>
                 <a:ea typeface="Calibri" pitchFamily="34" charset="-122"/>
@@ -12425,11 +12560,11 @@
             </a:avLst>
           </a:prstGeom>
           <a:solidFill>
-            <a:srgbClr val="161B22"/>
+            <a:srgbClr val="F5F1EB"/>
           </a:solidFill>
           <a:ln w="12700">
             <a:solidFill>
-              <a:srgbClr val="E36209"/>
+              <a:srgbClr val="C4804A"/>
             </a:solidFill>
             <a:prstDash val="solid"/>
           </a:ln>
@@ -12498,7 +12633,7 @@
             <a:r>
               <a:rPr lang="en-US" sz="950" b="1" dirty="0">
                 <a:solidFill>
-                  <a:srgbClr val="E6EDF3"/>
+                  <a:srgbClr val="2D2926"/>
                 </a:solidFill>
                 <a:latin typeface="Calibri" pitchFamily="34" charset="0"/>
                 <a:ea typeface="Calibri" pitchFamily="34" charset="-122"/>
@@ -12527,11 +12662,11 @@
             </a:avLst>
           </a:prstGeom>
           <a:solidFill>
-            <a:srgbClr val="161B22"/>
+            <a:srgbClr val="F5F1EB"/>
           </a:solidFill>
           <a:ln w="12700">
             <a:solidFill>
-              <a:srgbClr val="E36209"/>
+              <a:srgbClr val="C4804A"/>
             </a:solidFill>
             <a:prstDash val="solid"/>
           </a:ln>
@@ -12600,7 +12735,7 @@
             <a:r>
               <a:rPr lang="en-US" sz="950" b="1" dirty="0">
                 <a:solidFill>
-                  <a:srgbClr val="E6EDF3"/>
+                  <a:srgbClr val="2D2926"/>
                 </a:solidFill>
                 <a:latin typeface="Calibri" pitchFamily="34" charset="0"/>
                 <a:ea typeface="Calibri" pitchFamily="34" charset="-122"/>
@@ -12639,13 +12774,13 @@
             <a:r>
               <a:rPr lang="en-US" sz="1300" b="1" dirty="0">
                 <a:solidFill>
-                  <a:srgbClr val="D29922"/>
-                </a:solidFill>
-                <a:latin typeface="Calibri" pitchFamily="34" charset="0"/>
-                <a:ea typeface="Calibri" pitchFamily="34" charset="-122"/>
-                <a:cs typeface="Calibri" pitchFamily="34" charset="-120"/>
-              </a:rPr>
-              <a:t>你在維運的機器</a:t>
+                  <a:srgbClr val="B8892C"/>
+                </a:solidFill>
+                <a:latin typeface="Calibri" pitchFamily="34" charset="0"/>
+                <a:ea typeface="Calibri" pitchFamily="34" charset="-122"/>
+                <a:cs typeface="Calibri" pitchFamily="34" charset="-120"/>
+              </a:rPr>
+              <a:t>Machines You Operate</a:t>
             </a:r>
             <a:endParaRPr lang="en-US" sz="1300" dirty="0"/>
           </a:p>
@@ -12668,11 +12803,11 @@
             </a:avLst>
           </a:prstGeom>
           <a:solidFill>
-            <a:srgbClr val="161B22"/>
+            <a:srgbClr val="F5F1EB"/>
           </a:solidFill>
           <a:ln w="9525">
             <a:solidFill>
-              <a:srgbClr val="D29922"/>
+              <a:srgbClr val="B8892C"/>
             </a:solidFill>
             <a:prstDash val="solid"/>
           </a:ln>
@@ -12705,7 +12840,7 @@
             <a:r>
               <a:rPr lang="en-US" sz="950" dirty="0">
                 <a:solidFill>
-                  <a:srgbClr val="E6EDF3"/>
+                  <a:srgbClr val="2D2926"/>
                 </a:solidFill>
                 <a:latin typeface="Calibri" pitchFamily="34" charset="0"/>
                 <a:ea typeface="Calibri" pitchFamily="34" charset="-122"/>
@@ -12744,7 +12879,7 @@
             <a:r>
               <a:rPr lang="en-US" sz="1800" b="1" dirty="0">
                 <a:solidFill>
-                  <a:srgbClr val="D29922"/>
+                  <a:srgbClr val="B8892C"/>
                 </a:solidFill>
                 <a:latin typeface="Calibri" pitchFamily="34" charset="0"/>
                 <a:ea typeface="Calibri" pitchFamily="34" charset="-122"/>
@@ -12773,11 +12908,11 @@
             </a:avLst>
           </a:prstGeom>
           <a:solidFill>
-            <a:srgbClr val="161B22"/>
+            <a:srgbClr val="F5F1EB"/>
           </a:solidFill>
           <a:ln w="9525">
             <a:solidFill>
-              <a:srgbClr val="1F6FEB"/>
+              <a:srgbClr val="5B8DB8"/>
             </a:solidFill>
             <a:prstDash val="solid"/>
           </a:ln>
@@ -12810,7 +12945,7 @@
             <a:r>
               <a:rPr lang="en-US" sz="950" dirty="0">
                 <a:solidFill>
-                  <a:srgbClr val="E6EDF3"/>
+                  <a:srgbClr val="2D2926"/>
                 </a:solidFill>
                 <a:latin typeface="Calibri" pitchFamily="34" charset="0"/>
                 <a:ea typeface="Calibri" pitchFamily="34" charset="-122"/>
@@ -12849,7 +12984,7 @@
             <a:r>
               <a:rPr lang="en-US" sz="1800" b="1" dirty="0">
                 <a:solidFill>
-                  <a:srgbClr val="1F6FEB"/>
+                  <a:srgbClr val="5B8DB8"/>
                 </a:solidFill>
                 <a:latin typeface="Calibri" pitchFamily="34" charset="0"/>
                 <a:ea typeface="Calibri" pitchFamily="34" charset="-122"/>
@@ -12878,11 +13013,11 @@
             </a:avLst>
           </a:prstGeom>
           <a:solidFill>
-            <a:srgbClr val="161B22"/>
+            <a:srgbClr val="F5F1EB"/>
           </a:solidFill>
           <a:ln w="9525">
             <a:solidFill>
-              <a:srgbClr val="E36209"/>
+              <a:srgbClr val="C4804A"/>
             </a:solidFill>
             <a:prstDash val="solid"/>
           </a:ln>
@@ -12915,7 +13050,7 @@
             <a:r>
               <a:rPr lang="en-US" sz="950" dirty="0">
                 <a:solidFill>
-                  <a:srgbClr val="E6EDF3"/>
+                  <a:srgbClr val="2D2926"/>
                 </a:solidFill>
                 <a:latin typeface="Calibri" pitchFamily="34" charset="0"/>
                 <a:ea typeface="Calibri" pitchFamily="34" charset="-122"/>
@@ -12954,7 +13089,7 @@
             <a:r>
               <a:rPr lang="en-US" sz="1800" b="1" dirty="0">
                 <a:solidFill>
-                  <a:srgbClr val="E36209"/>
+                  <a:srgbClr val="C4804A"/>
                 </a:solidFill>
                 <a:latin typeface="Calibri" pitchFamily="34" charset="0"/>
                 <a:ea typeface="Calibri" pitchFamily="34" charset="-122"/>
@@ -12983,11 +13118,11 @@
             </a:avLst>
           </a:prstGeom>
           <a:solidFill>
-            <a:srgbClr val="161B22"/>
+            <a:srgbClr val="F5F1EB"/>
           </a:solidFill>
           <a:ln w="9525">
             <a:solidFill>
-              <a:srgbClr val="6E40C9"/>
+              <a:srgbClr val="8B6AB5"/>
             </a:solidFill>
             <a:prstDash val="solid"/>
           </a:ln>
@@ -13020,7 +13155,7 @@
             <a:r>
               <a:rPr lang="en-US" sz="950" dirty="0">
                 <a:solidFill>
-                  <a:srgbClr val="E6EDF3"/>
+                  <a:srgbClr val="2D2926"/>
                 </a:solidFill>
                 <a:latin typeface="Calibri" pitchFamily="34" charset="0"/>
                 <a:ea typeface="Calibri" pitchFamily="34" charset="-122"/>
@@ -13059,7 +13194,7 @@
             <a:r>
               <a:rPr lang="en-US" sz="1800" b="1" dirty="0">
                 <a:solidFill>
-                  <a:srgbClr val="6E40C9"/>
+                  <a:srgbClr val="8B6AB5"/>
                 </a:solidFill>
                 <a:latin typeface="Calibri" pitchFamily="34" charset="0"/>
                 <a:ea typeface="Calibri" pitchFamily="34" charset="-122"/>
@@ -13088,11 +13223,11 @@
             </a:avLst>
           </a:prstGeom>
           <a:solidFill>
-            <a:srgbClr val="2A0F0F"/>
+            <a:srgbClr val="F8ECEC"/>
           </a:solidFill>
           <a:ln w="19050">
             <a:solidFill>
-              <a:srgbClr val="F85149"/>
+              <a:srgbClr val="C4605B"/>
             </a:solidFill>
             <a:prstDash val="solid"/>
           </a:ln>
@@ -13125,13 +13260,13 @@
             <a:r>
               <a:rPr lang="en-US" sz="2000" b="1" dirty="0">
                 <a:solidFill>
-                  <a:srgbClr val="F85149"/>
-                </a:solidFill>
-                <a:latin typeface="Calibri" pitchFamily="34" charset="0"/>
-                <a:ea typeface="Calibri" pitchFamily="34" charset="-122"/>
-                <a:cs typeface="Calibri" pitchFamily="34" charset="-120"/>
-              </a:rPr>
-              <a:t>15+ 台機器</a:t>
+                  <a:srgbClr val="C4605B"/>
+                </a:solidFill>
+                <a:latin typeface="Calibri" pitchFamily="34" charset="0"/>
+                <a:ea typeface="Calibri" pitchFamily="34" charset="-122"/>
+                <a:cs typeface="Calibri" pitchFamily="34" charset="-120"/>
+              </a:rPr>
+              <a:t>15+ Machines</a:t>
             </a:r>
             <a:endParaRPr lang="en-US" sz="2000" dirty="0"/>
           </a:p>
@@ -13154,11 +13289,11 @@
             </a:avLst>
           </a:prstGeom>
           <a:solidFill>
-            <a:srgbClr val="2A0F0F"/>
+            <a:srgbClr val="F8ECEC"/>
           </a:solidFill>
           <a:ln w="12700">
             <a:solidFill>
-              <a:srgbClr val="F85149"/>
+              <a:srgbClr val="C4605B"/>
             </a:solidFill>
             <a:prstDash val="solid"/>
           </a:ln>
@@ -13191,13 +13326,13 @@
             <a:r>
               <a:rPr lang="en-US" sz="1050" b="1" dirty="0">
                 <a:solidFill>
-                  <a:srgbClr val="F85149"/>
-                </a:solidFill>
-                <a:latin typeface="Calibri" pitchFamily="34" charset="0"/>
-                <a:ea typeface="Calibri" pitchFamily="34" charset="-122"/>
-                <a:cs typeface="Calibri" pitchFamily="34" charset="-120"/>
-              </a:rPr>
-              <a:t>🔥  每台機器設定各不相同、環境飄移 — 部署靠手動 SSH，每次都是一場冒險</a:t>
+                  <a:srgbClr val="C4605B"/>
+                </a:solidFill>
+                <a:latin typeface="Calibri" pitchFamily="34" charset="0"/>
+                <a:ea typeface="Calibri" pitchFamily="34" charset="-122"/>
+                <a:cs typeface="Calibri" pitchFamily="34" charset="-120"/>
+              </a:rPr>
+              <a:t>🔥  Each machine configured differently, environments drift — deployment via manual SSH, every release is a gamble</a:t>
             </a:r>
             <a:endParaRPr lang="en-US" sz="1050" dirty="0"/>
           </a:p>
@@ -13220,11 +13355,11 @@
             </a:avLst>
           </a:prstGeom>
           <a:solidFill>
-            <a:srgbClr val="3D1515"/>
+            <a:srgbClr val="F8ECEC"/>
           </a:solidFill>
           <a:ln w="6350">
             <a:solidFill>
-              <a:srgbClr val="F85149"/>
+              <a:srgbClr val="C4605B"/>
             </a:solidFill>
             <a:prstDash val="solid"/>
           </a:ln>
@@ -13257,13 +13392,13 @@
             <a:r>
               <a:rPr lang="en-US" sz="750" dirty="0">
                 <a:solidFill>
-                  <a:srgbClr val="F85149"/>
-                </a:solidFill>
-                <a:latin typeface="Calibri" pitchFamily="34" charset="0"/>
-                <a:ea typeface="Calibri" pitchFamily="34" charset="-122"/>
-                <a:cs typeface="Calibri" pitchFamily="34" charset="-120"/>
-              </a:rPr>
-              <a:t>環境不一致</a:t>
+                  <a:srgbClr val="C4605B"/>
+                </a:solidFill>
+                <a:latin typeface="Calibri" pitchFamily="34" charset="0"/>
+                <a:ea typeface="Calibri" pitchFamily="34" charset="-122"/>
+                <a:cs typeface="Calibri" pitchFamily="34" charset="-120"/>
+              </a:rPr>
+              <a:t>Env Inconsistency</a:t>
             </a:r>
             <a:endParaRPr lang="en-US" sz="750" dirty="0"/>
           </a:p>
@@ -13286,11 +13421,11 @@
             </a:avLst>
           </a:prstGeom>
           <a:solidFill>
-            <a:srgbClr val="3D1515"/>
+            <a:srgbClr val="F8ECEC"/>
           </a:solidFill>
           <a:ln w="6350">
             <a:solidFill>
-              <a:srgbClr val="F85149"/>
+              <a:srgbClr val="C4605B"/>
             </a:solidFill>
             <a:prstDash val="solid"/>
           </a:ln>
@@ -13323,13 +13458,13 @@
             <a:r>
               <a:rPr lang="en-US" sz="750" dirty="0">
                 <a:solidFill>
-                  <a:srgbClr val="F85149"/>
-                </a:solidFill>
-                <a:latin typeface="Calibri" pitchFamily="34" charset="0"/>
-                <a:ea typeface="Calibri" pitchFamily="34" charset="-122"/>
-                <a:cs typeface="Calibri" pitchFamily="34" charset="-120"/>
-              </a:rPr>
-              <a:t>設定漂移</a:t>
+                  <a:srgbClr val="C4605B"/>
+                </a:solidFill>
+                <a:latin typeface="Calibri" pitchFamily="34" charset="0"/>
+                <a:ea typeface="Calibri" pitchFamily="34" charset="-122"/>
+                <a:cs typeface="Calibri" pitchFamily="34" charset="-120"/>
+              </a:rPr>
+              <a:t>Config Drift</a:t>
             </a:r>
             <a:endParaRPr lang="en-US" sz="750" dirty="0"/>
           </a:p>
@@ -13352,11 +13487,11 @@
             </a:avLst>
           </a:prstGeom>
           <a:solidFill>
-            <a:srgbClr val="3D1515"/>
+            <a:srgbClr val="F8ECEC"/>
           </a:solidFill>
           <a:ln w="6350">
             <a:solidFill>
-              <a:srgbClr val="F85149"/>
+              <a:srgbClr val="C4605B"/>
             </a:solidFill>
             <a:prstDash val="solid"/>
           </a:ln>
@@ -13389,13 +13524,13 @@
             <a:r>
               <a:rPr lang="en-US" sz="750" dirty="0">
                 <a:solidFill>
-                  <a:srgbClr val="F85149"/>
-                </a:solidFill>
-                <a:latin typeface="Calibri" pitchFamily="34" charset="0"/>
-                <a:ea typeface="Calibri" pitchFamily="34" charset="-122"/>
-                <a:cs typeface="Calibri" pitchFamily="34" charset="-120"/>
-              </a:rPr>
-              <a:t>更新困難</a:t>
+                  <a:srgbClr val="C4605B"/>
+                </a:solidFill>
+                <a:latin typeface="Calibri" pitchFamily="34" charset="0"/>
+                <a:ea typeface="Calibri" pitchFamily="34" charset="-122"/>
+                <a:cs typeface="Calibri" pitchFamily="34" charset="-120"/>
+              </a:rPr>
+              <a:t>Painful Updates</a:t>
             </a:r>
             <a:endParaRPr lang="en-US" sz="750" dirty="0"/>
           </a:p>
@@ -13415,7 +13550,7 @@
     <p:bg>
       <p:bgPr>
         <a:solidFill>
-          <a:srgbClr val="0D1117"/>
+          <a:srgbClr val="FFFDF8"/>
         </a:solidFill>
       </p:bgPr>
     </p:bg>
@@ -13448,11 +13583,11 @@
             <a:avLst/>
           </a:prstGeom>
           <a:solidFill>
-            <a:srgbClr val="161B22"/>
+            <a:srgbClr val="F5F1EB"/>
           </a:solidFill>
           <a:ln w="6350">
             <a:solidFill>
-              <a:srgbClr val="30363D"/>
+              <a:srgbClr val="D6CCBF"/>
             </a:solidFill>
             <a:prstDash val="solid"/>
           </a:ln>
@@ -13473,11 +13608,11 @@
             <a:avLst/>
           </a:prstGeom>
           <a:solidFill>
-            <a:srgbClr val="F85149"/>
+            <a:srgbClr val="C4605B"/>
           </a:solidFill>
           <a:ln w="12700">
             <a:solidFill>
-              <a:srgbClr val="F85149"/>
+              <a:srgbClr val="C4605B"/>
             </a:solidFill>
             <a:prstDash val="solid"/>
           </a:ln>
@@ -13510,13 +13645,13 @@
             <a:r>
               <a:rPr lang="en-US" sz="1600" b="1" dirty="0">
                 <a:solidFill>
-                  <a:srgbClr val="E6EDF3"/>
-                </a:solidFill>
-                <a:latin typeface="Calibri" pitchFamily="34" charset="0"/>
-                <a:ea typeface="Calibri" pitchFamily="34" charset="-122"/>
-                <a:cs typeface="Calibri" pitchFamily="34" charset="-120"/>
-              </a:rPr>
-              <a:t>部署惡夢：維運複雜度爆炸</a:t>
+                  <a:srgbClr val="2D2926"/>
+                </a:solidFill>
+                <a:latin typeface="Calibri" pitchFamily="34" charset="0"/>
+                <a:ea typeface="Calibri" pitchFamily="34" charset="-122"/>
+                <a:cs typeface="Calibri" pitchFamily="34" charset="-120"/>
+              </a:rPr>
+              <a:t>Deployment Nightmare: Operations Complexity Explosion</a:t>
             </a:r>
             <a:endParaRPr lang="en-US" sz="1600" dirty="0"/>
           </a:p>
@@ -13549,13 +13684,13 @@
             <a:r>
               <a:rPr lang="en-US" sz="850" dirty="0">
                 <a:solidFill>
-                  <a:srgbClr val="8B949E"/>
-                </a:solidFill>
-                <a:latin typeface="Calibri" pitchFamily="34" charset="0"/>
-                <a:ea typeface="Calibri" pitchFamily="34" charset="-122"/>
-                <a:cs typeface="Calibri" pitchFamily="34" charset="-120"/>
-              </a:rPr>
-              <a:t>PART 2  ·  19 / 50</a:t>
+                  <a:srgbClr val="8A8078"/>
+                </a:solidFill>
+                <a:latin typeface="Calibri" pitchFamily="34" charset="0"/>
+                <a:ea typeface="Calibri" pitchFamily="34" charset="-122"/>
+                <a:cs typeface="Calibri" pitchFamily="34" charset="-120"/>
+              </a:rPr>
+              <a:t>PART 2</a:t>
             </a:r>
             <a:endParaRPr lang="en-US" sz="850" dirty="0"/>
           </a:p>
@@ -13578,11 +13713,11 @@
             </a:avLst>
           </a:prstGeom>
           <a:solidFill>
-            <a:srgbClr val="2A0F0F"/>
+            <a:srgbClr val="F8ECEC"/>
           </a:solidFill>
           <a:ln w="15240">
             <a:solidFill>
-              <a:srgbClr val="F85149"/>
+              <a:srgbClr val="C4605B"/>
             </a:solidFill>
             <a:prstDash val="solid"/>
           </a:ln>
@@ -13658,13 +13793,13 @@
             <a:r>
               <a:rPr lang="en-US" sz="1400" b="1" dirty="0">
                 <a:solidFill>
-                  <a:srgbClr val="F85149"/>
-                </a:solidFill>
-                <a:latin typeface="Calibri" pitchFamily="34" charset="0"/>
-                <a:ea typeface="Calibri" pitchFamily="34" charset="-122"/>
-                <a:cs typeface="Calibri" pitchFamily="34" charset="-120"/>
-              </a:rPr>
-              <a:t>環境不一致</a:t>
+                  <a:srgbClr val="C4605B"/>
+                </a:solidFill>
+                <a:latin typeface="Calibri" pitchFamily="34" charset="0"/>
+                <a:ea typeface="Calibri" pitchFamily="34" charset="-122"/>
+                <a:cs typeface="Calibri" pitchFamily="34" charset="-120"/>
+              </a:rPr>
+              <a:t>Environment Inconsistency</a:t>
             </a:r>
             <a:endParaRPr lang="en-US" sz="1400" dirty="0"/>
           </a:p>
@@ -13697,7 +13832,7 @@
             <a:r>
               <a:rPr lang="en-US" sz="1050" dirty="0">
                 <a:solidFill>
-                  <a:srgbClr val="E6EDF3"/>
+                  <a:srgbClr val="2D2926"/>
                 </a:solidFill>
                 <a:latin typeface="Calibri" pitchFamily="34" charset="0"/>
                 <a:ea typeface="Calibri" pitchFamily="34" charset="-122"/>
@@ -13736,7 +13871,7 @@
             <a:r>
               <a:rPr lang="en-US" sz="1050" dirty="0">
                 <a:solidFill>
-                  <a:srgbClr val="E6EDF3"/>
+                  <a:srgbClr val="2D2926"/>
                 </a:solidFill>
                 <a:latin typeface="Calibri" pitchFamily="34" charset="0"/>
                 <a:ea typeface="Calibri" pitchFamily="34" charset="-122"/>
@@ -13775,7 +13910,7 @@
             <a:r>
               <a:rPr lang="en-US" sz="1050" dirty="0">
                 <a:solidFill>
-                  <a:srgbClr val="E6EDF3"/>
+                  <a:srgbClr val="2D2926"/>
                 </a:solidFill>
                 <a:latin typeface="Calibri" pitchFamily="34" charset="0"/>
                 <a:ea typeface="Calibri" pitchFamily="34" charset="-122"/>
@@ -13814,13 +13949,13 @@
             <a:r>
               <a:rPr lang="en-US" sz="1050" dirty="0">
                 <a:solidFill>
-                  <a:srgbClr val="E6EDF3"/>
-                </a:solidFill>
-                <a:latin typeface="Calibri" pitchFamily="34" charset="0"/>
-                <a:ea typeface="Calibri" pitchFamily="34" charset="-122"/>
-                <a:cs typeface="Calibri" pitchFamily="34" charset="-120"/>
-              </a:rPr>
-              <a:t>• 「在我這裡可以跑！」</a:t>
+                  <a:srgbClr val="2D2926"/>
+                </a:solidFill>
+                <a:latin typeface="Calibri" pitchFamily="34" charset="0"/>
+                <a:ea typeface="Calibri" pitchFamily="34" charset="-122"/>
+                <a:cs typeface="Calibri" pitchFamily="34" charset="-120"/>
+              </a:rPr>
+              <a:t>• "It works on my machine!"</a:t>
             </a:r>
             <a:endParaRPr lang="en-US" sz="1050" dirty="0"/>
           </a:p>
@@ -13843,11 +13978,11 @@
             </a:avLst>
           </a:prstGeom>
           <a:solidFill>
-            <a:srgbClr val="2A0F0F"/>
+            <a:srgbClr val="F8ECEC"/>
           </a:solidFill>
           <a:ln w="15240">
             <a:solidFill>
-              <a:srgbClr val="F85149"/>
+              <a:srgbClr val="C4605B"/>
             </a:solidFill>
             <a:prstDash val="solid"/>
           </a:ln>
@@ -13923,13 +14058,13 @@
             <a:r>
               <a:rPr lang="en-US" sz="1400" b="1" dirty="0">
                 <a:solidFill>
-                  <a:srgbClr val="F85149"/>
-                </a:solidFill>
-                <a:latin typeface="Calibri" pitchFamily="34" charset="0"/>
-                <a:ea typeface="Calibri" pitchFamily="34" charset="-122"/>
-                <a:cs typeface="Calibri" pitchFamily="34" charset="-120"/>
-              </a:rPr>
-              <a:t>更新困難</a:t>
+                  <a:srgbClr val="C4605B"/>
+                </a:solidFill>
+                <a:latin typeface="Calibri" pitchFamily="34" charset="0"/>
+                <a:ea typeface="Calibri" pitchFamily="34" charset="-122"/>
+                <a:cs typeface="Calibri" pitchFamily="34" charset="-120"/>
+              </a:rPr>
+              <a:t>Difficult Updates</a:t>
             </a:r>
             <a:endParaRPr lang="en-US" sz="1400" dirty="0"/>
           </a:p>
@@ -13962,13 +14097,13 @@
             <a:r>
               <a:rPr lang="en-US" sz="1050" dirty="0">
                 <a:solidFill>
-                  <a:srgbClr val="E6EDF3"/>
-                </a:solidFill>
-                <a:latin typeface="Calibri" pitchFamily="34" charset="0"/>
-                <a:ea typeface="Calibri" pitchFamily="34" charset="-122"/>
-                <a:cs typeface="Calibri" pitchFamily="34" charset="-120"/>
-              </a:rPr>
-              <a:t>• 15台機器逐一SSH更新</a:t>
+                  <a:srgbClr val="2D2926"/>
+                </a:solidFill>
+                <a:latin typeface="Calibri" pitchFamily="34" charset="0"/>
+                <a:ea typeface="Calibri" pitchFamily="34" charset="-122"/>
+                <a:cs typeface="Calibri" pitchFamily="34" charset="-120"/>
+              </a:rPr>
+              <a:t>• SSH into 15 machines one by one</a:t>
             </a:r>
             <a:endParaRPr lang="en-US" sz="1050" dirty="0"/>
           </a:p>
@@ -14001,13 +14136,13 @@
             <a:r>
               <a:rPr lang="en-US" sz="1050" dirty="0">
                 <a:solidFill>
-                  <a:srgbClr val="E6EDF3"/>
-                </a:solidFill>
-                <a:latin typeface="Calibri" pitchFamily="34" charset="0"/>
-                <a:ea typeface="Calibri" pitchFamily="34" charset="-122"/>
-                <a:cs typeface="Calibri" pitchFamily="34" charset="-120"/>
-              </a:rPr>
-              <a:t>• 更新中失敗 → 版本不一致</a:t>
+                  <a:srgbClr val="2D2926"/>
+                </a:solidFill>
+                <a:latin typeface="Calibri" pitchFamily="34" charset="0"/>
+                <a:ea typeface="Calibri" pitchFamily="34" charset="-122"/>
+                <a:cs typeface="Calibri" pitchFamily="34" charset="-120"/>
+              </a:rPr>
+              <a:t>• Mid-update failure → version mismatch</a:t>
             </a:r>
             <a:endParaRPr lang="en-US" sz="1050" dirty="0"/>
           </a:p>
@@ -14040,13 +14175,13 @@
             <a:r>
               <a:rPr lang="en-US" sz="1050" dirty="0">
                 <a:solidFill>
-                  <a:srgbClr val="E6EDF3"/>
-                </a:solidFill>
-                <a:latin typeface="Calibri" pitchFamily="34" charset="0"/>
-                <a:ea typeface="Calibri" pitchFamily="34" charset="-122"/>
-                <a:cs typeface="Calibri" pitchFamily="34" charset="-120"/>
-              </a:rPr>
-              <a:t>• 需要停機維護窗口</a:t>
+                  <a:srgbClr val="2D2926"/>
+                </a:solidFill>
+                <a:latin typeface="Calibri" pitchFamily="34" charset="0"/>
+                <a:ea typeface="Calibri" pitchFamily="34" charset="-122"/>
+                <a:cs typeface="Calibri" pitchFamily="34" charset="-120"/>
+              </a:rPr>
+              <a:t>• Requires maintenance downtime window</a:t>
             </a:r>
             <a:endParaRPr lang="en-US" sz="1050" dirty="0"/>
           </a:p>
@@ -14079,13 +14214,13 @@
             <a:r>
               <a:rPr lang="en-US" sz="1050" dirty="0">
                 <a:solidFill>
-                  <a:srgbClr val="E6EDF3"/>
-                </a:solidFill>
-                <a:latin typeface="Calibri" pitchFamily="34" charset="0"/>
-                <a:ea typeface="Calibri" pitchFamily="34" charset="-122"/>
-                <a:cs typeface="Calibri" pitchFamily="34" charset="-120"/>
-              </a:rPr>
-              <a:t>• 每次部署都提心吊膽</a:t>
+                  <a:srgbClr val="2D2926"/>
+                </a:solidFill>
+                <a:latin typeface="Calibri" pitchFamily="34" charset="0"/>
+                <a:ea typeface="Calibri" pitchFamily="34" charset="-122"/>
+                <a:cs typeface="Calibri" pitchFamily="34" charset="-120"/>
+              </a:rPr>
+              <a:t>• Every deployment is nerve-wracking</a:t>
             </a:r>
             <a:endParaRPr lang="en-US" sz="1050" dirty="0"/>
           </a:p>
@@ -14108,11 +14243,11 @@
             </a:avLst>
           </a:prstGeom>
           <a:solidFill>
-            <a:srgbClr val="2A0F0F"/>
+            <a:srgbClr val="F8ECEC"/>
           </a:solidFill>
           <a:ln w="15240">
             <a:solidFill>
-              <a:srgbClr val="F85149"/>
+              <a:srgbClr val="C4605B"/>
             </a:solidFill>
             <a:prstDash val="solid"/>
           </a:ln>
@@ -14188,13 +14323,13 @@
             <a:r>
               <a:rPr lang="en-US" sz="1400" b="1" dirty="0">
                 <a:solidFill>
-                  <a:srgbClr val="F85149"/>
-                </a:solidFill>
-                <a:latin typeface="Calibri" pitchFamily="34" charset="0"/>
-                <a:ea typeface="Calibri" pitchFamily="34" charset="-122"/>
-                <a:cs typeface="Calibri" pitchFamily="34" charset="-120"/>
-              </a:rPr>
-              <a:t>設定管理混亂</a:t>
+                  <a:srgbClr val="C4605B"/>
+                </a:solidFill>
+                <a:latin typeface="Calibri" pitchFamily="34" charset="0"/>
+                <a:ea typeface="Calibri" pitchFamily="34" charset="-122"/>
+                <a:cs typeface="Calibri" pitchFamily="34" charset="-120"/>
+              </a:rPr>
+              <a:t>Config Management Chaos</a:t>
             </a:r>
             <a:endParaRPr lang="en-US" sz="1400" dirty="0"/>
           </a:p>
@@ -14227,13 +14362,13 @@
             <a:r>
               <a:rPr lang="en-US" sz="1050" dirty="0">
                 <a:solidFill>
-                  <a:srgbClr val="E6EDF3"/>
-                </a:solidFill>
-                <a:latin typeface="Calibri" pitchFamily="34" charset="0"/>
-                <a:ea typeface="Calibri" pitchFamily="34" charset="-122"/>
-                <a:cs typeface="Calibri" pitchFamily="34" charset="-120"/>
-              </a:rPr>
-              <a:t>• DB密碼寫死在程式碼</a:t>
+                  <a:srgbClr val="2D2926"/>
+                </a:solidFill>
+                <a:latin typeface="Calibri" pitchFamily="34" charset="0"/>
+                <a:ea typeface="Calibri" pitchFamily="34" charset="-122"/>
+                <a:cs typeface="Calibri" pitchFamily="34" charset="-120"/>
+              </a:rPr>
+              <a:t>• DB passwords hardcoded in source</a:t>
             </a:r>
             <a:endParaRPr lang="en-US" sz="1050" dirty="0"/>
           </a:p>
@@ -14266,13 +14401,13 @@
             <a:r>
               <a:rPr lang="en-US" sz="1050" dirty="0">
                 <a:solidFill>
-                  <a:srgbClr val="E6EDF3"/>
-                </a:solidFill>
-                <a:latin typeface="Calibri" pitchFamily="34" charset="0"/>
-                <a:ea typeface="Calibri" pitchFamily="34" charset="-122"/>
-                <a:cs typeface="Calibri" pitchFamily="34" charset="-120"/>
-              </a:rPr>
-              <a:t>• 各機器設定微妙不同</a:t>
+                  <a:srgbClr val="2D2926"/>
+                </a:solidFill>
+                <a:latin typeface="Calibri" pitchFamily="34" charset="0"/>
+                <a:ea typeface="Calibri" pitchFamily="34" charset="-122"/>
+                <a:cs typeface="Calibri" pitchFamily="34" charset="-120"/>
+              </a:rPr>
+              <a:t>• Each machine's config subtly differs</a:t>
             </a:r>
             <a:endParaRPr lang="en-US" sz="1050" dirty="0"/>
           </a:p>
@@ -14305,13 +14440,13 @@
             <a:r>
               <a:rPr lang="en-US" sz="1050" dirty="0">
                 <a:solidFill>
-                  <a:srgbClr val="E6EDF3"/>
-                </a:solidFill>
-                <a:latin typeface="Calibri" pitchFamily="34" charset="0"/>
-                <a:ea typeface="Calibri" pitchFamily="34" charset="-122"/>
-                <a:cs typeface="Calibri" pitchFamily="34" charset="-120"/>
-              </a:rPr>
-              <a:t>• 沒有版本控管</a:t>
+                  <a:srgbClr val="2D2926"/>
+                </a:solidFill>
+                <a:latin typeface="Calibri" pitchFamily="34" charset="0"/>
+                <a:ea typeface="Calibri" pitchFamily="34" charset="-122"/>
+                <a:cs typeface="Calibri" pitchFamily="34" charset="-120"/>
+              </a:rPr>
+              <a:t>• No version control for configs</a:t>
             </a:r>
             <a:endParaRPr lang="en-US" sz="1050" dirty="0"/>
           </a:p>
@@ -14344,13 +14479,13 @@
             <a:r>
               <a:rPr lang="en-US" sz="1050" dirty="0">
                 <a:solidFill>
-                  <a:srgbClr val="E6EDF3"/>
-                </a:solidFill>
-                <a:latin typeface="Calibri" pitchFamily="34" charset="0"/>
-                <a:ea typeface="Calibri" pitchFamily="34" charset="-122"/>
-                <a:cs typeface="Calibri" pitchFamily="34" charset="-120"/>
-              </a:rPr>
-              <a:t>• 新人入職需一週搞懂</a:t>
+                  <a:srgbClr val="2D2926"/>
+                </a:solidFill>
+                <a:latin typeface="Calibri" pitchFamily="34" charset="0"/>
+                <a:ea typeface="Calibri" pitchFamily="34" charset="-122"/>
+                <a:cs typeface="Calibri" pitchFamily="34" charset="-120"/>
+              </a:rPr>
+              <a:t>• New hires need a week to understand</a:t>
             </a:r>
             <a:endParaRPr lang="en-US" sz="1050" dirty="0"/>
           </a:p>
@@ -14373,11 +14508,11 @@
             </a:avLst>
           </a:prstGeom>
           <a:solidFill>
-            <a:srgbClr val="2A0F0F"/>
+            <a:srgbClr val="F8ECEC"/>
           </a:solidFill>
           <a:ln w="15240">
             <a:solidFill>
-              <a:srgbClr val="F85149"/>
+              <a:srgbClr val="C4605B"/>
             </a:solidFill>
             <a:prstDash val="solid"/>
           </a:ln>
@@ -14453,13 +14588,13 @@
             <a:r>
               <a:rPr lang="en-US" sz="1400" b="1" dirty="0">
                 <a:solidFill>
-                  <a:srgbClr val="F85149"/>
-                </a:solidFill>
-                <a:latin typeface="Calibri" pitchFamily="34" charset="0"/>
-                <a:ea typeface="Calibri" pitchFamily="34" charset="-122"/>
-                <a:cs typeface="Calibri" pitchFamily="34" charset="-120"/>
-              </a:rPr>
-              <a:t>Dev/Prod 落差</a:t>
+                  <a:srgbClr val="C4605B"/>
+                </a:solidFill>
+                <a:latin typeface="Calibri" pitchFamily="34" charset="0"/>
+                <a:ea typeface="Calibri" pitchFamily="34" charset="-122"/>
+                <a:cs typeface="Calibri" pitchFamily="34" charset="-120"/>
+              </a:rPr>
+              <a:t>Dev/Prod Gap</a:t>
             </a:r>
             <a:endParaRPr lang="en-US" sz="1400" dirty="0"/>
           </a:p>
@@ -14492,13 +14627,13 @@
             <a:r>
               <a:rPr lang="en-US" sz="1050" dirty="0">
                 <a:solidFill>
-                  <a:srgbClr val="E6EDF3"/>
-                </a:solidFill>
-                <a:latin typeface="Calibri" pitchFamily="34" charset="0"/>
-                <a:ea typeface="Calibri" pitchFamily="34" charset="-122"/>
-                <a:cs typeface="Calibri" pitchFamily="34" charset="-120"/>
-              </a:rPr>
-              <a:t>• Dev本機 vs 15台Prod</a:t>
+                  <a:srgbClr val="2D2926"/>
+                </a:solidFill>
+                <a:latin typeface="Calibri" pitchFamily="34" charset="0"/>
+                <a:ea typeface="Calibri" pitchFamily="34" charset="-122"/>
+                <a:cs typeface="Calibri" pitchFamily="34" charset="-120"/>
+              </a:rPr>
+              <a:t>• Local dev vs 15 prod machines</a:t>
             </a:r>
             <a:endParaRPr lang="en-US" sz="1050" dirty="0"/>
           </a:p>
@@ -14531,13 +14666,13 @@
             <a:r>
               <a:rPr lang="en-US" sz="1050" dirty="0">
                 <a:solidFill>
-                  <a:srgbClr val="E6EDF3"/>
-                </a:solidFill>
-                <a:latin typeface="Calibri" pitchFamily="34" charset="0"/>
-                <a:ea typeface="Calibri" pitchFamily="34" charset="-122"/>
-                <a:cs typeface="Calibri" pitchFamily="34" charset="-120"/>
-              </a:rPr>
-              <a:t>• 本機測試通過 → Prod爆炸</a:t>
+                  <a:srgbClr val="2D2926"/>
+                </a:solidFill>
+                <a:latin typeface="Calibri" pitchFamily="34" charset="0"/>
+                <a:ea typeface="Calibri" pitchFamily="34" charset="-122"/>
+                <a:cs typeface="Calibri" pitchFamily="34" charset="-120"/>
+              </a:rPr>
+              <a:t>• Passes locally → blows up in prod</a:t>
             </a:r>
             <a:endParaRPr lang="en-US" sz="1050" dirty="0"/>
           </a:p>
@@ -14570,13 +14705,13 @@
             <a:r>
               <a:rPr lang="en-US" sz="1050" dirty="0">
                 <a:solidFill>
-                  <a:srgbClr val="E6EDF3"/>
-                </a:solidFill>
-                <a:latin typeface="Calibri" pitchFamily="34" charset="0"/>
-                <a:ea typeface="Calibri" pitchFamily="34" charset="-122"/>
-                <a:cs typeface="Calibri" pitchFamily="34" charset="-120"/>
-              </a:rPr>
-              <a:t>• 「It works on my machine」</a:t>
+                  <a:srgbClr val="2D2926"/>
+                </a:solidFill>
+                <a:latin typeface="Calibri" pitchFamily="34" charset="0"/>
+                <a:ea typeface="Calibri" pitchFamily="34" charset="-122"/>
+                <a:cs typeface="Calibri" pitchFamily="34" charset="-120"/>
+              </a:rPr>
+              <a:t>• "It works on my machine"</a:t>
             </a:r>
             <a:endParaRPr lang="en-US" sz="1050" dirty="0"/>
           </a:p>
@@ -14609,13 +14744,13 @@
             <a:r>
               <a:rPr lang="en-US" sz="1050" dirty="0">
                 <a:solidFill>
-                  <a:srgbClr val="E6EDF3"/>
-                </a:solidFill>
-                <a:latin typeface="Calibri" pitchFamily="34" charset="0"/>
-                <a:ea typeface="Calibri" pitchFamily="34" charset="-122"/>
-                <a:cs typeface="Calibri" pitchFamily="34" charset="-120"/>
-              </a:rPr>
-              <a:t>• 除錯難度 ×10</a:t>
+                  <a:srgbClr val="2D2926"/>
+                </a:solidFill>
+                <a:latin typeface="Calibri" pitchFamily="34" charset="0"/>
+                <a:ea typeface="Calibri" pitchFamily="34" charset="-122"/>
+                <a:cs typeface="Calibri" pitchFamily="34" charset="-120"/>
+              </a:rPr>
+              <a:t>• Debugging difficulty ×10</a:t>
             </a:r>
             <a:endParaRPr lang="en-US" sz="1050" dirty="0"/>
           </a:p>
@@ -14635,7 +14770,7 @@
     <p:bg>
       <p:bgPr>
         <a:solidFill>
-          <a:srgbClr val="0D1117"/>
+          <a:srgbClr val="FFFDF8"/>
         </a:solidFill>
       </p:bgPr>
     </p:bg>
@@ -14668,11 +14803,11 @@
             <a:avLst/>
           </a:prstGeom>
           <a:solidFill>
-            <a:srgbClr val="161B22"/>
+            <a:srgbClr val="F5F1EB"/>
           </a:solidFill>
           <a:ln w="6350">
             <a:solidFill>
-              <a:srgbClr val="30363D"/>
+              <a:srgbClr val="D6CCBF"/>
             </a:solidFill>
             <a:prstDash val="solid"/>
           </a:ln>
@@ -14693,11 +14828,11 @@
             <a:avLst/>
           </a:prstGeom>
           <a:solidFill>
-            <a:srgbClr val="6E40C9"/>
+            <a:srgbClr val="8B6AB5"/>
           </a:solidFill>
           <a:ln w="12700">
             <a:solidFill>
-              <a:srgbClr val="6E40C9"/>
+              <a:srgbClr val="8B6AB5"/>
             </a:solidFill>
             <a:prstDash val="solid"/>
           </a:ln>
@@ -14730,13 +14865,13 @@
             <a:r>
               <a:rPr lang="en-US" sz="1600" b="1" dirty="0">
                 <a:solidFill>
-                  <a:srgbClr val="E6EDF3"/>
-                </a:solidFill>
-                <a:latin typeface="Calibri" pitchFamily="34" charset="0"/>
-                <a:ea typeface="Calibri" pitchFamily="34" charset="-122"/>
-                <a:cs typeface="Calibri" pitchFamily="34" charset="-120"/>
-              </a:rPr>
-              <a:t>Part 2 小結：問題累積，需要新思維</a:t>
+                  <a:srgbClr val="2D2926"/>
+                </a:solidFill>
+                <a:latin typeface="Calibri" pitchFamily="34" charset="0"/>
+                <a:ea typeface="Calibri" pitchFamily="34" charset="-122"/>
+                <a:cs typeface="Calibri" pitchFamily="34" charset="-120"/>
+              </a:rPr>
+              <a:t>Part 2 Summary: Problems Accumulate, Need New Thinking</a:t>
             </a:r>
             <a:endParaRPr lang="en-US" sz="1600" dirty="0"/>
           </a:p>
@@ -14769,13 +14904,13 @@
             <a:r>
               <a:rPr lang="en-US" sz="850" dirty="0">
                 <a:solidFill>
-                  <a:srgbClr val="8B949E"/>
-                </a:solidFill>
-                <a:latin typeface="Calibri" pitchFamily="34" charset="0"/>
-                <a:ea typeface="Calibri" pitchFamily="34" charset="-122"/>
-                <a:cs typeface="Calibri" pitchFamily="34" charset="-120"/>
-              </a:rPr>
-              <a:t>PART 2  ·  20 / 50</a:t>
+                  <a:srgbClr val="8A8078"/>
+                </a:solidFill>
+                <a:latin typeface="Calibri" pitchFamily="34" charset="0"/>
+                <a:ea typeface="Calibri" pitchFamily="34" charset="-122"/>
+                <a:cs typeface="Calibri" pitchFamily="34" charset="-120"/>
+              </a:rPr>
+              <a:t>PART 2</a:t>
             </a:r>
             <a:endParaRPr lang="en-US" sz="850" dirty="0"/>
           </a:p>
@@ -14798,11 +14933,11 @@
             </a:avLst>
           </a:prstGeom>
           <a:solidFill>
-            <a:srgbClr val="1C2128"/>
+            <a:srgbClr val="ECE6DD"/>
           </a:solidFill>
           <a:ln w="6350">
             <a:solidFill>
-              <a:srgbClr val="30363D"/>
+              <a:srgbClr val="D6CCBF"/>
             </a:solidFill>
             <a:prstDash val="solid"/>
           </a:ln>
@@ -14835,13 +14970,13 @@
             <a:r>
               <a:rPr lang="en-US" sz="1000" b="1" dirty="0">
                 <a:solidFill>
-                  <a:srgbClr val="8B949E"/>
-                </a:solidFill>
-                <a:latin typeface="Calibri" pitchFamily="34" charset="0"/>
-                <a:ea typeface="Calibri" pitchFamily="34" charset="-122"/>
-                <a:cs typeface="Calibri" pitchFamily="34" charset="-120"/>
-              </a:rPr>
-              <a:t>技術</a:t>
+                  <a:srgbClr val="8A8078"/>
+                </a:solidFill>
+                <a:latin typeface="Calibri" pitchFamily="34" charset="0"/>
+                <a:ea typeface="Calibri" pitchFamily="34" charset="-122"/>
+                <a:cs typeface="Calibri" pitchFamily="34" charset="-120"/>
+              </a:rPr>
+              <a:t>Technology</a:t>
             </a:r>
             <a:endParaRPr lang="en-US" sz="1000" dirty="0"/>
           </a:p>
@@ -14874,13 +15009,13 @@
             <a:r>
               <a:rPr lang="en-US" sz="1000" b="1" dirty="0">
                 <a:solidFill>
-                  <a:srgbClr val="8B949E"/>
-                </a:solidFill>
-                <a:latin typeface="Calibri" pitchFamily="34" charset="0"/>
-                <a:ea typeface="Calibri" pitchFamily="34" charset="-122"/>
-                <a:cs typeface="Calibri" pitchFamily="34" charset="-120"/>
-              </a:rPr>
-              <a:t>解決了什麼</a:t>
+                  <a:srgbClr val="8A8078"/>
+                </a:solidFill>
+                <a:latin typeface="Calibri" pitchFamily="34" charset="0"/>
+                <a:ea typeface="Calibri" pitchFamily="34" charset="-122"/>
+                <a:cs typeface="Calibri" pitchFamily="34" charset="-120"/>
+              </a:rPr>
+              <a:t>What It Solved</a:t>
             </a:r>
             <a:endParaRPr lang="en-US" sz="1000" dirty="0"/>
           </a:p>
@@ -14913,13 +15048,13 @@
             <a:r>
               <a:rPr lang="en-US" sz="1000" b="1" dirty="0">
                 <a:solidFill>
-                  <a:srgbClr val="8B949E"/>
-                </a:solidFill>
-                <a:latin typeface="Calibri" pitchFamily="34" charset="0"/>
-                <a:ea typeface="Calibri" pitchFamily="34" charset="-122"/>
-                <a:cs typeface="Calibri" pitchFamily="34" charset="-120"/>
-              </a:rPr>
-              <a:t>帶來的代價</a:t>
+                  <a:srgbClr val="8A8078"/>
+                </a:solidFill>
+                <a:latin typeface="Calibri" pitchFamily="34" charset="0"/>
+                <a:ea typeface="Calibri" pitchFamily="34" charset="-122"/>
+                <a:cs typeface="Calibri" pitchFamily="34" charset="-120"/>
+              </a:rPr>
+              <a:t>Cost Incurred</a:t>
             </a:r>
             <a:endParaRPr lang="en-US" sz="1000" dirty="0"/>
           </a:p>
@@ -14942,11 +15077,11 @@
             </a:avLst>
           </a:prstGeom>
           <a:solidFill>
-            <a:srgbClr val="161B22"/>
+            <a:srgbClr val="F5F1EB"/>
           </a:solidFill>
           <a:ln w="3810">
             <a:solidFill>
-              <a:srgbClr val="30363D"/>
+              <a:srgbClr val="D6CCBF"/>
             </a:solidFill>
             <a:prstDash val="solid"/>
           </a:ln>
@@ -14979,7 +15114,7 @@
             <a:r>
               <a:rPr lang="en-US" sz="1000" b="1" dirty="0">
                 <a:solidFill>
-                  <a:srgbClr val="E6EDF3"/>
+                  <a:srgbClr val="2D2926"/>
                 </a:solidFill>
                 <a:latin typeface="Calibri" pitchFamily="34" charset="0"/>
                 <a:ea typeface="Calibri" pitchFamily="34" charset="-122"/>
@@ -15018,13 +15153,13 @@
             <a:r>
               <a:rPr lang="en-US" sz="1000" dirty="0">
                 <a:solidFill>
-                  <a:srgbClr val="3FB950"/>
-                </a:solidFill>
-                <a:latin typeface="Calibri" pitchFamily="34" charset="0"/>
-                <a:ea typeface="Calibri" pitchFamily="34" charset="-122"/>
-                <a:cs typeface="Calibri" pitchFamily="34" charset="-120"/>
-              </a:rPr>
-              <a:t>流量分散、高可用</a:t>
+                  <a:srgbClr val="4A9968"/>
+                </a:solidFill>
+                <a:latin typeface="Calibri" pitchFamily="34" charset="0"/>
+                <a:ea typeface="Calibri" pitchFamily="34" charset="-122"/>
+                <a:cs typeface="Calibri" pitchFamily="34" charset="-120"/>
+              </a:rPr>
+              <a:t>Traffic distribution, HA</a:t>
             </a:r>
             <a:endParaRPr lang="en-US" sz="1000" dirty="0"/>
           </a:p>
@@ -15057,13 +15192,13 @@
             <a:r>
               <a:rPr lang="en-US" sz="1000" dirty="0">
                 <a:solidFill>
-                  <a:srgbClr val="D29922"/>
-                </a:solidFill>
-                <a:latin typeface="Calibri" pitchFamily="34" charset="0"/>
-                <a:ea typeface="Calibri" pitchFamily="34" charset="-122"/>
-                <a:cs typeface="Calibri" pitchFamily="34" charset="-120"/>
-              </a:rPr>
-              <a:t>Session 黏性問題</a:t>
+                  <a:srgbClr val="B8892C"/>
+                </a:solidFill>
+                <a:latin typeface="Calibri" pitchFamily="34" charset="0"/>
+                <a:ea typeface="Calibri" pitchFamily="34" charset="-122"/>
+                <a:cs typeface="Calibri" pitchFamily="34" charset="-120"/>
+              </a:rPr>
+              <a:t>Session stickiness issue</a:t>
             </a:r>
             <a:endParaRPr lang="en-US" sz="1000" dirty="0"/>
           </a:p>
@@ -15086,11 +15221,11 @@
             </a:avLst>
           </a:prstGeom>
           <a:solidFill>
-            <a:srgbClr val="0D1117"/>
+            <a:srgbClr val="FFFDF8"/>
           </a:solidFill>
           <a:ln w="3810">
             <a:solidFill>
-              <a:srgbClr val="30363D"/>
+              <a:srgbClr val="D6CCBF"/>
             </a:solidFill>
             <a:prstDash val="solid"/>
           </a:ln>
@@ -15123,7 +15258,7 @@
             <a:r>
               <a:rPr lang="en-US" sz="1000" b="1" dirty="0">
                 <a:solidFill>
-                  <a:srgbClr val="E6EDF3"/>
+                  <a:srgbClr val="2D2926"/>
                 </a:solidFill>
                 <a:latin typeface="Calibri" pitchFamily="34" charset="0"/>
                 <a:ea typeface="Calibri" pitchFamily="34" charset="-122"/>
@@ -15162,13 +15297,13 @@
             <a:r>
               <a:rPr lang="en-US" sz="1000" dirty="0">
                 <a:solidFill>
-                  <a:srgbClr val="3FB950"/>
-                </a:solidFill>
-                <a:latin typeface="Calibri" pitchFamily="34" charset="0"/>
-                <a:ea typeface="Calibri" pitchFamily="34" charset="-122"/>
-                <a:cs typeface="Calibri" pitchFamily="34" charset="-120"/>
-              </a:rPr>
-              <a:t>Stateless 實現</a:t>
+                  <a:srgbClr val="4A9968"/>
+                </a:solidFill>
+                <a:latin typeface="Calibri" pitchFamily="34" charset="0"/>
+                <a:ea typeface="Calibri" pitchFamily="34" charset="-122"/>
+                <a:cs typeface="Calibri" pitchFamily="34" charset="-120"/>
+              </a:rPr>
+              <a:t>Stateless achieved</a:t>
             </a:r>
             <a:endParaRPr lang="en-US" sz="1000" dirty="0"/>
           </a:p>
@@ -15201,13 +15336,13 @@
             <a:r>
               <a:rPr lang="en-US" sz="1000" dirty="0">
                 <a:solidFill>
-                  <a:srgbClr val="D29922"/>
-                </a:solidFill>
-                <a:latin typeface="Calibri" pitchFamily="34" charset="0"/>
-                <a:ea typeface="Calibri" pitchFamily="34" charset="-122"/>
-                <a:cs typeface="Calibri" pitchFamily="34" charset="-120"/>
-              </a:rPr>
-              <a:t>Redis 本身要 HA</a:t>
+                  <a:srgbClr val="B8892C"/>
+                </a:solidFill>
+                <a:latin typeface="Calibri" pitchFamily="34" charset="0"/>
+                <a:ea typeface="Calibri" pitchFamily="34" charset="-122"/>
+                <a:cs typeface="Calibri" pitchFamily="34" charset="-120"/>
+              </a:rPr>
+              <a:t>Redis itself needs HA</a:t>
             </a:r>
             <a:endParaRPr lang="en-US" sz="1000" dirty="0"/>
           </a:p>
@@ -15230,11 +15365,11 @@
             </a:avLst>
           </a:prstGeom>
           <a:solidFill>
-            <a:srgbClr val="161B22"/>
+            <a:srgbClr val="F5F1EB"/>
           </a:solidFill>
           <a:ln w="3810">
             <a:solidFill>
-              <a:srgbClr val="30363D"/>
+              <a:srgbClr val="D6CCBF"/>
             </a:solidFill>
             <a:prstDash val="solid"/>
           </a:ln>
@@ -15267,7 +15402,7 @@
             <a:r>
               <a:rPr lang="en-US" sz="1000" b="1" dirty="0">
                 <a:solidFill>
-                  <a:srgbClr val="E6EDF3"/>
+                  <a:srgbClr val="2D2926"/>
                 </a:solidFill>
                 <a:latin typeface="Calibri" pitchFamily="34" charset="0"/>
                 <a:ea typeface="Calibri" pitchFamily="34" charset="-122"/>
@@ -15306,13 +15441,13 @@
             <a:r>
               <a:rPr lang="en-US" sz="1000" dirty="0">
                 <a:solidFill>
-                  <a:srgbClr val="3FB950"/>
-                </a:solidFill>
-                <a:latin typeface="Calibri" pitchFamily="34" charset="0"/>
-                <a:ea typeface="Calibri" pitchFamily="34" charset="-122"/>
-                <a:cs typeface="Calibri" pitchFamily="34" charset="-120"/>
-              </a:rPr>
-              <a:t>讀取效能提升</a:t>
+                  <a:srgbClr val="4A9968"/>
+                </a:solidFill>
+                <a:latin typeface="Calibri" pitchFamily="34" charset="0"/>
+                <a:ea typeface="Calibri" pitchFamily="34" charset="-122"/>
+                <a:cs typeface="Calibri" pitchFamily="34" charset="-120"/>
+              </a:rPr>
+              <a:t>Read performance boost</a:t>
             </a:r>
             <a:endParaRPr lang="en-US" sz="1000" dirty="0"/>
           </a:p>
@@ -15345,7 +15480,7 @@
             <a:r>
               <a:rPr lang="en-US" sz="1000" dirty="0">
                 <a:solidFill>
-                  <a:srgbClr val="D29922"/>
+                  <a:srgbClr val="B8892C"/>
                 </a:solidFill>
                 <a:latin typeface="Calibri" pitchFamily="34" charset="0"/>
                 <a:ea typeface="Calibri" pitchFamily="34" charset="-122"/>
@@ -15374,11 +15509,11 @@
             </a:avLst>
           </a:prstGeom>
           <a:solidFill>
-            <a:srgbClr val="0D1117"/>
+            <a:srgbClr val="FFFDF8"/>
           </a:solidFill>
           <a:ln w="3810">
             <a:solidFill>
-              <a:srgbClr val="30363D"/>
+              <a:srgbClr val="D6CCBF"/>
             </a:solidFill>
             <a:prstDash val="solid"/>
           </a:ln>
@@ -15411,7 +15546,7 @@
             <a:r>
               <a:rPr lang="en-US" sz="1000" b="1" dirty="0">
                 <a:solidFill>
-                  <a:srgbClr val="E6EDF3"/>
+                  <a:srgbClr val="2D2926"/>
                 </a:solidFill>
                 <a:latin typeface="Calibri" pitchFamily="34" charset="0"/>
                 <a:ea typeface="Calibri" pitchFamily="34" charset="-122"/>
@@ -15450,13 +15585,13 @@
             <a:r>
               <a:rPr lang="en-US" sz="1000" dirty="0">
                 <a:solidFill>
-                  <a:srgbClr val="3FB950"/>
-                </a:solidFill>
-                <a:latin typeface="Calibri" pitchFamily="34" charset="0"/>
-                <a:ea typeface="Calibri" pitchFamily="34" charset="-122"/>
-                <a:cs typeface="Calibri" pitchFamily="34" charset="-120"/>
-              </a:rPr>
-              <a:t>效能大幅提升</a:t>
+                  <a:srgbClr val="4A9968"/>
+                </a:solidFill>
+                <a:latin typeface="Calibri" pitchFamily="34" charset="0"/>
+                <a:ea typeface="Calibri" pitchFamily="34" charset="-122"/>
+                <a:cs typeface="Calibri" pitchFamily="34" charset="-120"/>
+              </a:rPr>
+              <a:t>Major perf improvement</a:t>
             </a:r>
             <a:endParaRPr lang="en-US" sz="1000" dirty="0"/>
           </a:p>
@@ -15489,13 +15624,13 @@
             <a:r>
               <a:rPr lang="en-US" sz="1000" dirty="0">
                 <a:solidFill>
-                  <a:srgbClr val="D29922"/>
-                </a:solidFill>
-                <a:latin typeface="Calibri" pitchFamily="34" charset="0"/>
-                <a:ea typeface="Calibri" pitchFamily="34" charset="-122"/>
-                <a:cs typeface="Calibri" pitchFamily="34" charset="-120"/>
-              </a:rPr>
-              <a:t>快取失效複雜</a:t>
+                  <a:srgbClr val="B8892C"/>
+                </a:solidFill>
+                <a:latin typeface="Calibri" pitchFamily="34" charset="0"/>
+                <a:ea typeface="Calibri" pitchFamily="34" charset="-122"/>
+                <a:cs typeface="Calibri" pitchFamily="34" charset="-120"/>
+              </a:rPr>
+              <a:t>Cache invalidation complexity</a:t>
             </a:r>
             <a:endParaRPr lang="en-US" sz="1000" dirty="0"/>
           </a:p>
@@ -15518,11 +15653,11 @@
             </a:avLst>
           </a:prstGeom>
           <a:solidFill>
-            <a:srgbClr val="161B22"/>
+            <a:srgbClr val="F5F1EB"/>
           </a:solidFill>
           <a:ln w="3810">
             <a:solidFill>
-              <a:srgbClr val="30363D"/>
+              <a:srgbClr val="D6CCBF"/>
             </a:solidFill>
             <a:prstDash val="solid"/>
           </a:ln>
@@ -15555,7 +15690,7 @@
             <a:r>
               <a:rPr lang="en-US" sz="1000" b="1" dirty="0">
                 <a:solidFill>
-                  <a:srgbClr val="E6EDF3"/>
+                  <a:srgbClr val="2D2926"/>
                 </a:solidFill>
                 <a:latin typeface="Calibri" pitchFamily="34" charset="0"/>
                 <a:ea typeface="Calibri" pitchFamily="34" charset="-122"/>
@@ -15594,13 +15729,13 @@
             <a:r>
               <a:rPr lang="en-US" sz="1000" dirty="0">
                 <a:solidFill>
-                  <a:srgbClr val="3FB950"/>
-                </a:solidFill>
-                <a:latin typeface="Calibri" pitchFamily="34" charset="0"/>
-                <a:ea typeface="Calibri" pitchFamily="34" charset="-122"/>
-                <a:cs typeface="Calibri" pitchFamily="34" charset="-120"/>
-              </a:rPr>
-              <a:t>非同步解耦</a:t>
+                  <a:srgbClr val="4A9968"/>
+                </a:solidFill>
+                <a:latin typeface="Calibri" pitchFamily="34" charset="0"/>
+                <a:ea typeface="Calibri" pitchFamily="34" charset="-122"/>
+                <a:cs typeface="Calibri" pitchFamily="34" charset="-120"/>
+              </a:rPr>
+              <a:t>Async decoupling</a:t>
             </a:r>
             <a:endParaRPr lang="en-US" sz="1000" dirty="0"/>
           </a:p>
@@ -15633,13 +15768,13 @@
             <a:r>
               <a:rPr lang="en-US" sz="1000" dirty="0">
                 <a:solidFill>
-                  <a:srgbClr val="D29922"/>
-                </a:solidFill>
-                <a:latin typeface="Calibri" pitchFamily="34" charset="0"/>
-                <a:ea typeface="Calibri" pitchFamily="34" charset="-122"/>
-                <a:cs typeface="Calibri" pitchFamily="34" charset="-120"/>
-              </a:rPr>
-              <a:t>最終一致性問題</a:t>
+                  <a:srgbClr val="B8892C"/>
+                </a:solidFill>
+                <a:latin typeface="Calibri" pitchFamily="34" charset="0"/>
+                <a:ea typeface="Calibri" pitchFamily="34" charset="-122"/>
+                <a:cs typeface="Calibri" pitchFamily="34" charset="-120"/>
+              </a:rPr>
+              <a:t>Eventual consistency issues</a:t>
             </a:r>
             <a:endParaRPr lang="en-US" sz="1000" dirty="0"/>
           </a:p>
@@ -15662,11 +15797,11 @@
             </a:avLst>
           </a:prstGeom>
           <a:solidFill>
-            <a:srgbClr val="0D1117"/>
+            <a:srgbClr val="FFFDF8"/>
           </a:solidFill>
           <a:ln w="12700">
             <a:solidFill>
-              <a:srgbClr val="F85149"/>
+              <a:srgbClr val="C4605B"/>
             </a:solidFill>
             <a:prstDash val="solid"/>
           </a:ln>
@@ -15699,13 +15834,13 @@
             <a:r>
               <a:rPr lang="en-US" sz="1000" b="1" dirty="0">
                 <a:solidFill>
-                  <a:srgbClr val="E6EDF3"/>
-                </a:solidFill>
-                <a:latin typeface="Calibri" pitchFamily="34" charset="0"/>
-                <a:ea typeface="Calibri" pitchFamily="34" charset="-122"/>
-                <a:cs typeface="Calibri" pitchFamily="34" charset="-120"/>
-              </a:rPr>
-              <a:t>🏗️ 分散式架構</a:t>
+                  <a:srgbClr val="2D2926"/>
+                </a:solidFill>
+                <a:latin typeface="Calibri" pitchFamily="34" charset="0"/>
+                <a:ea typeface="Calibri" pitchFamily="34" charset="-122"/>
+                <a:cs typeface="Calibri" pitchFamily="34" charset="-120"/>
+              </a:rPr>
+              <a:t>🏗️ Distributed Arch</a:t>
             </a:r>
             <a:endParaRPr lang="en-US" sz="1000" dirty="0"/>
           </a:p>
@@ -15738,13 +15873,13 @@
             <a:r>
               <a:rPr lang="en-US" sz="1000" dirty="0">
                 <a:solidFill>
-                  <a:srgbClr val="3FB950"/>
-                </a:solidFill>
-                <a:latin typeface="Calibri" pitchFamily="34" charset="0"/>
-                <a:ea typeface="Calibri" pitchFamily="34" charset="-122"/>
-                <a:cs typeface="Calibri" pitchFamily="34" charset="-120"/>
-              </a:rPr>
-              <a:t>高可用、可擴展</a:t>
+                  <a:srgbClr val="4A9968"/>
+                </a:solidFill>
+                <a:latin typeface="Calibri" pitchFamily="34" charset="0"/>
+                <a:ea typeface="Calibri" pitchFamily="34" charset="-122"/>
+                <a:cs typeface="Calibri" pitchFamily="34" charset="-120"/>
+              </a:rPr>
+              <a:t>HA, scalable</a:t>
             </a:r>
             <a:endParaRPr lang="en-US" sz="1000" dirty="0"/>
           </a:p>
@@ -15777,13 +15912,13 @@
             <a:r>
               <a:rPr lang="en-US" sz="1000" dirty="0">
                 <a:solidFill>
-                  <a:srgbClr val="F85149"/>
-                </a:solidFill>
-                <a:latin typeface="Calibri" pitchFamily="34" charset="0"/>
-                <a:ea typeface="Calibri" pitchFamily="34" charset="-122"/>
-                <a:cs typeface="Calibri" pitchFamily="34" charset="-120"/>
-              </a:rPr>
-              <a:t>維運 15+ 台機器！</a:t>
+                  <a:srgbClr val="C4605B"/>
+                </a:solidFill>
+                <a:latin typeface="Calibri" pitchFamily="34" charset="0"/>
+                <a:ea typeface="Calibri" pitchFamily="34" charset="-122"/>
+                <a:cs typeface="Calibri" pitchFamily="34" charset="-120"/>
+              </a:rPr>
+              <a:t>Operating 15+ machines!</a:t>
             </a:r>
             <a:endParaRPr lang="en-US" sz="1000" dirty="0"/>
           </a:p>
@@ -15806,11 +15941,11 @@
             </a:avLst>
           </a:prstGeom>
           <a:solidFill>
-            <a:srgbClr val="2A0F0F"/>
+            <a:srgbClr val="F8ECEC"/>
           </a:solidFill>
           <a:ln w="9525">
             <a:solidFill>
-              <a:srgbClr val="F85149"/>
+              <a:srgbClr val="C4605B"/>
             </a:solidFill>
             <a:prstDash val="solid"/>
           </a:ln>
@@ -15843,13 +15978,13 @@
             <a:r>
               <a:rPr lang="en-US" sz="1200" b="1" dirty="0">
                 <a:solidFill>
-                  <a:srgbClr val="F85149"/>
-                </a:solidFill>
-                <a:latin typeface="Calibri" pitchFamily="34" charset="0"/>
-                <a:ea typeface="Calibri" pitchFamily="34" charset="-122"/>
-                <a:cs typeface="Calibri" pitchFamily="34" charset="-120"/>
-              </a:rPr>
-              <a:t>複雜度 10/10 🔴</a:t>
+                  <a:srgbClr val="C4605B"/>
+                </a:solidFill>
+                <a:latin typeface="Calibri" pitchFamily="34" charset="0"/>
+                <a:ea typeface="Calibri" pitchFamily="34" charset="-122"/>
+                <a:cs typeface="Calibri" pitchFamily="34" charset="-120"/>
+              </a:rPr>
+              <a:t>Complexity 10/10 🔴</a:t>
             </a:r>
             <a:endParaRPr lang="en-US" sz="1200" dirty="0"/>
           </a:p>
@@ -15872,11 +16007,11 @@
             </a:avLst>
           </a:prstGeom>
           <a:solidFill>
-            <a:srgbClr val="2A0F0F"/>
+            <a:srgbClr val="F8ECEC"/>
           </a:solidFill>
           <a:ln w="15240">
             <a:solidFill>
-              <a:srgbClr val="F85149"/>
+              <a:srgbClr val="C4605B"/>
             </a:solidFill>
             <a:prstDash val="solid"/>
           </a:ln>
@@ -15909,13 +16044,13 @@
             <a:r>
               <a:rPr lang="en-US" sz="1200" b="1" dirty="0">
                 <a:solidFill>
-                  <a:srgbClr val="F85149"/>
-                </a:solidFill>
-                <a:latin typeface="Calibri" pitchFamily="34" charset="0"/>
-                <a:ea typeface="Calibri" pitchFamily="34" charset="-122"/>
-                <a:cs typeface="Calibri" pitchFamily="34" charset="-120"/>
-              </a:rPr>
-              <a:t>🔥  這樣下去不行了！15 台機器各自獨立設定 — 部署一次靠手動 SSH，版本飄移是常態</a:t>
+                  <a:srgbClr val="C4605B"/>
+                </a:solidFill>
+                <a:latin typeface="Calibri" pitchFamily="34" charset="0"/>
+                <a:ea typeface="Calibri" pitchFamily="34" charset="-122"/>
+                <a:cs typeface="Calibri" pitchFamily="34" charset="-120"/>
+              </a:rPr>
+              <a:t>🔥  This can't go on! 15 machines each configured independently — deployment via manual SSH, version drift is the norm</a:t>
             </a:r>
             <a:endParaRPr lang="en-US" sz="1200" dirty="0"/>
           </a:p>
@@ -15938,11 +16073,11 @@
             </a:avLst>
           </a:prstGeom>
           <a:solidFill>
-            <a:srgbClr val="0F2A1A"/>
+            <a:srgbClr val="E5F0E9"/>
           </a:solidFill>
           <a:ln w="15240">
             <a:solidFill>
-              <a:srgbClr val="3FB950"/>
+              <a:srgbClr val="4A9968"/>
             </a:solidFill>
             <a:prstDash val="solid"/>
           </a:ln>
@@ -15975,13 +16110,13 @@
             <a:r>
               <a:rPr lang="en-US" sz="1200" b="1" dirty="0">
                 <a:solidFill>
-                  <a:srgbClr val="3FB950"/>
-                </a:solidFill>
-                <a:latin typeface="Calibri" pitchFamily="34" charset="0"/>
-                <a:ea typeface="Calibri" pitchFamily="34" charset="-122"/>
-                <a:cs typeface="Calibri" pitchFamily="34" charset="-120"/>
-              </a:rPr>
-              <a:t>💡  Part 3 預告：Container 技術如何把這一切簡化 — 統一打包、環境一致、秒級部署</a:t>
+                  <a:srgbClr val="4A9968"/>
+                </a:solidFill>
+                <a:latin typeface="Calibri" pitchFamily="34" charset="0"/>
+                <a:ea typeface="Calibri" pitchFamily="34" charset="-122"/>
+                <a:cs typeface="Calibri" pitchFamily="34" charset="-120"/>
+              </a:rPr>
+              <a:t>💡  Part 3 Preview: How container technology simplifies all of this — unified packaging, consistent environments, instant deployment</a:t>
             </a:r>
             <a:endParaRPr lang="en-US" sz="1200" dirty="0"/>
           </a:p>
